--- a/docs/slide-skill/demo-en/deck.pptx
+++ b/docs/slide-skill/demo-en/deck.pptx
@@ -2422,51 +2422,7 @@
         </p:nvSpPr>
         <p:spPr>
           <a:xfrm>
-            <a:off x="508000" y="431800"/>
-            <a:ext cx="4572000" cy="228600"/>
-          </a:xfrm>
-          <a:prstGeom prst="rect">
-            <a:avLst/>
-          </a:prstGeom>
-          <a:noFill/>
-          <a:ln/>
-        </p:spPr>
-        <p:txBody>
-          <a:bodyPr wrap="square" lIns="0" tIns="0" rIns="0" bIns="0" rtlCol="0" anchor="t">
-            <a:normAutofit/>
-          </a:bodyPr>
-          <a:lstStyle/>
-          <a:p>
-            <a:pPr algn="l" indent="0" marL="0">
-              <a:lnSpc>
-                <a:spcPct val="120000"/>
-              </a:lnSpc>
-              <a:buNone/>
-            </a:pPr>
-            <a:r>
-              <a:rPr lang="en-US" sz="1100" b="1" spc="100" kern="0" dirty="0">
-                <a:solidFill>
-                  <a:srgbClr val="73B200"/>
-                </a:solidFill>
-                <a:latin typeface="IBM Plex Mono" pitchFamily="34" charset="0"/>
-                <a:ea typeface="IBM Plex Mono" pitchFamily="34" charset="-122"/>
-                <a:cs typeface="IBM Plex Mono" pitchFamily="34" charset="-120"/>
-              </a:rPr>
-              <a:t>CHALLENGE</a:t>
-            </a:r>
-            <a:endParaRPr lang="en-US" sz="1100" dirty="0"/>
-          </a:p>
-        </p:txBody>
-      </p:sp>
-      <p:sp>
-        <p:nvSpPr>
-          <p:cNvPr id="4" name="Text 1"/>
-          <p:cNvSpPr/>
-          <p:nvPr/>
-        </p:nvSpPr>
-        <p:spPr>
-          <a:xfrm>
-            <a:off x="508000" y="762000"/>
+            <a:off x="508000" y="457200"/>
             <a:ext cx="11150600" cy="863600"/>
           </a:xfrm>
           <a:prstGeom prst="rect">
@@ -2504,13 +2460,13 @@
       </p:sp>
       <p:sp>
         <p:nvSpPr>
-          <p:cNvPr id="5" name="Text 2"/>
-          <p:cNvSpPr/>
-          <p:nvPr/>
-        </p:nvSpPr>
-        <p:spPr>
-          <a:xfrm>
-            <a:off x="508000" y="1625600"/>
+          <p:cNvPr id="4" name="Text 1"/>
+          <p:cNvSpPr/>
+          <p:nvPr/>
+        </p:nvSpPr>
+        <p:spPr>
+          <a:xfrm>
+            <a:off x="508000" y="1320800"/>
             <a:ext cx="10414000" cy="457200"/>
           </a:xfrm>
           <a:prstGeom prst="rect">
@@ -2548,7 +2504,7 @@
       </p:sp>
       <p:sp>
         <p:nvSpPr>
-          <p:cNvPr id="6" name="Shape 3"/>
+          <p:cNvPr id="5" name="Shape 2"/>
           <p:cNvSpPr/>
           <p:nvPr/>
         </p:nvSpPr>
@@ -2573,36 +2529,13 @@
       </p:sp>
       <p:sp>
         <p:nvSpPr>
-          <p:cNvPr id="7" name="Shape 4"/>
-          <p:cNvSpPr/>
-          <p:nvPr/>
-        </p:nvSpPr>
-        <p:spPr>
-          <a:xfrm>
-            <a:off x="508000" y="2222500"/>
-            <a:ext cx="3581400" cy="0"/>
-          </a:xfrm>
-          <a:prstGeom prst="line">
-            <a:avLst/>
-          </a:prstGeom>
-          <a:noFill/>
-          <a:ln w="25400">
-            <a:solidFill>
-              <a:srgbClr val="B2ED1D"/>
-            </a:solidFill>
-            <a:prstDash val="solid"/>
-          </a:ln>
-        </p:spPr>
-      </p:sp>
-      <p:sp>
-        <p:nvSpPr>
-          <p:cNvPr id="8" name="Text 5"/>
-          <p:cNvSpPr/>
-          <p:nvPr/>
-        </p:nvSpPr>
-        <p:spPr>
-          <a:xfrm>
-            <a:off x="736600" y="2514600"/>
+          <p:cNvPr id="6" name="Text 3"/>
+          <p:cNvSpPr/>
+          <p:nvPr/>
+        </p:nvSpPr>
+        <p:spPr>
+          <a:xfrm>
+            <a:off x="736600" y="2501900"/>
             <a:ext cx="508000" cy="228600"/>
           </a:xfrm>
           <a:prstGeom prst="rect">
@@ -2624,7 +2557,7 @@
               <a:buNone/>
             </a:pPr>
             <a:r>
-              <a:rPr lang="en-US" sz="1000" b="1" dirty="0">
+              <a:rPr lang="en-US" sz="1100" b="1" dirty="0">
                 <a:solidFill>
                   <a:srgbClr val="73B200"/>
                 </a:solidFill>
@@ -2634,19 +2567,19 @@
               </a:rPr>
               <a:t>01</a:t>
             </a:r>
-            <a:endParaRPr lang="en-US" sz="1000" dirty="0"/>
-          </a:p>
-        </p:txBody>
-      </p:sp>
-      <p:sp>
-        <p:nvSpPr>
-          <p:cNvPr id="9" name="Text 6"/>
-          <p:cNvSpPr/>
-          <p:nvPr/>
-        </p:nvSpPr>
-        <p:spPr>
-          <a:xfrm>
-            <a:off x="736600" y="2844800"/>
+            <a:endParaRPr lang="en-US" sz="1100" dirty="0"/>
+          </a:p>
+        </p:txBody>
+      </p:sp>
+      <p:sp>
+        <p:nvSpPr>
+          <p:cNvPr id="7" name="Text 4"/>
+          <p:cNvSpPr/>
+          <p:nvPr/>
+        </p:nvSpPr>
+        <p:spPr>
+          <a:xfrm>
+            <a:off x="736600" y="2832100"/>
             <a:ext cx="3124200" cy="660400"/>
           </a:xfrm>
           <a:prstGeom prst="rect">
@@ -2684,13 +2617,13 @@
       </p:sp>
       <p:sp>
         <p:nvSpPr>
-          <p:cNvPr id="10" name="Shape 7"/>
-          <p:cNvSpPr/>
-          <p:nvPr/>
-        </p:nvSpPr>
-        <p:spPr>
-          <a:xfrm>
-            <a:off x="736600" y="3606800"/>
+          <p:cNvPr id="8" name="Shape 5"/>
+          <p:cNvSpPr/>
+          <p:nvPr/>
+        </p:nvSpPr>
+        <p:spPr>
+          <a:xfrm>
+            <a:off x="736600" y="3594100"/>
             <a:ext cx="3124200" cy="0"/>
           </a:xfrm>
           <a:prstGeom prst="line">
@@ -2707,13 +2640,13 @@
       </p:sp>
       <p:sp>
         <p:nvSpPr>
-          <p:cNvPr id="11" name="Text 8"/>
-          <p:cNvSpPr/>
-          <p:nvPr/>
-        </p:nvSpPr>
-        <p:spPr>
-          <a:xfrm>
-            <a:off x="736600" y="3759200"/>
+          <p:cNvPr id="9" name="Text 6"/>
+          <p:cNvSpPr/>
+          <p:nvPr/>
+        </p:nvSpPr>
+        <p:spPr>
+          <a:xfrm>
+            <a:off x="736600" y="3746500"/>
             <a:ext cx="3124200" cy="990600"/>
           </a:xfrm>
           <a:prstGeom prst="rect">
@@ -2751,13 +2684,193 @@
       </p:sp>
       <p:sp>
         <p:nvSpPr>
-          <p:cNvPr id="12" name="Shape 9"/>
+          <p:cNvPr id="10" name="Shape 7"/>
           <p:cNvSpPr/>
           <p:nvPr/>
         </p:nvSpPr>
         <p:spPr>
           <a:xfrm>
             <a:off x="4241800" y="2222500"/>
+            <a:ext cx="3581400" cy="2857500"/>
+          </a:xfrm>
+          <a:prstGeom prst="rect">
+            <a:avLst/>
+          </a:prstGeom>
+          <a:solidFill>
+            <a:srgbClr val="F5FBDE"/>
+          </a:solidFill>
+          <a:ln w="12700">
+            <a:solidFill>
+              <a:srgbClr val="CDCED0"/>
+            </a:solidFill>
+            <a:prstDash val="solid"/>
+          </a:ln>
+        </p:spPr>
+      </p:sp>
+      <p:sp>
+        <p:nvSpPr>
+          <p:cNvPr id="11" name="Text 8"/>
+          <p:cNvSpPr/>
+          <p:nvPr/>
+        </p:nvSpPr>
+        <p:spPr>
+          <a:xfrm>
+            <a:off x="4470400" y="2501900"/>
+            <a:ext cx="508000" cy="228600"/>
+          </a:xfrm>
+          <a:prstGeom prst="rect">
+            <a:avLst/>
+          </a:prstGeom>
+          <a:noFill/>
+          <a:ln/>
+        </p:spPr>
+        <p:txBody>
+          <a:bodyPr wrap="square" lIns="0" tIns="0" rIns="0" bIns="0" rtlCol="0" anchor="t">
+            <a:normAutofit/>
+          </a:bodyPr>
+          <a:lstStyle/>
+          <a:p>
+            <a:pPr algn="l" indent="0" marL="0">
+              <a:lnSpc>
+                <a:spcPct val="120000"/>
+              </a:lnSpc>
+              <a:buNone/>
+            </a:pPr>
+            <a:r>
+              <a:rPr lang="en-US" sz="1100" b="1" dirty="0">
+                <a:solidFill>
+                  <a:srgbClr val="73B200"/>
+                </a:solidFill>
+                <a:latin typeface="IBM Plex Mono" pitchFamily="34" charset="0"/>
+                <a:ea typeface="IBM Plex Mono" pitchFamily="34" charset="-122"/>
+                <a:cs typeface="IBM Plex Mono" pitchFamily="34" charset="-120"/>
+              </a:rPr>
+              <a:t>02</a:t>
+            </a:r>
+            <a:endParaRPr lang="en-US" sz="1100" dirty="0"/>
+          </a:p>
+        </p:txBody>
+      </p:sp>
+      <p:sp>
+        <p:nvSpPr>
+          <p:cNvPr id="12" name="Text 9"/>
+          <p:cNvSpPr/>
+          <p:nvPr/>
+        </p:nvSpPr>
+        <p:spPr>
+          <a:xfrm>
+            <a:off x="4470400" y="2832100"/>
+            <a:ext cx="3124200" cy="660400"/>
+          </a:xfrm>
+          <a:prstGeom prst="rect">
+            <a:avLst/>
+          </a:prstGeom>
+          <a:noFill/>
+          <a:ln/>
+        </p:spPr>
+        <p:txBody>
+          <a:bodyPr wrap="square" lIns="0" tIns="0" rIns="0" bIns="0" rtlCol="0" anchor="t">
+            <a:normAutofit/>
+          </a:bodyPr>
+          <a:lstStyle/>
+          <a:p>
+            <a:pPr algn="l" indent="0" marL="0">
+              <a:lnSpc>
+                <a:spcPct val="120000"/>
+              </a:lnSpc>
+              <a:buNone/>
+            </a:pPr>
+            <a:r>
+              <a:rPr lang="en-US" sz="1600" dirty="0">
+                <a:solidFill>
+                  <a:srgbClr val="050B14"/>
+                </a:solidFill>
+                <a:latin typeface="IBM Plex Sans" pitchFamily="34" charset="0"/>
+                <a:ea typeface="IBM Plex Sans" pitchFamily="34" charset="-122"/>
+                <a:cs typeface="IBM Plex Sans" pitchFamily="34" charset="-120"/>
+              </a:rPr>
+              <a:t>Digital systems cost a fortune</a:t>
+            </a:r>
+            <a:endParaRPr lang="en-US" sz="1600" dirty="0"/>
+          </a:p>
+        </p:txBody>
+      </p:sp>
+      <p:sp>
+        <p:nvSpPr>
+          <p:cNvPr id="13" name="Shape 10"/>
+          <p:cNvSpPr/>
+          <p:nvPr/>
+        </p:nvSpPr>
+        <p:spPr>
+          <a:xfrm>
+            <a:off x="4470400" y="3594100"/>
+            <a:ext cx="3124200" cy="0"/>
+          </a:xfrm>
+          <a:prstGeom prst="line">
+            <a:avLst/>
+          </a:prstGeom>
+          <a:noFill/>
+          <a:ln w="12700">
+            <a:solidFill>
+              <a:srgbClr val="CDCED0"/>
+            </a:solidFill>
+            <a:prstDash val="solid"/>
+          </a:ln>
+        </p:spPr>
+      </p:sp>
+      <p:sp>
+        <p:nvSpPr>
+          <p:cNvPr id="14" name="Text 11"/>
+          <p:cNvSpPr/>
+          <p:nvPr/>
+        </p:nvSpPr>
+        <p:spPr>
+          <a:xfrm>
+            <a:off x="4470400" y="3746500"/>
+            <a:ext cx="3124200" cy="990600"/>
+          </a:xfrm>
+          <a:prstGeom prst="rect">
+            <a:avLst/>
+          </a:prstGeom>
+          <a:noFill/>
+          <a:ln/>
+        </p:spPr>
+        <p:txBody>
+          <a:bodyPr wrap="square" lIns="0" tIns="0" rIns="0" bIns="0" rtlCol="0" anchor="t">
+            <a:normAutofit/>
+          </a:bodyPr>
+          <a:lstStyle/>
+          <a:p>
+            <a:pPr algn="l" indent="0" marL="0">
+              <a:lnSpc>
+                <a:spcPct val="145000"/>
+              </a:lnSpc>
+              <a:buNone/>
+            </a:pPr>
+            <a:r>
+              <a:rPr lang="en-US" sz="1200" dirty="0">
+                <a:solidFill>
+                  <a:srgbClr val="585C62"/>
+                </a:solidFill>
+                <a:latin typeface="IBM Plex Sans" pitchFamily="34" charset="0"/>
+                <a:ea typeface="IBM Plex Sans" pitchFamily="34" charset="-122"/>
+                <a:cs typeface="IBM Plex Sans" pitchFamily="34" charset="-120"/>
+              </a:rPr>
+              <a:t>The license is the small part. Consulting, customization, integration and operations dominate total cost.</a:t>
+            </a:r>
+            <a:endParaRPr lang="en-US" sz="1200" dirty="0"/>
+          </a:p>
+        </p:txBody>
+      </p:sp>
+      <p:sp>
+        <p:nvSpPr>
+          <p:cNvPr id="15" name="Shape 12"/>
+          <p:cNvSpPr/>
+          <p:nvPr/>
+        </p:nvSpPr>
+        <p:spPr>
+          <a:xfrm>
+            <a:off x="7975600" y="2222500"/>
             <a:ext cx="3581400" cy="2857500"/>
           </a:xfrm>
           <a:prstGeom prst="rect">
@@ -2776,36 +2889,13 @@
       </p:sp>
       <p:sp>
         <p:nvSpPr>
-          <p:cNvPr id="13" name="Shape 10"/>
-          <p:cNvSpPr/>
-          <p:nvPr/>
-        </p:nvSpPr>
-        <p:spPr>
-          <a:xfrm>
-            <a:off x="4241800" y="2222500"/>
-            <a:ext cx="3581400" cy="0"/>
-          </a:xfrm>
-          <a:prstGeom prst="line">
-            <a:avLst/>
-          </a:prstGeom>
-          <a:noFill/>
-          <a:ln w="25400">
-            <a:solidFill>
-              <a:srgbClr val="B2ED1D"/>
-            </a:solidFill>
-            <a:prstDash val="solid"/>
-          </a:ln>
-        </p:spPr>
-      </p:sp>
-      <p:sp>
-        <p:nvSpPr>
-          <p:cNvPr id="14" name="Text 11"/>
-          <p:cNvSpPr/>
-          <p:nvPr/>
-        </p:nvSpPr>
-        <p:spPr>
-          <a:xfrm>
-            <a:off x="4470400" y="2514600"/>
+          <p:cNvPr id="16" name="Text 13"/>
+          <p:cNvSpPr/>
+          <p:nvPr/>
+        </p:nvSpPr>
+        <p:spPr>
+          <a:xfrm>
+            <a:off x="8204200" y="2501900"/>
             <a:ext cx="508000" cy="228600"/>
           </a:xfrm>
           <a:prstGeom prst="rect">
@@ -2827,7 +2917,7 @@
               <a:buNone/>
             </a:pPr>
             <a:r>
-              <a:rPr lang="en-US" sz="1000" b="1" dirty="0">
+              <a:rPr lang="en-US" sz="1100" b="1" dirty="0">
                 <a:solidFill>
                   <a:srgbClr val="73B200"/>
                 </a:solidFill>
@@ -2835,21 +2925,21 @@
                 <a:ea typeface="IBM Plex Mono" pitchFamily="34" charset="-122"/>
                 <a:cs typeface="IBM Plex Mono" pitchFamily="34" charset="-120"/>
               </a:rPr>
-              <a:t>02</a:t>
-            </a:r>
-            <a:endParaRPr lang="en-US" sz="1000" dirty="0"/>
-          </a:p>
-        </p:txBody>
-      </p:sp>
-      <p:sp>
-        <p:nvSpPr>
-          <p:cNvPr id="15" name="Text 12"/>
-          <p:cNvSpPr/>
-          <p:nvPr/>
-        </p:nvSpPr>
-        <p:spPr>
-          <a:xfrm>
-            <a:off x="4470400" y="2844800"/>
+              <a:t>03</a:t>
+            </a:r>
+            <a:endParaRPr lang="en-US" sz="1100" dirty="0"/>
+          </a:p>
+        </p:txBody>
+      </p:sp>
+      <p:sp>
+        <p:nvSpPr>
+          <p:cNvPr id="17" name="Text 14"/>
+          <p:cNvSpPr/>
+          <p:nvPr/>
+        </p:nvSpPr>
+        <p:spPr>
+          <a:xfrm>
+            <a:off x="8204200" y="2832100"/>
             <a:ext cx="3124200" cy="660400"/>
           </a:xfrm>
           <a:prstGeom prst="rect">
@@ -2879,7 +2969,7 @@
                 <a:ea typeface="IBM Plex Sans" pitchFamily="34" charset="-122"/>
                 <a:cs typeface="IBM Plex Sans" pitchFamily="34" charset="-120"/>
               </a:rPr>
-              <a:t>Digital systems cost a fortune</a:t>
+              <a:t>Fragmented data, tangled integrations</a:t>
             </a:r>
             <a:endParaRPr lang="en-US" sz="1600" dirty="0"/>
           </a:p>
@@ -2887,13 +2977,13 @@
       </p:sp>
       <p:sp>
         <p:nvSpPr>
-          <p:cNvPr id="16" name="Shape 13"/>
-          <p:cNvSpPr/>
-          <p:nvPr/>
-        </p:nvSpPr>
-        <p:spPr>
-          <a:xfrm>
-            <a:off x="4470400" y="3606800"/>
+          <p:cNvPr id="18" name="Shape 15"/>
+          <p:cNvSpPr/>
+          <p:nvPr/>
+        </p:nvSpPr>
+        <p:spPr>
+          <a:xfrm>
+            <a:off x="8204200" y="3594100"/>
             <a:ext cx="3124200" cy="0"/>
           </a:xfrm>
           <a:prstGeom prst="line">
@@ -2910,13 +3000,13 @@
       </p:sp>
       <p:sp>
         <p:nvSpPr>
-          <p:cNvPr id="17" name="Text 14"/>
-          <p:cNvSpPr/>
-          <p:nvPr/>
-        </p:nvSpPr>
-        <p:spPr>
-          <a:xfrm>
-            <a:off x="4470400" y="3759200"/>
+          <p:cNvPr id="19" name="Text 16"/>
+          <p:cNvSpPr/>
+          <p:nvPr/>
+        </p:nvSpPr>
+        <p:spPr>
+          <a:xfrm>
+            <a:off x="8204200" y="3746500"/>
             <a:ext cx="3124200" cy="990600"/>
           </a:xfrm>
           <a:prstGeom prst="rect">
@@ -2946,7 +3036,7 @@
                 <a:ea typeface="IBM Plex Sans" pitchFamily="34" charset="-122"/>
                 <a:cs typeface="IBM Plex Sans" pitchFamily="34" charset="-120"/>
               </a:rPr>
-              <a:t>The license is the small part. Consulting, customization, integration and operations dominate total cost.</a:t>
+              <a:t>Each new application adds another dedicated interface and makes the next change harder.</a:t>
             </a:r>
             <a:endParaRPr lang="en-US" sz="1200" dirty="0"/>
           </a:p>
@@ -2954,21 +3044,19 @@
       </p:sp>
       <p:sp>
         <p:nvSpPr>
-          <p:cNvPr id="18" name="Shape 15"/>
-          <p:cNvSpPr/>
-          <p:nvPr/>
-        </p:nvSpPr>
-        <p:spPr>
-          <a:xfrm>
-            <a:off x="7975600" y="2222500"/>
-            <a:ext cx="3581400" cy="2857500"/>
-          </a:xfrm>
-          <a:prstGeom prst="rect">
-            <a:avLst/>
-          </a:prstGeom>
-          <a:solidFill>
-            <a:srgbClr val="FFFFFF"/>
-          </a:solidFill>
+          <p:cNvPr id="20" name="Shape 17"/>
+          <p:cNvSpPr/>
+          <p:nvPr/>
+        </p:nvSpPr>
+        <p:spPr>
+          <a:xfrm>
+            <a:off x="508000" y="5283200"/>
+            <a:ext cx="11150600" cy="0"/>
+          </a:xfrm>
+          <a:prstGeom prst="line">
+            <a:avLst/>
+          </a:prstGeom>
+          <a:noFill/>
           <a:ln w="12700">
             <a:solidFill>
               <a:srgbClr val="CDCED0"/>
@@ -2979,219 +3067,14 @@
       </p:sp>
       <p:sp>
         <p:nvSpPr>
-          <p:cNvPr id="19" name="Shape 16"/>
-          <p:cNvSpPr/>
-          <p:nvPr/>
-        </p:nvSpPr>
-        <p:spPr>
-          <a:xfrm>
-            <a:off x="7975600" y="2222500"/>
-            <a:ext cx="3581400" cy="0"/>
-          </a:xfrm>
-          <a:prstGeom prst="line">
-            <a:avLst/>
-          </a:prstGeom>
-          <a:noFill/>
-          <a:ln w="25400">
-            <a:solidFill>
-              <a:srgbClr val="B2ED1D"/>
-            </a:solidFill>
-            <a:prstDash val="solid"/>
-          </a:ln>
-        </p:spPr>
-      </p:sp>
-      <p:sp>
-        <p:nvSpPr>
-          <p:cNvPr id="20" name="Text 17"/>
-          <p:cNvSpPr/>
-          <p:nvPr/>
-        </p:nvSpPr>
-        <p:spPr>
-          <a:xfrm>
-            <a:off x="8204200" y="2514600"/>
-            <a:ext cx="508000" cy="228600"/>
-          </a:xfrm>
-          <a:prstGeom prst="rect">
-            <a:avLst/>
-          </a:prstGeom>
-          <a:noFill/>
-          <a:ln/>
-        </p:spPr>
-        <p:txBody>
-          <a:bodyPr wrap="square" lIns="0" tIns="0" rIns="0" bIns="0" rtlCol="0" anchor="t">
-            <a:normAutofit/>
-          </a:bodyPr>
-          <a:lstStyle/>
-          <a:p>
-            <a:pPr algn="l" indent="0" marL="0">
-              <a:lnSpc>
-                <a:spcPct val="120000"/>
-              </a:lnSpc>
-              <a:buNone/>
-            </a:pPr>
-            <a:r>
-              <a:rPr lang="en-US" sz="1000" b="1" dirty="0">
-                <a:solidFill>
-                  <a:srgbClr val="73B200"/>
-                </a:solidFill>
-                <a:latin typeface="IBM Plex Mono" pitchFamily="34" charset="0"/>
-                <a:ea typeface="IBM Plex Mono" pitchFamily="34" charset="-122"/>
-                <a:cs typeface="IBM Plex Mono" pitchFamily="34" charset="-120"/>
-              </a:rPr>
-              <a:t>03</a:t>
-            </a:r>
-            <a:endParaRPr lang="en-US" sz="1000" dirty="0"/>
-          </a:p>
-        </p:txBody>
-      </p:sp>
-      <p:sp>
-        <p:nvSpPr>
-          <p:cNvPr id="21" name="Text 18"/>
-          <p:cNvSpPr/>
-          <p:nvPr/>
-        </p:nvSpPr>
-        <p:spPr>
-          <a:xfrm>
-            <a:off x="8204200" y="2844800"/>
-            <a:ext cx="3124200" cy="660400"/>
-          </a:xfrm>
-          <a:prstGeom prst="rect">
-            <a:avLst/>
-          </a:prstGeom>
-          <a:noFill/>
-          <a:ln/>
-        </p:spPr>
-        <p:txBody>
-          <a:bodyPr wrap="square" lIns="0" tIns="0" rIns="0" bIns="0" rtlCol="0" anchor="t">
-            <a:normAutofit/>
-          </a:bodyPr>
-          <a:lstStyle/>
-          <a:p>
-            <a:pPr algn="l" indent="0" marL="0">
-              <a:lnSpc>
-                <a:spcPct val="120000"/>
-              </a:lnSpc>
-              <a:buNone/>
-            </a:pPr>
-            <a:r>
-              <a:rPr lang="en-US" sz="1600" dirty="0">
-                <a:solidFill>
-                  <a:srgbClr val="050B14"/>
-                </a:solidFill>
-                <a:latin typeface="IBM Plex Sans" pitchFamily="34" charset="0"/>
-                <a:ea typeface="IBM Plex Sans" pitchFamily="34" charset="-122"/>
-                <a:cs typeface="IBM Plex Sans" pitchFamily="34" charset="-120"/>
-              </a:rPr>
-              <a:t>Fragmented data, tangled integrations</a:t>
-            </a:r>
-            <a:endParaRPr lang="en-US" sz="1600" dirty="0"/>
-          </a:p>
-        </p:txBody>
-      </p:sp>
-      <p:sp>
-        <p:nvSpPr>
-          <p:cNvPr id="22" name="Shape 19"/>
-          <p:cNvSpPr/>
-          <p:nvPr/>
-        </p:nvSpPr>
-        <p:spPr>
-          <a:xfrm>
-            <a:off x="8204200" y="3606800"/>
-            <a:ext cx="3124200" cy="0"/>
-          </a:xfrm>
-          <a:prstGeom prst="line">
-            <a:avLst/>
-          </a:prstGeom>
-          <a:noFill/>
-          <a:ln w="12700">
-            <a:solidFill>
-              <a:srgbClr val="CDCED0"/>
-            </a:solidFill>
-            <a:prstDash val="solid"/>
-          </a:ln>
-        </p:spPr>
-      </p:sp>
-      <p:sp>
-        <p:nvSpPr>
-          <p:cNvPr id="23" name="Text 20"/>
-          <p:cNvSpPr/>
-          <p:nvPr/>
-        </p:nvSpPr>
-        <p:spPr>
-          <a:xfrm>
-            <a:off x="8204200" y="3759200"/>
-            <a:ext cx="3124200" cy="990600"/>
-          </a:xfrm>
-          <a:prstGeom prst="rect">
-            <a:avLst/>
-          </a:prstGeom>
-          <a:noFill/>
-          <a:ln/>
-        </p:spPr>
-        <p:txBody>
-          <a:bodyPr wrap="square" lIns="0" tIns="0" rIns="0" bIns="0" rtlCol="0" anchor="t">
-            <a:normAutofit/>
-          </a:bodyPr>
-          <a:lstStyle/>
-          <a:p>
-            <a:pPr algn="l" indent="0" marL="0">
-              <a:lnSpc>
-                <a:spcPct val="145000"/>
-              </a:lnSpc>
-              <a:buNone/>
-            </a:pPr>
-            <a:r>
-              <a:rPr lang="en-US" sz="1200" dirty="0">
-                <a:solidFill>
-                  <a:srgbClr val="585C62"/>
-                </a:solidFill>
-                <a:latin typeface="IBM Plex Sans" pitchFamily="34" charset="0"/>
-                <a:ea typeface="IBM Plex Sans" pitchFamily="34" charset="-122"/>
-                <a:cs typeface="IBM Plex Sans" pitchFamily="34" charset="-120"/>
-              </a:rPr>
-              <a:t>Each new application adds another dedicated interface and makes the next change harder.</a:t>
-            </a:r>
-            <a:endParaRPr lang="en-US" sz="1200" dirty="0"/>
-          </a:p>
-        </p:txBody>
-      </p:sp>
-      <p:sp>
-        <p:nvSpPr>
-          <p:cNvPr id="24" name="Shape 21"/>
-          <p:cNvSpPr/>
-          <p:nvPr/>
-        </p:nvSpPr>
-        <p:spPr>
-          <a:xfrm>
-            <a:off x="508000" y="5321300"/>
-            <a:ext cx="11150600" cy="647700"/>
-          </a:xfrm>
-          <a:prstGeom prst="rect">
-            <a:avLst/>
-          </a:prstGeom>
-          <a:solidFill>
-            <a:srgbClr val="F5FBDE"/>
-          </a:solidFill>
-          <a:ln w="12700">
-            <a:solidFill>
-              <a:srgbClr val="F5FBDE">
-                <a:alpha val="0"/>
-              </a:srgbClr>
-            </a:solidFill>
-            <a:prstDash val="solid"/>
-          </a:ln>
-        </p:spPr>
-      </p:sp>
-      <p:sp>
-        <p:nvSpPr>
-          <p:cNvPr id="25" name="Shape 22"/>
-          <p:cNvSpPr/>
-          <p:nvPr/>
-        </p:nvSpPr>
-        <p:spPr>
-          <a:xfrm>
-            <a:off x="508000" y="5321300"/>
-            <a:ext cx="50800" cy="647700"/>
+          <p:cNvPr id="21" name="Shape 18"/>
+          <p:cNvSpPr/>
+          <p:nvPr/>
+        </p:nvSpPr>
+        <p:spPr>
+          <a:xfrm>
+            <a:off x="508000" y="5384800"/>
+            <a:ext cx="50800" cy="558800"/>
           </a:xfrm>
           <a:prstGeom prst="rect">
             <a:avLst/>
@@ -3211,13 +3094,13 @@
       </p:sp>
       <p:sp>
         <p:nvSpPr>
-          <p:cNvPr id="26" name="Text 23"/>
-          <p:cNvSpPr/>
-          <p:nvPr/>
-        </p:nvSpPr>
-        <p:spPr>
-          <a:xfrm>
-            <a:off x="787400" y="5524500"/>
+          <p:cNvPr id="22" name="Text 19"/>
+          <p:cNvSpPr/>
+          <p:nvPr/>
+        </p:nvSpPr>
+        <p:spPr>
+          <a:xfrm>
+            <a:off x="711200" y="5461000"/>
             <a:ext cx="889000" cy="228600"/>
           </a:xfrm>
           <a:prstGeom prst="rect">
@@ -3255,14 +3138,14 @@
       </p:sp>
       <p:sp>
         <p:nvSpPr>
-          <p:cNvPr id="27" name="Text 24"/>
-          <p:cNvSpPr/>
-          <p:nvPr/>
-        </p:nvSpPr>
-        <p:spPr>
-          <a:xfrm>
-            <a:off x="1714500" y="5448300"/>
-            <a:ext cx="9271000" cy="431800"/>
+          <p:cNvPr id="23" name="Text 20"/>
+          <p:cNvSpPr/>
+          <p:nvPr/>
+        </p:nvSpPr>
+        <p:spPr>
+          <a:xfrm>
+            <a:off x="1651000" y="5435600"/>
+            <a:ext cx="9906000" cy="457200"/>
           </a:xfrm>
           <a:prstGeom prst="rect">
             <a:avLst/>
@@ -3283,7 +3166,7 @@
               <a:buNone/>
             </a:pPr>
             <a:r>
-              <a:rPr lang="en-US" sz="1300" dirty="0">
+              <a:rPr lang="en-US" sz="1400" dirty="0">
                 <a:solidFill>
                   <a:srgbClr val="050B14"/>
                 </a:solidFill>
@@ -3293,13 +3176,13 @@
               </a:rPr>
               <a:t>TCO becomes a recurring cost center instead of a compounding operational asset.</a:t>
             </a:r>
-            <a:endParaRPr lang="en-US" sz="1300" dirty="0"/>
-          </a:p>
-        </p:txBody>
-      </p:sp>
-      <p:sp>
-        <p:nvSpPr>
-          <p:cNvPr id="28" name="Text 25"/>
+            <a:endParaRPr lang="en-US" sz="1400" dirty="0"/>
+          </a:p>
+        </p:txBody>
+      </p:sp>
+      <p:sp>
+        <p:nvSpPr>
+          <p:cNvPr id="24" name="Text 21"/>
           <p:cNvSpPr/>
           <p:nvPr/>
         </p:nvSpPr>
@@ -3343,7 +3226,7 @@
       </p:sp>
       <p:sp>
         <p:nvSpPr>
-          <p:cNvPr id="29" name="Text 26"/>
+          <p:cNvPr id="25" name="Text 22"/>
           <p:cNvSpPr/>
           <p:nvPr/>
         </p:nvSpPr>
@@ -3450,7 +3333,7 @@
         <p:spPr>
           <a:xfrm>
             <a:off x="508000" y="355600"/>
-            <a:ext cx="8890000" cy="558800"/>
+            <a:ext cx="9652000" cy="660400"/>
           </a:xfrm>
           <a:prstGeom prst="rect">
             <a:avLst/>
@@ -3471,7 +3354,7 @@
               <a:buNone/>
             </a:pPr>
             <a:r>
-              <a:rPr lang="en-US" sz="3000" spc="-40" kern="0" dirty="0">
+              <a:rPr lang="en-US" sz="2600" spc="-40" kern="0" dirty="0">
                 <a:solidFill>
                   <a:srgbClr val="050B14"/>
                 </a:solidFill>
@@ -3479,9 +3362,9 @@
                 <a:ea typeface="IBM Plex Sans" pitchFamily="34" charset="-122"/>
                 <a:cs typeface="IBM Plex Sans" pitchFamily="34" charset="-120"/>
               </a:rPr>
-              <a:t>From Point-to-Point Integration to a Unified Namespace</a:t>
-            </a:r>
-            <a:endParaRPr lang="en-US" sz="3000" dirty="0"/>
+              <a:t>From point-to-point integration to a Unified Namespace</a:t>
+            </a:r>
+            <a:endParaRPr lang="en-US" sz="2600" dirty="0"/>
           </a:p>
         </p:txBody>
       </p:sp>
@@ -3493,8 +3376,8 @@
         </p:nvSpPr>
         <p:spPr>
           <a:xfrm>
-            <a:off x="508000" y="1181100"/>
-            <a:ext cx="5435600" cy="4953000"/>
+            <a:off x="508000" y="1219200"/>
+            <a:ext cx="5435600" cy="4902200"/>
           </a:xfrm>
           <a:prstGeom prst="rect">
             <a:avLst/>
@@ -3518,8 +3401,641 @@
         </p:nvSpPr>
         <p:spPr>
           <a:xfrm>
-            <a:off x="508000" y="1181100"/>
-            <a:ext cx="5435600" cy="38100"/>
+            <a:off x="508000" y="1219200"/>
+            <a:ext cx="5435600" cy="558800"/>
+          </a:xfrm>
+          <a:prstGeom prst="rect">
+            <a:avLst/>
+          </a:prstGeom>
+          <a:solidFill>
+            <a:srgbClr val="F4F4F4"/>
+          </a:solidFill>
+          <a:ln w="12700">
+            <a:solidFill>
+              <a:srgbClr val="F4F4F4">
+                <a:alpha val="0"/>
+              </a:srgbClr>
+            </a:solidFill>
+            <a:prstDash val="solid"/>
+          </a:ln>
+        </p:spPr>
+      </p:sp>
+      <p:sp>
+        <p:nvSpPr>
+          <p:cNvPr id="6" name="Text 3"/>
+          <p:cNvSpPr/>
+          <p:nvPr/>
+        </p:nvSpPr>
+        <p:spPr>
+          <a:xfrm>
+            <a:off x="812800" y="1371600"/>
+            <a:ext cx="4826000" cy="279400"/>
+          </a:xfrm>
+          <a:prstGeom prst="rect">
+            <a:avLst/>
+          </a:prstGeom>
+          <a:noFill/>
+          <a:ln/>
+        </p:spPr>
+        <p:txBody>
+          <a:bodyPr wrap="square" lIns="0" tIns="0" rIns="0" bIns="0" rtlCol="0" anchor="t">
+            <a:normAutofit/>
+          </a:bodyPr>
+          <a:lstStyle/>
+          <a:p>
+            <a:pPr algn="l" indent="0" marL="0">
+              <a:lnSpc>
+                <a:spcPct val="120000"/>
+              </a:lnSpc>
+              <a:buNone/>
+            </a:pPr>
+            <a:r>
+              <a:rPr lang="en-US" sz="1500" dirty="0">
+                <a:solidFill>
+                  <a:srgbClr val="050B14"/>
+                </a:solidFill>
+                <a:latin typeface="IBM Plex Sans" pitchFamily="34" charset="0"/>
+                <a:ea typeface="IBM Plex Sans" pitchFamily="34" charset="-122"/>
+                <a:cs typeface="IBM Plex Sans" pitchFamily="34" charset="-120"/>
+              </a:rPr>
+              <a:t>Point-to-point integration</a:t>
+            </a:r>
+            <a:endParaRPr lang="en-US" sz="1500" dirty="0"/>
+          </a:p>
+        </p:txBody>
+      </p:sp>
+      <p:sp>
+        <p:nvSpPr>
+          <p:cNvPr id="7" name="Shape 4"/>
+          <p:cNvSpPr/>
+          <p:nvPr/>
+        </p:nvSpPr>
+        <p:spPr>
+          <a:xfrm>
+            <a:off x="812800" y="1955800"/>
+            <a:ext cx="4826000" cy="0"/>
+          </a:xfrm>
+          <a:prstGeom prst="line">
+            <a:avLst/>
+          </a:prstGeom>
+          <a:noFill/>
+          <a:ln w="12700">
+            <a:solidFill>
+              <a:srgbClr val="CDCED0"/>
+            </a:solidFill>
+            <a:prstDash val="solid"/>
+          </a:ln>
+        </p:spPr>
+      </p:sp>
+      <p:sp>
+        <p:nvSpPr>
+          <p:cNvPr id="8" name="Shape 5"/>
+          <p:cNvSpPr/>
+          <p:nvPr/>
+        </p:nvSpPr>
+        <p:spPr>
+          <a:xfrm>
+            <a:off x="812800" y="2159000"/>
+            <a:ext cx="38100" cy="304800"/>
+          </a:xfrm>
+          <a:prstGeom prst="rect">
+            <a:avLst/>
+          </a:prstGeom>
+          <a:solidFill>
+            <a:srgbClr val="CDCED0"/>
+          </a:solidFill>
+          <a:ln w="12700">
+            <a:solidFill>
+              <a:srgbClr val="CDCED0">
+                <a:alpha val="0"/>
+              </a:srgbClr>
+            </a:solidFill>
+            <a:prstDash val="solid"/>
+          </a:ln>
+        </p:spPr>
+      </p:sp>
+      <p:sp>
+        <p:nvSpPr>
+          <p:cNvPr id="9" name="Text 6"/>
+          <p:cNvSpPr/>
+          <p:nvPr/>
+        </p:nvSpPr>
+        <p:spPr>
+          <a:xfrm>
+            <a:off x="1016000" y="2082800"/>
+            <a:ext cx="4572000" cy="508000"/>
+          </a:xfrm>
+          <a:prstGeom prst="rect">
+            <a:avLst/>
+          </a:prstGeom>
+          <a:noFill/>
+          <a:ln/>
+        </p:spPr>
+        <p:txBody>
+          <a:bodyPr wrap="square" lIns="0" tIns="0" rIns="0" bIns="0" rtlCol="0" anchor="ctr">
+            <a:normAutofit/>
+          </a:bodyPr>
+          <a:lstStyle/>
+          <a:p>
+            <a:pPr algn="l" indent="0" marL="0">
+              <a:lnSpc>
+                <a:spcPct val="130000"/>
+              </a:lnSpc>
+              <a:buNone/>
+            </a:pPr>
+            <a:r>
+              <a:rPr lang="en-US" sz="1300" dirty="0">
+                <a:solidFill>
+                  <a:srgbClr val="585C62"/>
+                </a:solidFill>
+                <a:latin typeface="IBM Plex Sans" pitchFamily="34" charset="0"/>
+                <a:ea typeface="IBM Plex Sans" pitchFamily="34" charset="-122"/>
+                <a:cs typeface="IBM Plex Sans" pitchFamily="34" charset="-120"/>
+              </a:rPr>
+              <a:t>Every application connects to every source separately.</a:t>
+            </a:r>
+            <a:endParaRPr lang="en-US" sz="1300" dirty="0"/>
+          </a:p>
+        </p:txBody>
+      </p:sp>
+      <p:sp>
+        <p:nvSpPr>
+          <p:cNvPr id="10" name="Shape 7"/>
+          <p:cNvSpPr/>
+          <p:nvPr/>
+        </p:nvSpPr>
+        <p:spPr>
+          <a:xfrm>
+            <a:off x="812800" y="2667000"/>
+            <a:ext cx="4826000" cy="0"/>
+          </a:xfrm>
+          <a:prstGeom prst="line">
+            <a:avLst/>
+          </a:prstGeom>
+          <a:noFill/>
+          <a:ln w="12700">
+            <a:solidFill>
+              <a:srgbClr val="CDCED0"/>
+            </a:solidFill>
+            <a:prstDash val="solid"/>
+          </a:ln>
+        </p:spPr>
+      </p:sp>
+      <p:sp>
+        <p:nvSpPr>
+          <p:cNvPr id="11" name="Shape 8"/>
+          <p:cNvSpPr/>
+          <p:nvPr/>
+        </p:nvSpPr>
+        <p:spPr>
+          <a:xfrm>
+            <a:off x="812800" y="2870200"/>
+            <a:ext cx="38100" cy="304800"/>
+          </a:xfrm>
+          <a:prstGeom prst="rect">
+            <a:avLst/>
+          </a:prstGeom>
+          <a:solidFill>
+            <a:srgbClr val="CDCED0"/>
+          </a:solidFill>
+          <a:ln w="12700">
+            <a:solidFill>
+              <a:srgbClr val="CDCED0">
+                <a:alpha val="0"/>
+              </a:srgbClr>
+            </a:solidFill>
+            <a:prstDash val="solid"/>
+          </a:ln>
+        </p:spPr>
+      </p:sp>
+      <p:sp>
+        <p:nvSpPr>
+          <p:cNvPr id="12" name="Text 9"/>
+          <p:cNvSpPr/>
+          <p:nvPr/>
+        </p:nvSpPr>
+        <p:spPr>
+          <a:xfrm>
+            <a:off x="1016000" y="2794000"/>
+            <a:ext cx="4572000" cy="508000"/>
+          </a:xfrm>
+          <a:prstGeom prst="rect">
+            <a:avLst/>
+          </a:prstGeom>
+          <a:noFill/>
+          <a:ln/>
+        </p:spPr>
+        <p:txBody>
+          <a:bodyPr wrap="square" lIns="0" tIns="0" rIns="0" bIns="0" rtlCol="0" anchor="ctr">
+            <a:normAutofit/>
+          </a:bodyPr>
+          <a:lstStyle/>
+          <a:p>
+            <a:pPr algn="l" indent="0" marL="0">
+              <a:lnSpc>
+                <a:spcPct val="130000"/>
+              </a:lnSpc>
+              <a:buNone/>
+            </a:pPr>
+            <a:r>
+              <a:rPr lang="en-US" sz="1300" dirty="0">
+                <a:solidFill>
+                  <a:srgbClr val="585C62"/>
+                </a:solidFill>
+                <a:latin typeface="IBM Plex Sans" pitchFamily="34" charset="0"/>
+                <a:ea typeface="IBM Plex Sans" pitchFamily="34" charset="-122"/>
+                <a:cs typeface="IBM Plex Sans" pitchFamily="34" charset="-120"/>
+              </a:rPr>
+              <a:t>Semantic context is duplicated across projects.</a:t>
+            </a:r>
+            <a:endParaRPr lang="en-US" sz="1300" dirty="0"/>
+          </a:p>
+        </p:txBody>
+      </p:sp>
+      <p:sp>
+        <p:nvSpPr>
+          <p:cNvPr id="13" name="Shape 10"/>
+          <p:cNvSpPr/>
+          <p:nvPr/>
+        </p:nvSpPr>
+        <p:spPr>
+          <a:xfrm>
+            <a:off x="812800" y="3378200"/>
+            <a:ext cx="4826000" cy="0"/>
+          </a:xfrm>
+          <a:prstGeom prst="line">
+            <a:avLst/>
+          </a:prstGeom>
+          <a:noFill/>
+          <a:ln w="12700">
+            <a:solidFill>
+              <a:srgbClr val="CDCED0"/>
+            </a:solidFill>
+            <a:prstDash val="solid"/>
+          </a:ln>
+        </p:spPr>
+      </p:sp>
+      <p:sp>
+        <p:nvSpPr>
+          <p:cNvPr id="14" name="Shape 11"/>
+          <p:cNvSpPr/>
+          <p:nvPr/>
+        </p:nvSpPr>
+        <p:spPr>
+          <a:xfrm>
+            <a:off x="812800" y="3581400"/>
+            <a:ext cx="38100" cy="304800"/>
+          </a:xfrm>
+          <a:prstGeom prst="rect">
+            <a:avLst/>
+          </a:prstGeom>
+          <a:solidFill>
+            <a:srgbClr val="CDCED0"/>
+          </a:solidFill>
+          <a:ln w="12700">
+            <a:solidFill>
+              <a:srgbClr val="CDCED0">
+                <a:alpha val="0"/>
+              </a:srgbClr>
+            </a:solidFill>
+            <a:prstDash val="solid"/>
+          </a:ln>
+        </p:spPr>
+      </p:sp>
+      <p:sp>
+        <p:nvSpPr>
+          <p:cNvPr id="15" name="Text 12"/>
+          <p:cNvSpPr/>
+          <p:nvPr/>
+        </p:nvSpPr>
+        <p:spPr>
+          <a:xfrm>
+            <a:off x="1016000" y="3505200"/>
+            <a:ext cx="4572000" cy="508000"/>
+          </a:xfrm>
+          <a:prstGeom prst="rect">
+            <a:avLst/>
+          </a:prstGeom>
+          <a:noFill/>
+          <a:ln/>
+        </p:spPr>
+        <p:txBody>
+          <a:bodyPr wrap="square" lIns="0" tIns="0" rIns="0" bIns="0" rtlCol="0" anchor="ctr">
+            <a:normAutofit/>
+          </a:bodyPr>
+          <a:lstStyle/>
+          <a:p>
+            <a:pPr algn="l" indent="0" marL="0">
+              <a:lnSpc>
+                <a:spcPct val="130000"/>
+              </a:lnSpc>
+              <a:buNone/>
+            </a:pPr>
+            <a:r>
+              <a:rPr lang="en-US" sz="1300" dirty="0">
+                <a:solidFill>
+                  <a:srgbClr val="585C62"/>
+                </a:solidFill>
+                <a:latin typeface="IBM Plex Sans" pitchFamily="34" charset="0"/>
+                <a:ea typeface="IBM Plex Sans" pitchFamily="34" charset="-122"/>
+                <a:cs typeface="IBM Plex Sans" pitchFamily="34" charset="-120"/>
+              </a:rPr>
+              <a:t>A small change breaks multiple interfaces.</a:t>
+            </a:r>
+            <a:endParaRPr lang="en-US" sz="1300" dirty="0"/>
+          </a:p>
+        </p:txBody>
+      </p:sp>
+      <p:sp>
+        <p:nvSpPr>
+          <p:cNvPr id="16" name="Shape 13"/>
+          <p:cNvSpPr/>
+          <p:nvPr/>
+        </p:nvSpPr>
+        <p:spPr>
+          <a:xfrm>
+            <a:off x="812800" y="4089400"/>
+            <a:ext cx="4826000" cy="0"/>
+          </a:xfrm>
+          <a:prstGeom prst="line">
+            <a:avLst/>
+          </a:prstGeom>
+          <a:noFill/>
+          <a:ln w="12700">
+            <a:solidFill>
+              <a:srgbClr val="CDCED0"/>
+            </a:solidFill>
+            <a:prstDash val="solid"/>
+          </a:ln>
+        </p:spPr>
+      </p:sp>
+      <p:sp>
+        <p:nvSpPr>
+          <p:cNvPr id="17" name="Shape 14"/>
+          <p:cNvSpPr/>
+          <p:nvPr/>
+        </p:nvSpPr>
+        <p:spPr>
+          <a:xfrm>
+            <a:off x="812800" y="4292600"/>
+            <a:ext cx="38100" cy="304800"/>
+          </a:xfrm>
+          <a:prstGeom prst="rect">
+            <a:avLst/>
+          </a:prstGeom>
+          <a:solidFill>
+            <a:srgbClr val="CDCED0"/>
+          </a:solidFill>
+          <a:ln w="12700">
+            <a:solidFill>
+              <a:srgbClr val="CDCED0">
+                <a:alpha val="0"/>
+              </a:srgbClr>
+            </a:solidFill>
+            <a:prstDash val="solid"/>
+          </a:ln>
+        </p:spPr>
+      </p:sp>
+      <p:sp>
+        <p:nvSpPr>
+          <p:cNvPr id="18" name="Text 15"/>
+          <p:cNvSpPr/>
+          <p:nvPr/>
+        </p:nvSpPr>
+        <p:spPr>
+          <a:xfrm>
+            <a:off x="1016000" y="4216400"/>
+            <a:ext cx="4572000" cy="508000"/>
+          </a:xfrm>
+          <a:prstGeom prst="rect">
+            <a:avLst/>
+          </a:prstGeom>
+          <a:noFill/>
+          <a:ln/>
+        </p:spPr>
+        <p:txBody>
+          <a:bodyPr wrap="square" lIns="0" tIns="0" rIns="0" bIns="0" rtlCol="0" anchor="ctr">
+            <a:normAutofit/>
+          </a:bodyPr>
+          <a:lstStyle/>
+          <a:p>
+            <a:pPr algn="l" indent="0" marL="0">
+              <a:lnSpc>
+                <a:spcPct val="130000"/>
+              </a:lnSpc>
+              <a:buNone/>
+            </a:pPr>
+            <a:r>
+              <a:rPr lang="en-US" sz="1300" dirty="0">
+                <a:solidFill>
+                  <a:srgbClr val="585C62"/>
+                </a:solidFill>
+                <a:latin typeface="IBM Plex Sans" pitchFamily="34" charset="0"/>
+                <a:ea typeface="IBM Plex Sans" pitchFamily="34" charset="-122"/>
+                <a:cs typeface="IBM Plex Sans" pitchFamily="34" charset="-120"/>
+              </a:rPr>
+              <a:t>Integration cost grows with every new app.</a:t>
+            </a:r>
+            <a:endParaRPr lang="en-US" sz="1300" dirty="0"/>
+          </a:p>
+        </p:txBody>
+      </p:sp>
+      <p:sp>
+        <p:nvSpPr>
+          <p:cNvPr id="19" name="Shape 16"/>
+          <p:cNvSpPr/>
+          <p:nvPr/>
+        </p:nvSpPr>
+        <p:spPr>
+          <a:xfrm>
+            <a:off x="812800" y="4927600"/>
+            <a:ext cx="4826000" cy="0"/>
+          </a:xfrm>
+          <a:prstGeom prst="line">
+            <a:avLst/>
+          </a:prstGeom>
+          <a:noFill/>
+          <a:ln w="12700">
+            <a:solidFill>
+              <a:srgbClr val="CDCED0"/>
+            </a:solidFill>
+            <a:prstDash val="solid"/>
+          </a:ln>
+        </p:spPr>
+      </p:sp>
+      <p:sp>
+        <p:nvSpPr>
+          <p:cNvPr id="20" name="Text 17"/>
+          <p:cNvSpPr/>
+          <p:nvPr/>
+        </p:nvSpPr>
+        <p:spPr>
+          <a:xfrm>
+            <a:off x="812800" y="5080000"/>
+            <a:ext cx="4826000" cy="355600"/>
+          </a:xfrm>
+          <a:prstGeom prst="rect">
+            <a:avLst/>
+          </a:prstGeom>
+          <a:noFill/>
+          <a:ln/>
+        </p:spPr>
+        <p:txBody>
+          <a:bodyPr wrap="square" lIns="0" tIns="0" rIns="0" bIns="0" rtlCol="0" anchor="t">
+            <a:normAutofit/>
+          </a:bodyPr>
+          <a:lstStyle/>
+          <a:p>
+            <a:pPr algn="l" indent="0" marL="0">
+              <a:lnSpc>
+                <a:spcPct val="120000"/>
+              </a:lnSpc>
+              <a:buNone/>
+            </a:pPr>
+            <a:r>
+              <a:rPr lang="en-US" sz="1000" dirty="0">
+                <a:solidFill>
+                  <a:srgbClr val="585C62"/>
+                </a:solidFill>
+                <a:latin typeface="IBM Plex Mono" pitchFamily="34" charset="0"/>
+                <a:ea typeface="IBM Plex Mono" pitchFamily="34" charset="-122"/>
+                <a:cs typeface="IBM Plex Mono" pitchFamily="34" charset="-120"/>
+              </a:rPr>
+              <a:t>Repeat again and again.</a:t>
+            </a:r>
+            <a:endParaRPr lang="en-US" sz="1000" dirty="0"/>
+          </a:p>
+        </p:txBody>
+      </p:sp>
+      <p:sp>
+        <p:nvSpPr>
+          <p:cNvPr id="21" name="Shape 18"/>
+          <p:cNvSpPr/>
+          <p:nvPr/>
+        </p:nvSpPr>
+        <p:spPr>
+          <a:xfrm>
+            <a:off x="6261100" y="1219200"/>
+            <a:ext cx="5435600" cy="4902200"/>
+          </a:xfrm>
+          <a:prstGeom prst="rect">
+            <a:avLst/>
+          </a:prstGeom>
+          <a:solidFill>
+            <a:srgbClr val="FFFFFF"/>
+          </a:solidFill>
+          <a:ln w="12700">
+            <a:solidFill>
+              <a:srgbClr val="CDCED0"/>
+            </a:solidFill>
+            <a:prstDash val="solid"/>
+          </a:ln>
+        </p:spPr>
+      </p:sp>
+      <p:sp>
+        <p:nvSpPr>
+          <p:cNvPr id="22" name="Shape 19"/>
+          <p:cNvSpPr/>
+          <p:nvPr/>
+        </p:nvSpPr>
+        <p:spPr>
+          <a:xfrm>
+            <a:off x="6261100" y="1219200"/>
+            <a:ext cx="5435600" cy="558800"/>
+          </a:xfrm>
+          <a:prstGeom prst="rect">
+            <a:avLst/>
+          </a:prstGeom>
+          <a:solidFill>
+            <a:srgbClr val="F5FBDE"/>
+          </a:solidFill>
+          <a:ln w="12700">
+            <a:solidFill>
+              <a:srgbClr val="F5FBDE">
+                <a:alpha val="0"/>
+              </a:srgbClr>
+            </a:solidFill>
+            <a:prstDash val="solid"/>
+          </a:ln>
+        </p:spPr>
+      </p:sp>
+      <p:sp>
+        <p:nvSpPr>
+          <p:cNvPr id="23" name="Text 20"/>
+          <p:cNvSpPr/>
+          <p:nvPr/>
+        </p:nvSpPr>
+        <p:spPr>
+          <a:xfrm>
+            <a:off x="6565900" y="1371600"/>
+            <a:ext cx="4826000" cy="279400"/>
+          </a:xfrm>
+          <a:prstGeom prst="rect">
+            <a:avLst/>
+          </a:prstGeom>
+          <a:noFill/>
+          <a:ln/>
+        </p:spPr>
+        <p:txBody>
+          <a:bodyPr wrap="square" lIns="0" tIns="0" rIns="0" bIns="0" rtlCol="0" anchor="t">
+            <a:normAutofit/>
+          </a:bodyPr>
+          <a:lstStyle/>
+          <a:p>
+            <a:pPr algn="l" indent="0" marL="0">
+              <a:lnSpc>
+                <a:spcPct val="120000"/>
+              </a:lnSpc>
+              <a:buNone/>
+            </a:pPr>
+            <a:r>
+              <a:rPr lang="en-US" sz="1500" dirty="0">
+                <a:solidFill>
+                  <a:srgbClr val="050B14"/>
+                </a:solidFill>
+                <a:latin typeface="IBM Plex Sans" pitchFamily="34" charset="0"/>
+                <a:ea typeface="IBM Plex Sans" pitchFamily="34" charset="-122"/>
+                <a:cs typeface="IBM Plex Sans" pitchFamily="34" charset="-120"/>
+              </a:rPr>
+              <a:t>Unified Namespace</a:t>
+            </a:r>
+            <a:endParaRPr lang="en-US" sz="1500" dirty="0"/>
+          </a:p>
+        </p:txBody>
+      </p:sp>
+      <p:sp>
+        <p:nvSpPr>
+          <p:cNvPr id="24" name="Shape 21"/>
+          <p:cNvSpPr/>
+          <p:nvPr/>
+        </p:nvSpPr>
+        <p:spPr>
+          <a:xfrm>
+            <a:off x="6565900" y="1955800"/>
+            <a:ext cx="4826000" cy="0"/>
+          </a:xfrm>
+          <a:prstGeom prst="line">
+            <a:avLst/>
+          </a:prstGeom>
+          <a:noFill/>
+          <a:ln w="12700">
+            <a:solidFill>
+              <a:srgbClr val="CDCED0"/>
+            </a:solidFill>
+            <a:prstDash val="solid"/>
+          </a:ln>
+        </p:spPr>
+      </p:sp>
+      <p:sp>
+        <p:nvSpPr>
+          <p:cNvPr id="25" name="Shape 22"/>
+          <p:cNvSpPr/>
+          <p:nvPr/>
+        </p:nvSpPr>
+        <p:spPr>
+          <a:xfrm>
+            <a:off x="6565900" y="2159000"/>
+            <a:ext cx="38100" cy="304800"/>
           </a:xfrm>
           <a:prstGeom prst="rect">
             <a:avLst/>
@@ -3539,420 +4055,63 @@
       </p:sp>
       <p:sp>
         <p:nvSpPr>
-          <p:cNvPr id="6" name="Shape 3"/>
-          <p:cNvSpPr/>
-          <p:nvPr/>
-        </p:nvSpPr>
-        <p:spPr>
-          <a:xfrm>
-            <a:off x="508000" y="1219200"/>
-            <a:ext cx="5435600" cy="546100"/>
-          </a:xfrm>
-          <a:prstGeom prst="rect">
-            <a:avLst/>
-          </a:prstGeom>
-          <a:solidFill>
-            <a:srgbClr val="F4F4F4"/>
-          </a:solidFill>
-          <a:ln w="12700">
-            <a:solidFill>
-              <a:srgbClr val="F4F4F4">
-                <a:alpha val="0"/>
-              </a:srgbClr>
-            </a:solidFill>
-            <a:prstDash val="solid"/>
-          </a:ln>
-        </p:spPr>
-      </p:sp>
-      <p:sp>
-        <p:nvSpPr>
-          <p:cNvPr id="7" name="Text 4"/>
-          <p:cNvSpPr/>
-          <p:nvPr/>
-        </p:nvSpPr>
-        <p:spPr>
-          <a:xfrm>
-            <a:off x="762000" y="1333500"/>
-            <a:ext cx="4927600" cy="330200"/>
-          </a:xfrm>
-          <a:prstGeom prst="rect">
-            <a:avLst/>
-          </a:prstGeom>
-          <a:noFill/>
-          <a:ln/>
-        </p:spPr>
-        <p:txBody>
-          <a:bodyPr wrap="square" lIns="0" tIns="0" rIns="0" bIns="0" rtlCol="0" anchor="t">
-            <a:normAutofit/>
-          </a:bodyPr>
-          <a:lstStyle/>
-          <a:p>
-            <a:pPr algn="ctr" indent="0" marL="0">
-              <a:lnSpc>
-                <a:spcPct val="120000"/>
-              </a:lnSpc>
-              <a:buNone/>
-            </a:pPr>
-            <a:r>
-              <a:rPr lang="en-US" sz="1700" dirty="0">
-                <a:solidFill>
-                  <a:srgbClr val="050B14"/>
+          <p:cNvPr id="26" name="Text 23"/>
+          <p:cNvSpPr/>
+          <p:nvPr/>
+        </p:nvSpPr>
+        <p:spPr>
+          <a:xfrm>
+            <a:off x="6769100" y="2082800"/>
+            <a:ext cx="4572000" cy="508000"/>
+          </a:xfrm>
+          <a:prstGeom prst="rect">
+            <a:avLst/>
+          </a:prstGeom>
+          <a:noFill/>
+          <a:ln/>
+        </p:spPr>
+        <p:txBody>
+          <a:bodyPr wrap="square" lIns="0" tIns="0" rIns="0" bIns="0" rtlCol="0" anchor="ctr">
+            <a:normAutofit/>
+          </a:bodyPr>
+          <a:lstStyle/>
+          <a:p>
+            <a:pPr algn="l" indent="0" marL="0">
+              <a:lnSpc>
+                <a:spcPct val="130000"/>
+              </a:lnSpc>
+              <a:buNone/>
+            </a:pPr>
+            <a:r>
+              <a:rPr lang="en-US" sz="1300" dirty="0">
+                <a:solidFill>
+                  <a:srgbClr val="585C62"/>
                 </a:solidFill>
                 <a:latin typeface="IBM Plex Sans" pitchFamily="34" charset="0"/>
                 <a:ea typeface="IBM Plex Sans" pitchFamily="34" charset="-122"/>
                 <a:cs typeface="IBM Plex Sans" pitchFamily="34" charset="-120"/>
               </a:rPr>
-              <a:t>Point-to-point integration</a:t>
-            </a:r>
-            <a:endParaRPr lang="en-US" sz="1700" dirty="0"/>
-          </a:p>
-        </p:txBody>
-      </p:sp>
-      <p:sp>
-        <p:nvSpPr>
-          <p:cNvPr id="8" name="Shape 5"/>
-          <p:cNvSpPr/>
-          <p:nvPr/>
-        </p:nvSpPr>
-        <p:spPr>
-          <a:xfrm>
-            <a:off x="965200" y="2222500"/>
-            <a:ext cx="127000" cy="127000"/>
-          </a:xfrm>
-          <a:prstGeom prst="rect">
-            <a:avLst/>
-          </a:prstGeom>
-          <a:solidFill>
-            <a:srgbClr val="CDCED0"/>
-          </a:solidFill>
-          <a:ln w="12700">
-            <a:solidFill>
-              <a:srgbClr val="CDCED0">
-                <a:alpha val="0"/>
-              </a:srgbClr>
-            </a:solidFill>
-            <a:prstDash val="solid"/>
-          </a:ln>
-        </p:spPr>
-      </p:sp>
-      <p:sp>
-        <p:nvSpPr>
-          <p:cNvPr id="9" name="Text 6"/>
-          <p:cNvSpPr/>
-          <p:nvPr/>
-        </p:nvSpPr>
-        <p:spPr>
-          <a:xfrm>
-            <a:off x="1244600" y="2133600"/>
-            <a:ext cx="4191000" cy="431800"/>
-          </a:xfrm>
-          <a:prstGeom prst="rect">
-            <a:avLst/>
-          </a:prstGeom>
-          <a:noFill/>
-          <a:ln/>
-        </p:spPr>
-        <p:txBody>
-          <a:bodyPr wrap="square" lIns="0" tIns="0" rIns="0" bIns="0" rtlCol="0" anchor="ctr">
-            <a:normAutofit/>
-          </a:bodyPr>
-          <a:lstStyle/>
-          <a:p>
-            <a:pPr algn="l" indent="0" marL="0">
-              <a:lnSpc>
-                <a:spcPct val="120000"/>
-              </a:lnSpc>
-              <a:buNone/>
-            </a:pPr>
-            <a:r>
-              <a:rPr lang="en-US" sz="1200" dirty="0">
-                <a:solidFill>
-                  <a:srgbClr val="585C62"/>
-                </a:solidFill>
-                <a:latin typeface="IBM Plex Sans" pitchFamily="34" charset="0"/>
-                <a:ea typeface="IBM Plex Sans" pitchFamily="34" charset="-122"/>
-                <a:cs typeface="IBM Plex Sans" pitchFamily="34" charset="-120"/>
-              </a:rPr>
-              <a:t>Every application connects to every source separately.</a:t>
-            </a:r>
-            <a:endParaRPr lang="en-US" sz="1200" dirty="0"/>
-          </a:p>
-        </p:txBody>
-      </p:sp>
-      <p:sp>
-        <p:nvSpPr>
-          <p:cNvPr id="10" name="Shape 7"/>
-          <p:cNvSpPr/>
-          <p:nvPr/>
-        </p:nvSpPr>
-        <p:spPr>
-          <a:xfrm>
-            <a:off x="965200" y="2832100"/>
-            <a:ext cx="127000" cy="127000"/>
-          </a:xfrm>
-          <a:prstGeom prst="rect">
-            <a:avLst/>
-          </a:prstGeom>
-          <a:solidFill>
-            <a:srgbClr val="CDCED0"/>
-          </a:solidFill>
-          <a:ln w="12700">
-            <a:solidFill>
-              <a:srgbClr val="CDCED0">
-                <a:alpha val="0"/>
-              </a:srgbClr>
-            </a:solidFill>
-            <a:prstDash val="solid"/>
-          </a:ln>
-        </p:spPr>
-      </p:sp>
-      <p:sp>
-        <p:nvSpPr>
-          <p:cNvPr id="11" name="Text 8"/>
-          <p:cNvSpPr/>
-          <p:nvPr/>
-        </p:nvSpPr>
-        <p:spPr>
-          <a:xfrm>
-            <a:off x="1244600" y="2743200"/>
-            <a:ext cx="4191000" cy="431800"/>
-          </a:xfrm>
-          <a:prstGeom prst="rect">
-            <a:avLst/>
-          </a:prstGeom>
-          <a:noFill/>
-          <a:ln/>
-        </p:spPr>
-        <p:txBody>
-          <a:bodyPr wrap="square" lIns="0" tIns="0" rIns="0" bIns="0" rtlCol="0" anchor="ctr">
-            <a:normAutofit/>
-          </a:bodyPr>
-          <a:lstStyle/>
-          <a:p>
-            <a:pPr algn="l" indent="0" marL="0">
-              <a:lnSpc>
-                <a:spcPct val="120000"/>
-              </a:lnSpc>
-              <a:buNone/>
-            </a:pPr>
-            <a:r>
-              <a:rPr lang="en-US" sz="1200" dirty="0">
-                <a:solidFill>
-                  <a:srgbClr val="585C62"/>
-                </a:solidFill>
-                <a:latin typeface="IBM Plex Sans" pitchFamily="34" charset="0"/>
-                <a:ea typeface="IBM Plex Sans" pitchFamily="34" charset="-122"/>
-                <a:cs typeface="IBM Plex Sans" pitchFamily="34" charset="-120"/>
-              </a:rPr>
-              <a:t>Semantic context is duplicated across projects.</a:t>
-            </a:r>
-            <a:endParaRPr lang="en-US" sz="1200" dirty="0"/>
-          </a:p>
-        </p:txBody>
-      </p:sp>
-      <p:sp>
-        <p:nvSpPr>
-          <p:cNvPr id="12" name="Shape 9"/>
-          <p:cNvSpPr/>
-          <p:nvPr/>
-        </p:nvSpPr>
-        <p:spPr>
-          <a:xfrm>
-            <a:off x="965200" y="3441700"/>
-            <a:ext cx="127000" cy="127000"/>
-          </a:xfrm>
-          <a:prstGeom prst="rect">
-            <a:avLst/>
-          </a:prstGeom>
-          <a:solidFill>
-            <a:srgbClr val="CDCED0"/>
-          </a:solidFill>
-          <a:ln w="12700">
-            <a:solidFill>
-              <a:srgbClr val="CDCED0">
-                <a:alpha val="0"/>
-              </a:srgbClr>
-            </a:solidFill>
-            <a:prstDash val="solid"/>
-          </a:ln>
-        </p:spPr>
-      </p:sp>
-      <p:sp>
-        <p:nvSpPr>
-          <p:cNvPr id="13" name="Text 10"/>
-          <p:cNvSpPr/>
-          <p:nvPr/>
-        </p:nvSpPr>
-        <p:spPr>
-          <a:xfrm>
-            <a:off x="1244600" y="3352800"/>
-            <a:ext cx="4191000" cy="431800"/>
-          </a:xfrm>
-          <a:prstGeom prst="rect">
-            <a:avLst/>
-          </a:prstGeom>
-          <a:noFill/>
-          <a:ln/>
-        </p:spPr>
-        <p:txBody>
-          <a:bodyPr wrap="square" lIns="0" tIns="0" rIns="0" bIns="0" rtlCol="0" anchor="ctr">
-            <a:normAutofit/>
-          </a:bodyPr>
-          <a:lstStyle/>
-          <a:p>
-            <a:pPr algn="l" indent="0" marL="0">
-              <a:lnSpc>
-                <a:spcPct val="120000"/>
-              </a:lnSpc>
-              <a:buNone/>
-            </a:pPr>
-            <a:r>
-              <a:rPr lang="en-US" sz="1200" dirty="0">
-                <a:solidFill>
-                  <a:srgbClr val="585C62"/>
-                </a:solidFill>
-                <a:latin typeface="IBM Plex Sans" pitchFamily="34" charset="0"/>
-                <a:ea typeface="IBM Plex Sans" pitchFamily="34" charset="-122"/>
-                <a:cs typeface="IBM Plex Sans" pitchFamily="34" charset="-120"/>
-              </a:rPr>
-              <a:t>A small change breaks multiple interfaces.</a:t>
-            </a:r>
-            <a:endParaRPr lang="en-US" sz="1200" dirty="0"/>
-          </a:p>
-        </p:txBody>
-      </p:sp>
-      <p:sp>
-        <p:nvSpPr>
-          <p:cNvPr id="14" name="Shape 11"/>
-          <p:cNvSpPr/>
-          <p:nvPr/>
-        </p:nvSpPr>
-        <p:spPr>
-          <a:xfrm>
-            <a:off x="965200" y="4051300"/>
-            <a:ext cx="127000" cy="127000"/>
-          </a:xfrm>
-          <a:prstGeom prst="rect">
-            <a:avLst/>
-          </a:prstGeom>
-          <a:solidFill>
-            <a:srgbClr val="CDCED0"/>
-          </a:solidFill>
-          <a:ln w="12700">
-            <a:solidFill>
-              <a:srgbClr val="CDCED0">
-                <a:alpha val="0"/>
-              </a:srgbClr>
-            </a:solidFill>
-            <a:prstDash val="solid"/>
-          </a:ln>
-        </p:spPr>
-      </p:sp>
-      <p:sp>
-        <p:nvSpPr>
-          <p:cNvPr id="15" name="Text 12"/>
-          <p:cNvSpPr/>
-          <p:nvPr/>
-        </p:nvSpPr>
-        <p:spPr>
-          <a:xfrm>
-            <a:off x="1244600" y="3962400"/>
-            <a:ext cx="4191000" cy="431800"/>
-          </a:xfrm>
-          <a:prstGeom prst="rect">
-            <a:avLst/>
-          </a:prstGeom>
-          <a:noFill/>
-          <a:ln/>
-        </p:spPr>
-        <p:txBody>
-          <a:bodyPr wrap="square" lIns="0" tIns="0" rIns="0" bIns="0" rtlCol="0" anchor="ctr">
-            <a:normAutofit/>
-          </a:bodyPr>
-          <a:lstStyle/>
-          <a:p>
-            <a:pPr algn="l" indent="0" marL="0">
-              <a:lnSpc>
-                <a:spcPct val="120000"/>
-              </a:lnSpc>
-              <a:buNone/>
-            </a:pPr>
-            <a:r>
-              <a:rPr lang="en-US" sz="1200" dirty="0">
-                <a:solidFill>
-                  <a:srgbClr val="585C62"/>
-                </a:solidFill>
-                <a:latin typeface="IBM Plex Sans" pitchFamily="34" charset="0"/>
-                <a:ea typeface="IBM Plex Sans" pitchFamily="34" charset="-122"/>
-                <a:cs typeface="IBM Plex Sans" pitchFamily="34" charset="-120"/>
-              </a:rPr>
-              <a:t>Integration cost grows with every new app.</a:t>
-            </a:r>
-            <a:endParaRPr lang="en-US" sz="1200" dirty="0"/>
-          </a:p>
-        </p:txBody>
-      </p:sp>
-      <p:sp>
-        <p:nvSpPr>
-          <p:cNvPr id="16" name="Text 13"/>
-          <p:cNvSpPr/>
-          <p:nvPr/>
-        </p:nvSpPr>
-        <p:spPr>
-          <a:xfrm>
-            <a:off x="812800" y="5461000"/>
-            <a:ext cx="4826000" cy="406400"/>
-          </a:xfrm>
-          <a:prstGeom prst="rect">
-            <a:avLst/>
-          </a:prstGeom>
-          <a:noFill/>
-          <a:ln/>
-        </p:spPr>
-        <p:txBody>
-          <a:bodyPr wrap="square" lIns="0" tIns="0" rIns="0" bIns="0" rtlCol="0" anchor="t">
-            <a:normAutofit/>
-          </a:bodyPr>
-          <a:lstStyle/>
-          <a:p>
-            <a:pPr algn="ctr" indent="0" marL="0">
-              <a:lnSpc>
-                <a:spcPct val="120000"/>
-              </a:lnSpc>
-              <a:buNone/>
-            </a:pPr>
-            <a:r>
-              <a:rPr lang="en-US" sz="900" dirty="0">
-                <a:solidFill>
-                  <a:srgbClr val="585C62"/>
-                </a:solidFill>
-                <a:latin typeface="IBM Plex Mono" pitchFamily="34" charset="0"/>
-                <a:ea typeface="IBM Plex Mono" pitchFamily="34" charset="-122"/>
-                <a:cs typeface="IBM Plex Mono" pitchFamily="34" charset="-120"/>
-              </a:rPr>
-              <a:t>Repeat again and again.</a:t>
-            </a:r>
-            <a:endParaRPr lang="en-US" sz="900" dirty="0"/>
-          </a:p>
-        </p:txBody>
-      </p:sp>
-      <p:sp>
-        <p:nvSpPr>
-          <p:cNvPr id="17" name="Shape 14"/>
-          <p:cNvSpPr/>
-          <p:nvPr/>
-        </p:nvSpPr>
-        <p:spPr>
-          <a:xfrm>
-            <a:off x="6261100" y="1181100"/>
-            <a:ext cx="5435600" cy="4953000"/>
-          </a:xfrm>
-          <a:prstGeom prst="rect">
-            <a:avLst/>
-          </a:prstGeom>
-          <a:solidFill>
-            <a:srgbClr val="FFFFFF"/>
-          </a:solidFill>
+              <a:t>Sources publish once into a governed namespace.</a:t>
+            </a:r>
+            <a:endParaRPr lang="en-US" sz="1300" dirty="0"/>
+          </a:p>
+        </p:txBody>
+      </p:sp>
+      <p:sp>
+        <p:nvSpPr>
+          <p:cNvPr id="27" name="Shape 24"/>
+          <p:cNvSpPr/>
+          <p:nvPr/>
+        </p:nvSpPr>
+        <p:spPr>
+          <a:xfrm>
+            <a:off x="6565900" y="2667000"/>
+            <a:ext cx="4826000" cy="0"/>
+          </a:xfrm>
+          <a:prstGeom prst="line">
+            <a:avLst/>
+          </a:prstGeom>
+          <a:noFill/>
           <a:ln w="12700">
             <a:solidFill>
               <a:srgbClr val="CDCED0"/>
@@ -3963,14 +4122,14 @@
       </p:sp>
       <p:sp>
         <p:nvSpPr>
-          <p:cNvPr id="18" name="Shape 15"/>
-          <p:cNvSpPr/>
-          <p:nvPr/>
-        </p:nvSpPr>
-        <p:spPr>
-          <a:xfrm>
-            <a:off x="6261100" y="1181100"/>
-            <a:ext cx="5435600" cy="38100"/>
+          <p:cNvPr id="28" name="Shape 25"/>
+          <p:cNvSpPr/>
+          <p:nvPr/>
+        </p:nvSpPr>
+        <p:spPr>
+          <a:xfrm>
+            <a:off x="6565900" y="2870200"/>
+            <a:ext cx="38100" cy="304800"/>
           </a:xfrm>
           <a:prstGeom prst="rect">
             <a:avLst/>
@@ -3990,26 +4149,66 @@
       </p:sp>
       <p:sp>
         <p:nvSpPr>
-          <p:cNvPr id="19" name="Shape 16"/>
-          <p:cNvSpPr/>
-          <p:nvPr/>
-        </p:nvSpPr>
-        <p:spPr>
-          <a:xfrm>
-            <a:off x="6261100" y="1219200"/>
-            <a:ext cx="5435600" cy="546100"/>
-          </a:xfrm>
-          <a:prstGeom prst="rect">
-            <a:avLst/>
-          </a:prstGeom>
-          <a:solidFill>
-            <a:srgbClr val="F5FBDE"/>
-          </a:solidFill>
+          <p:cNvPr id="29" name="Text 26"/>
+          <p:cNvSpPr/>
+          <p:nvPr/>
+        </p:nvSpPr>
+        <p:spPr>
+          <a:xfrm>
+            <a:off x="6769100" y="2794000"/>
+            <a:ext cx="4572000" cy="508000"/>
+          </a:xfrm>
+          <a:prstGeom prst="rect">
+            <a:avLst/>
+          </a:prstGeom>
+          <a:noFill/>
+          <a:ln/>
+        </p:spPr>
+        <p:txBody>
+          <a:bodyPr wrap="square" lIns="0" tIns="0" rIns="0" bIns="0" rtlCol="0" anchor="ctr">
+            <a:normAutofit/>
+          </a:bodyPr>
+          <a:lstStyle/>
+          <a:p>
+            <a:pPr algn="l" indent="0" marL="0">
+              <a:lnSpc>
+                <a:spcPct val="130000"/>
+              </a:lnSpc>
+              <a:buNone/>
+            </a:pPr>
+            <a:r>
+              <a:rPr lang="en-US" sz="1300" dirty="0">
+                <a:solidFill>
+                  <a:srgbClr val="585C62"/>
+                </a:solidFill>
+                <a:latin typeface="IBM Plex Sans" pitchFamily="34" charset="0"/>
+                <a:ea typeface="IBM Plex Sans" pitchFamily="34" charset="-122"/>
+                <a:cs typeface="IBM Plex Sans" pitchFamily="34" charset="-120"/>
+              </a:rPr>
+              <a:t>Operational context is shared and reusable.</a:t>
+            </a:r>
+            <a:endParaRPr lang="en-US" sz="1300" dirty="0"/>
+          </a:p>
+        </p:txBody>
+      </p:sp>
+      <p:sp>
+        <p:nvSpPr>
+          <p:cNvPr id="30" name="Shape 27"/>
+          <p:cNvSpPr/>
+          <p:nvPr/>
+        </p:nvSpPr>
+        <p:spPr>
+          <a:xfrm>
+            <a:off x="6565900" y="3378200"/>
+            <a:ext cx="4826000" cy="0"/>
+          </a:xfrm>
+          <a:prstGeom prst="line">
+            <a:avLst/>
+          </a:prstGeom>
+          <a:noFill/>
           <a:ln w="12700">
             <a:solidFill>
-              <a:srgbClr val="F5FBDE">
-                <a:alpha val="0"/>
-              </a:srgbClr>
+              <a:srgbClr val="CDCED0"/>
             </a:solidFill>
             <a:prstDash val="solid"/>
           </a:ln>
@@ -4017,58 +4216,14 @@
       </p:sp>
       <p:sp>
         <p:nvSpPr>
-          <p:cNvPr id="20" name="Text 17"/>
-          <p:cNvSpPr/>
-          <p:nvPr/>
-        </p:nvSpPr>
-        <p:spPr>
-          <a:xfrm>
-            <a:off x="6515100" y="1333500"/>
-            <a:ext cx="4927600" cy="330200"/>
-          </a:xfrm>
-          <a:prstGeom prst="rect">
-            <a:avLst/>
-          </a:prstGeom>
-          <a:noFill/>
-          <a:ln/>
-        </p:spPr>
-        <p:txBody>
-          <a:bodyPr wrap="square" lIns="0" tIns="0" rIns="0" bIns="0" rtlCol="0" anchor="t">
-            <a:normAutofit/>
-          </a:bodyPr>
-          <a:lstStyle/>
-          <a:p>
-            <a:pPr algn="ctr" indent="0" marL="0">
-              <a:lnSpc>
-                <a:spcPct val="120000"/>
-              </a:lnSpc>
-              <a:buNone/>
-            </a:pPr>
-            <a:r>
-              <a:rPr lang="en-US" sz="1700" dirty="0">
-                <a:solidFill>
-                  <a:srgbClr val="050B14"/>
-                </a:solidFill>
-                <a:latin typeface="IBM Plex Sans" pitchFamily="34" charset="0"/>
-                <a:ea typeface="IBM Plex Sans" pitchFamily="34" charset="-122"/>
-                <a:cs typeface="IBM Plex Sans" pitchFamily="34" charset="-120"/>
-              </a:rPr>
-              <a:t>Unified Namespace</a:t>
-            </a:r>
-            <a:endParaRPr lang="en-US" sz="1700" dirty="0"/>
-          </a:p>
-        </p:txBody>
-      </p:sp>
-      <p:sp>
-        <p:nvSpPr>
-          <p:cNvPr id="21" name="Shape 18"/>
-          <p:cNvSpPr/>
-          <p:nvPr/>
-        </p:nvSpPr>
-        <p:spPr>
-          <a:xfrm>
-            <a:off x="6718300" y="2222500"/>
-            <a:ext cx="127000" cy="127000"/>
+          <p:cNvPr id="31" name="Shape 28"/>
+          <p:cNvSpPr/>
+          <p:nvPr/>
+        </p:nvSpPr>
+        <p:spPr>
+          <a:xfrm>
+            <a:off x="6565900" y="3581400"/>
+            <a:ext cx="38100" cy="304800"/>
           </a:xfrm>
           <a:prstGeom prst="rect">
             <a:avLst/>
@@ -4088,14 +4243,14 @@
       </p:sp>
       <p:sp>
         <p:nvSpPr>
-          <p:cNvPr id="22" name="Text 19"/>
-          <p:cNvSpPr/>
-          <p:nvPr/>
-        </p:nvSpPr>
-        <p:spPr>
-          <a:xfrm>
-            <a:off x="6997700" y="2133600"/>
-            <a:ext cx="4191000" cy="431800"/>
+          <p:cNvPr id="32" name="Text 29"/>
+          <p:cNvSpPr/>
+          <p:nvPr/>
+        </p:nvSpPr>
+        <p:spPr>
+          <a:xfrm>
+            <a:off x="6769100" y="3505200"/>
+            <a:ext cx="4572000" cy="508000"/>
           </a:xfrm>
           <a:prstGeom prst="rect">
             <a:avLst/>
@@ -4111,12 +4266,12 @@
           <a:p>
             <a:pPr algn="l" indent="0" marL="0">
               <a:lnSpc>
-                <a:spcPct val="120000"/>
-              </a:lnSpc>
-              <a:buNone/>
-            </a:pPr>
-            <a:r>
-              <a:rPr lang="en-US" sz="1200" dirty="0">
+                <a:spcPct val="130000"/>
+              </a:lnSpc>
+              <a:buNone/>
+            </a:pPr>
+            <a:r>
+              <a:rPr lang="en-US" sz="1300" dirty="0">
                 <a:solidFill>
                   <a:srgbClr val="585C62"/>
                 </a:solidFill>
@@ -4124,22 +4279,45 @@
                 <a:ea typeface="IBM Plex Sans" pitchFamily="34" charset="-122"/>
                 <a:cs typeface="IBM Plex Sans" pitchFamily="34" charset="-120"/>
               </a:rPr>
-              <a:t>Sources publish once into a governed namespace.</a:t>
-            </a:r>
-            <a:endParaRPr lang="en-US" sz="1200" dirty="0"/>
-          </a:p>
-        </p:txBody>
-      </p:sp>
-      <p:sp>
-        <p:nvSpPr>
-          <p:cNvPr id="23" name="Shape 20"/>
-          <p:cNvSpPr/>
-          <p:nvPr/>
-        </p:nvSpPr>
-        <p:spPr>
-          <a:xfrm>
-            <a:off x="6718300" y="2832100"/>
-            <a:ext cx="127000" cy="127000"/>
+              <a:t>Applications read and write through one contract.</a:t>
+            </a:r>
+            <a:endParaRPr lang="en-US" sz="1300" dirty="0"/>
+          </a:p>
+        </p:txBody>
+      </p:sp>
+      <p:sp>
+        <p:nvSpPr>
+          <p:cNvPr id="33" name="Shape 30"/>
+          <p:cNvSpPr/>
+          <p:nvPr/>
+        </p:nvSpPr>
+        <p:spPr>
+          <a:xfrm>
+            <a:off x="6565900" y="4089400"/>
+            <a:ext cx="4826000" cy="0"/>
+          </a:xfrm>
+          <a:prstGeom prst="line">
+            <a:avLst/>
+          </a:prstGeom>
+          <a:noFill/>
+          <a:ln w="12700">
+            <a:solidFill>
+              <a:srgbClr val="CDCED0"/>
+            </a:solidFill>
+            <a:prstDash val="solid"/>
+          </a:ln>
+        </p:spPr>
+      </p:sp>
+      <p:sp>
+        <p:nvSpPr>
+          <p:cNvPr id="34" name="Shape 31"/>
+          <p:cNvSpPr/>
+          <p:nvPr/>
+        </p:nvSpPr>
+        <p:spPr>
+          <a:xfrm>
+            <a:off x="6565900" y="4292600"/>
+            <a:ext cx="38100" cy="304800"/>
           </a:xfrm>
           <a:prstGeom prst="rect">
             <a:avLst/>
@@ -4159,14 +4337,14 @@
       </p:sp>
       <p:sp>
         <p:nvSpPr>
-          <p:cNvPr id="24" name="Text 21"/>
-          <p:cNvSpPr/>
-          <p:nvPr/>
-        </p:nvSpPr>
-        <p:spPr>
-          <a:xfrm>
-            <a:off x="6997700" y="2743200"/>
-            <a:ext cx="4191000" cy="431800"/>
+          <p:cNvPr id="35" name="Text 32"/>
+          <p:cNvSpPr/>
+          <p:nvPr/>
+        </p:nvSpPr>
+        <p:spPr>
+          <a:xfrm>
+            <a:off x="6769100" y="4216400"/>
+            <a:ext cx="4572000" cy="508000"/>
           </a:xfrm>
           <a:prstGeom prst="rect">
             <a:avLst/>
@@ -4182,12 +4360,12 @@
           <a:p>
             <a:pPr algn="l" indent="0" marL="0">
               <a:lnSpc>
-                <a:spcPct val="120000"/>
-              </a:lnSpc>
-              <a:buNone/>
-            </a:pPr>
-            <a:r>
-              <a:rPr lang="en-US" sz="1200" dirty="0">
+                <a:spcPct val="130000"/>
+              </a:lnSpc>
+              <a:buNone/>
+            </a:pPr>
+            <a:r>
+              <a:rPr lang="en-US" sz="1300" dirty="0">
                 <a:solidFill>
                   <a:srgbClr val="585C62"/>
                 </a:solidFill>
@@ -4195,34 +4373,30 @@
                 <a:ea typeface="IBM Plex Sans" pitchFamily="34" charset="-122"/>
                 <a:cs typeface="IBM Plex Sans" pitchFamily="34" charset="-120"/>
               </a:rPr>
-              <a:t>Operational context is shared and reusable.</a:t>
-            </a:r>
-            <a:endParaRPr lang="en-US" sz="1200" dirty="0"/>
-          </a:p>
-        </p:txBody>
-      </p:sp>
-      <p:sp>
-        <p:nvSpPr>
-          <p:cNvPr id="25" name="Shape 22"/>
-          <p:cNvSpPr/>
-          <p:nvPr/>
-        </p:nvSpPr>
-        <p:spPr>
-          <a:xfrm>
-            <a:off x="6718300" y="3441700"/>
-            <a:ext cx="127000" cy="127000"/>
-          </a:xfrm>
-          <a:prstGeom prst="rect">
-            <a:avLst/>
-          </a:prstGeom>
-          <a:solidFill>
-            <a:srgbClr val="B2ED1D"/>
-          </a:solidFill>
+              <a:t>The next use case starts with the foundation in place.</a:t>
+            </a:r>
+            <a:endParaRPr lang="en-US" sz="1300" dirty="0"/>
+          </a:p>
+        </p:txBody>
+      </p:sp>
+      <p:sp>
+        <p:nvSpPr>
+          <p:cNvPr id="36" name="Shape 33"/>
+          <p:cNvSpPr/>
+          <p:nvPr/>
+        </p:nvSpPr>
+        <p:spPr>
+          <a:xfrm>
+            <a:off x="6565900" y="4927600"/>
+            <a:ext cx="4826000" cy="0"/>
+          </a:xfrm>
+          <a:prstGeom prst="line">
+            <a:avLst/>
+          </a:prstGeom>
+          <a:noFill/>
           <a:ln w="12700">
             <a:solidFill>
-              <a:srgbClr val="B2ED1D">
-                <a:alpha val="0"/>
-              </a:srgbClr>
+              <a:srgbClr val="CDCED0"/>
             </a:solidFill>
             <a:prstDash val="solid"/>
           </a:ln>
@@ -4230,23 +4404,23 @@
       </p:sp>
       <p:sp>
         <p:nvSpPr>
-          <p:cNvPr id="26" name="Text 23"/>
-          <p:cNvSpPr/>
-          <p:nvPr/>
-        </p:nvSpPr>
-        <p:spPr>
-          <a:xfrm>
-            <a:off x="6997700" y="3352800"/>
-            <a:ext cx="4191000" cy="431800"/>
-          </a:xfrm>
-          <a:prstGeom prst="rect">
-            <a:avLst/>
-          </a:prstGeom>
-          <a:noFill/>
-          <a:ln/>
-        </p:spPr>
-        <p:txBody>
-          <a:bodyPr wrap="square" lIns="0" tIns="0" rIns="0" bIns="0" rtlCol="0" anchor="ctr">
+          <p:cNvPr id="37" name="Text 34"/>
+          <p:cNvSpPr/>
+          <p:nvPr/>
+        </p:nvSpPr>
+        <p:spPr>
+          <a:xfrm>
+            <a:off x="6565900" y="5080000"/>
+            <a:ext cx="4826000" cy="355600"/>
+          </a:xfrm>
+          <a:prstGeom prst="rect">
+            <a:avLst/>
+          </a:prstGeom>
+          <a:noFill/>
+          <a:ln/>
+        </p:spPr>
+        <p:txBody>
+          <a:bodyPr wrap="square" lIns="0" tIns="0" rIns="0" bIns="0" rtlCol="0" anchor="t">
             <a:normAutofit/>
           </a:bodyPr>
           <a:lstStyle/>
@@ -4258,124 +4432,9 @@
               <a:buNone/>
             </a:pPr>
             <a:r>
-              <a:rPr lang="en-US" sz="1200" dirty="0">
-                <a:solidFill>
-                  <a:srgbClr val="585C62"/>
-                </a:solidFill>
-                <a:latin typeface="IBM Plex Sans" pitchFamily="34" charset="0"/>
-                <a:ea typeface="IBM Plex Sans" pitchFamily="34" charset="-122"/>
-                <a:cs typeface="IBM Plex Sans" pitchFamily="34" charset="-120"/>
-              </a:rPr>
-              <a:t>Applications read and write through one contract.</a:t>
-            </a:r>
-            <a:endParaRPr lang="en-US" sz="1200" dirty="0"/>
-          </a:p>
-        </p:txBody>
-      </p:sp>
-      <p:sp>
-        <p:nvSpPr>
-          <p:cNvPr id="27" name="Shape 24"/>
-          <p:cNvSpPr/>
-          <p:nvPr/>
-        </p:nvSpPr>
-        <p:spPr>
-          <a:xfrm>
-            <a:off x="6718300" y="4051300"/>
-            <a:ext cx="127000" cy="127000"/>
-          </a:xfrm>
-          <a:prstGeom prst="rect">
-            <a:avLst/>
-          </a:prstGeom>
-          <a:solidFill>
-            <a:srgbClr val="B2ED1D"/>
-          </a:solidFill>
-          <a:ln w="12700">
-            <a:solidFill>
-              <a:srgbClr val="B2ED1D">
-                <a:alpha val="0"/>
-              </a:srgbClr>
-            </a:solidFill>
-            <a:prstDash val="solid"/>
-          </a:ln>
-        </p:spPr>
-      </p:sp>
-      <p:sp>
-        <p:nvSpPr>
-          <p:cNvPr id="28" name="Text 25"/>
-          <p:cNvSpPr/>
-          <p:nvPr/>
-        </p:nvSpPr>
-        <p:spPr>
-          <a:xfrm>
-            <a:off x="6997700" y="3962400"/>
-            <a:ext cx="4191000" cy="431800"/>
-          </a:xfrm>
-          <a:prstGeom prst="rect">
-            <a:avLst/>
-          </a:prstGeom>
-          <a:noFill/>
-          <a:ln/>
-        </p:spPr>
-        <p:txBody>
-          <a:bodyPr wrap="square" lIns="0" tIns="0" rIns="0" bIns="0" rtlCol="0" anchor="ctr">
-            <a:normAutofit/>
-          </a:bodyPr>
-          <a:lstStyle/>
-          <a:p>
-            <a:pPr algn="l" indent="0" marL="0">
-              <a:lnSpc>
-                <a:spcPct val="120000"/>
-              </a:lnSpc>
-              <a:buNone/>
-            </a:pPr>
-            <a:r>
-              <a:rPr lang="en-US" sz="1200" dirty="0">
-                <a:solidFill>
-                  <a:srgbClr val="585C62"/>
-                </a:solidFill>
-                <a:latin typeface="IBM Plex Sans" pitchFamily="34" charset="0"/>
-                <a:ea typeface="IBM Plex Sans" pitchFamily="34" charset="-122"/>
-                <a:cs typeface="IBM Plex Sans" pitchFamily="34" charset="-120"/>
-              </a:rPr>
-              <a:t>The next use case starts with the foundation in place.</a:t>
-            </a:r>
-            <a:endParaRPr lang="en-US" sz="1200" dirty="0"/>
-          </a:p>
-        </p:txBody>
-      </p:sp>
-      <p:sp>
-        <p:nvSpPr>
-          <p:cNvPr id="29" name="Text 26"/>
-          <p:cNvSpPr/>
-          <p:nvPr/>
-        </p:nvSpPr>
-        <p:spPr>
-          <a:xfrm>
-            <a:off x="6565900" y="5461000"/>
-            <a:ext cx="4826000" cy="406400"/>
-          </a:xfrm>
-          <a:prstGeom prst="rect">
-            <a:avLst/>
-          </a:prstGeom>
-          <a:noFill/>
-          <a:ln/>
-        </p:spPr>
-        <p:txBody>
-          <a:bodyPr wrap="square" lIns="0" tIns="0" rIns="0" bIns="0" rtlCol="0" anchor="t">
-            <a:normAutofit/>
-          </a:bodyPr>
-          <a:lstStyle/>
-          <a:p>
-            <a:pPr algn="ctr" indent="0" marL="0">
-              <a:lnSpc>
-                <a:spcPct val="120000"/>
-              </a:lnSpc>
-              <a:buNone/>
-            </a:pPr>
-            <a:r>
-              <a:rPr lang="en-US" sz="900" dirty="0">
-                <a:solidFill>
-                  <a:srgbClr val="585C62"/>
+              <a:rPr lang="en-US" sz="1000" dirty="0">
+                <a:solidFill>
+                  <a:srgbClr val="73B200"/>
                 </a:solidFill>
                 <a:latin typeface="IBM Plex Mono" pitchFamily="34" charset="0"/>
                 <a:ea typeface="IBM Plex Mono" pitchFamily="34" charset="-122"/>
@@ -4383,13 +4442,13 @@
               </a:rPr>
               <a:t>Build once. Reuse across applications.</a:t>
             </a:r>
-            <a:endParaRPr lang="en-US" sz="900" dirty="0"/>
-          </a:p>
-        </p:txBody>
-      </p:sp>
-      <p:sp>
-        <p:nvSpPr>
-          <p:cNvPr id="30" name="Text 27"/>
+            <a:endParaRPr lang="en-US" sz="1000" dirty="0"/>
+          </a:p>
+        </p:txBody>
+      </p:sp>
+      <p:sp>
+        <p:nvSpPr>
+          <p:cNvPr id="38" name="Text 35"/>
           <p:cNvSpPr/>
           <p:nvPr/>
         </p:nvSpPr>
@@ -4433,7 +4492,7 @@
       </p:sp>
       <p:sp>
         <p:nvSpPr>
-          <p:cNvPr id="31" name="Text 28"/>
+          <p:cNvPr id="39" name="Text 36"/>
           <p:cNvSpPr/>
           <p:nvPr/>
         </p:nvSpPr>
@@ -4576,86 +4635,86 @@
           <a:p>
             <a:pPr algn="l" indent="0" marL="0">
               <a:lnSpc>
-                <a:spcPct val="96000"/>
-              </a:lnSpc>
-              <a:buNone/>
-            </a:pPr>
-            <a:r>
-              <a:rPr lang="en-US" sz="5800" dirty="0">
+                <a:spcPct val="108000"/>
+              </a:lnSpc>
+              <a:buNone/>
+            </a:pPr>
+            <a:r>
+              <a:rPr lang="en-US" sz="5200" dirty="0">
                 <a:solidFill>
                   <a:srgbClr val="FFFFFF"/>
+                </a:solidFill>
+                <a:latin typeface="Tektur" pitchFamily="34" charset="0"/>
+                <a:ea typeface="Tektur" pitchFamily="34" charset="-122"/>
+                <a:cs typeface="Tektur" pitchFamily="34" charset="-120"/>
+              </a:rPr>
+              <a:t>THE FOUNDATION IS ONLY</a:t>
+            </a:r>
+            <a:endParaRPr lang="en-US" sz="5200" dirty="0"/>
+          </a:p>
+          <a:p>
+            <a:pPr algn="l" indent="0" marL="0">
+              <a:lnSpc>
+                <a:spcPct val="108000"/>
+              </a:lnSpc>
+              <a:buNone/>
+            </a:pPr>
+            <a:r>
+              <a:rPr lang="en-US" sz="5200" dirty="0">
+                <a:solidFill>
+                  <a:srgbClr val="FFFFFF"/>
+                </a:solidFill>
+                <a:latin typeface="Tektur" pitchFamily="34" charset="0"/>
+                <a:ea typeface="Tektur" pitchFamily="34" charset="-122"/>
+                <a:cs typeface="Tektur" pitchFamily="34" charset="-120"/>
+              </a:rPr>
+              <a:t>THE BEGINNING.</a:t>
+            </a:r>
+            <a:endParaRPr lang="en-US" sz="5200" dirty="0"/>
+          </a:p>
+        </p:txBody>
+      </p:sp>
+      <p:sp>
+        <p:nvSpPr>
+          <p:cNvPr id="4" name="Text 2"/>
+          <p:cNvSpPr/>
+          <p:nvPr/>
+        </p:nvSpPr>
+        <p:spPr>
+          <a:xfrm>
+            <a:off x="660400" y="4343400"/>
+            <a:ext cx="6604000" cy="685800"/>
+          </a:xfrm>
+          <a:prstGeom prst="rect">
+            <a:avLst/>
+          </a:prstGeom>
+          <a:noFill/>
+          <a:ln/>
+        </p:spPr>
+        <p:txBody>
+          <a:bodyPr wrap="square" lIns="0" tIns="0" rIns="0" bIns="0" rtlCol="0" anchor="t">
+            <a:normAutofit/>
+          </a:bodyPr>
+          <a:lstStyle/>
+          <a:p>
+            <a:pPr algn="l" indent="0" marL="0">
+              <a:lnSpc>
+                <a:spcPct val="145000"/>
+              </a:lnSpc>
+              <a:buNone/>
+            </a:pPr>
+            <a:r>
+              <a:rPr lang="en-US" sz="1400" dirty="0">
+                <a:solidFill>
+                  <a:srgbClr val="ACAEB1"/>
                 </a:solidFill>
                 <a:latin typeface="IBM Plex Sans" pitchFamily="34" charset="0"/>
                 <a:ea typeface="IBM Plex Sans" pitchFamily="34" charset="-122"/>
                 <a:cs typeface="IBM Plex Sans" pitchFamily="34" charset="-120"/>
               </a:rPr>
-              <a:t>The foundation is only</a:t>
-            </a:r>
-            <a:endParaRPr lang="en-US" sz="5800" dirty="0"/>
-          </a:p>
-          <a:p>
-            <a:pPr algn="l" indent="0" marL="0">
-              <a:lnSpc>
-                <a:spcPct val="96000"/>
-              </a:lnSpc>
-              <a:buNone/>
-            </a:pPr>
-            <a:r>
-              <a:rPr lang="en-US" sz="5800" dirty="0">
-                <a:solidFill>
-                  <a:srgbClr val="FFFFFF"/>
-                </a:solidFill>
-                <a:latin typeface="IBM Plex Sans" pitchFamily="34" charset="0"/>
-                <a:ea typeface="IBM Plex Sans" pitchFamily="34" charset="-122"/>
-                <a:cs typeface="IBM Plex Sans" pitchFamily="34" charset="-120"/>
-              </a:rPr>
-              <a:t>the beginning.</a:t>
-            </a:r>
-            <a:endParaRPr lang="en-US" sz="5800" dirty="0"/>
-          </a:p>
-        </p:txBody>
-      </p:sp>
-      <p:sp>
-        <p:nvSpPr>
-          <p:cNvPr id="4" name="Text 2"/>
-          <p:cNvSpPr/>
-          <p:nvPr/>
-        </p:nvSpPr>
-        <p:spPr>
-          <a:xfrm>
-            <a:off x="660400" y="4343400"/>
-            <a:ext cx="5969000" cy="685800"/>
-          </a:xfrm>
-          <a:prstGeom prst="rect">
-            <a:avLst/>
-          </a:prstGeom>
-          <a:noFill/>
-          <a:ln/>
-        </p:spPr>
-        <p:txBody>
-          <a:bodyPr wrap="square" lIns="0" tIns="0" rIns="0" bIns="0" rtlCol="0" anchor="t">
-            <a:normAutofit/>
-          </a:bodyPr>
-          <a:lstStyle/>
-          <a:p>
-            <a:pPr algn="l" indent="0" marL="0">
-              <a:lnSpc>
-                <a:spcPct val="140000"/>
-              </a:lnSpc>
-              <a:buNone/>
-            </a:pPr>
-            <a:r>
-              <a:rPr lang="en-US" sz="1300" dirty="0">
-                <a:solidFill>
-                  <a:srgbClr val="ACAEB1"/>
-                </a:solidFill>
-                <a:latin typeface="IBM Plex Sans" pitchFamily="34" charset="0"/>
-                <a:ea typeface="IBM Plex Sans" pitchFamily="34" charset="-122"/>
-                <a:cs typeface="IBM Plex Sans" pitchFamily="34" charset="-120"/>
-              </a:rPr>
               <a:t>With governed industrial context in place, the next question is what teams can build on top of it.</a:t>
             </a:r>
-            <a:endParaRPr lang="en-US" sz="1300" dirty="0"/>
+            <a:endParaRPr lang="en-US" sz="1400" dirty="0"/>
           </a:p>
         </p:txBody>
       </p:sp>
@@ -4685,50 +4744,6 @@
       <p:sp>
         <p:nvSpPr>
           <p:cNvPr id="6" name="Text 4"/>
-          <p:cNvSpPr/>
-          <p:nvPr/>
-        </p:nvSpPr>
-        <p:spPr>
-          <a:xfrm>
-            <a:off x="609600" y="6146800"/>
-            <a:ext cx="5080000" cy="228600"/>
-          </a:xfrm>
-          <a:prstGeom prst="rect">
-            <a:avLst/>
-          </a:prstGeom>
-          <a:noFill/>
-          <a:ln/>
-        </p:spPr>
-        <p:txBody>
-          <a:bodyPr wrap="square" lIns="0" tIns="0" rIns="0" bIns="0" rtlCol="0" anchor="t">
-            <a:normAutofit/>
-          </a:bodyPr>
-          <a:lstStyle/>
-          <a:p>
-            <a:pPr algn="l" indent="0" marL="0">
-              <a:lnSpc>
-                <a:spcPct val="120000"/>
-              </a:lnSpc>
-              <a:buNone/>
-            </a:pPr>
-            <a:r>
-              <a:rPr lang="en-US" sz="850" spc="60" kern="0" dirty="0">
-                <a:solidFill>
-                  <a:srgbClr val="66717D"/>
-                </a:solidFill>
-                <a:latin typeface="IBM Plex Mono" pitchFamily="34" charset="0"/>
-                <a:ea typeface="IBM Plex Mono" pitchFamily="34" charset="-122"/>
-                <a:cs typeface="IBM Plex Mono" pitchFamily="34" charset="-120"/>
-              </a:rPr>
-              <a:t>SECTION DIVIDER · PURE TITLE</a:t>
-            </a:r>
-            <a:endParaRPr lang="en-US" sz="850" dirty="0"/>
-          </a:p>
-        </p:txBody>
-      </p:sp>
-      <p:sp>
-        <p:nvSpPr>
-          <p:cNvPr id="7" name="Text 5"/>
           <p:cNvSpPr/>
           <p:nvPr/>
         </p:nvSpPr>
@@ -4835,50 +4850,6 @@
         <p:spPr>
           <a:xfrm>
             <a:off x="508000" y="431800"/>
-            <a:ext cx="5334000" cy="228600"/>
-          </a:xfrm>
-          <a:prstGeom prst="rect">
-            <a:avLst/>
-          </a:prstGeom>
-          <a:noFill/>
-          <a:ln/>
-        </p:spPr>
-        <p:txBody>
-          <a:bodyPr wrap="square" lIns="0" tIns="0" rIns="0" bIns="0" rtlCol="0" anchor="t">
-            <a:normAutofit/>
-          </a:bodyPr>
-          <a:lstStyle/>
-          <a:p>
-            <a:pPr algn="l" indent="0" marL="0">
-              <a:lnSpc>
-                <a:spcPct val="120000"/>
-              </a:lnSpc>
-              <a:buNone/>
-            </a:pPr>
-            <a:r>
-              <a:rPr lang="en-US" sz="1050" b="1" spc="100" kern="0" dirty="0">
-                <a:solidFill>
-                  <a:srgbClr val="73B200"/>
-                </a:solidFill>
-                <a:latin typeface="IBM Plex Mono" pitchFamily="34" charset="0"/>
-                <a:ea typeface="IBM Plex Mono" pitchFamily="34" charset="-122"/>
-                <a:cs typeface="IBM Plex Mono" pitchFamily="34" charset="-120"/>
-              </a:rPr>
-              <a:t>APP GENERATION</a:t>
-            </a:r>
-            <a:endParaRPr lang="en-US" sz="1050" dirty="0"/>
-          </a:p>
-        </p:txBody>
-      </p:sp>
-      <p:sp>
-        <p:nvSpPr>
-          <p:cNvPr id="4" name="Text 1"/>
-          <p:cNvSpPr/>
-          <p:nvPr/>
-        </p:nvSpPr>
-        <p:spPr>
-          <a:xfrm>
-            <a:off x="508000" y="762000"/>
             <a:ext cx="11176000" cy="838200"/>
           </a:xfrm>
           <a:prstGeom prst="rect">
@@ -4895,12 +4866,12 @@
           <a:p>
             <a:pPr algn="l" indent="0" marL="0">
               <a:lnSpc>
-                <a:spcPct val="120000"/>
-              </a:lnSpc>
-              <a:buNone/>
-            </a:pPr>
-            <a:r>
-              <a:rPr lang="en-US" sz="3000" spc="-40" kern="0" dirty="0">
+                <a:spcPct val="115000"/>
+              </a:lnSpc>
+              <a:buNone/>
+            </a:pPr>
+            <a:r>
+              <a:rPr lang="en-US" sz="2800" spc="-40" kern="0" dirty="0">
                 <a:solidFill>
                   <a:srgbClr val="050B14"/>
                 </a:solidFill>
@@ -4908,11 +4879,34 @@
                 <a:ea typeface="IBM Plex Sans" pitchFamily="34" charset="-122"/>
                 <a:cs typeface="IBM Plex Sans" pitchFamily="34" charset="-120"/>
               </a:rPr>
-              <a:t>App Builder · vibe coding for industrial ops</a:t>
-            </a:r>
-            <a:endParaRPr lang="en-US" sz="3000" dirty="0"/>
-          </a:p>
-        </p:txBody>
+              <a:t>App Builder · from a brief to a running industrial app</a:t>
+            </a:r>
+            <a:endParaRPr lang="en-US" sz="2800" dirty="0"/>
+          </a:p>
+        </p:txBody>
+      </p:sp>
+      <p:sp>
+        <p:nvSpPr>
+          <p:cNvPr id="4" name="Shape 1"/>
+          <p:cNvSpPr/>
+          <p:nvPr/>
+        </p:nvSpPr>
+        <p:spPr>
+          <a:xfrm>
+            <a:off x="508000" y="1778000"/>
+            <a:ext cx="4064000" cy="0"/>
+          </a:xfrm>
+          <a:prstGeom prst="line">
+            <a:avLst/>
+          </a:prstGeom>
+          <a:noFill/>
+          <a:ln w="12700">
+            <a:solidFill>
+              <a:srgbClr val="CDCED0"/>
+            </a:solidFill>
+            <a:prstDash val="solid"/>
+          </a:ln>
+        </p:spPr>
       </p:sp>
       <p:sp>
         <p:nvSpPr>
@@ -4923,7 +4917,7 @@
         <p:spPr>
           <a:xfrm>
             <a:off x="508000" y="1930400"/>
-            <a:ext cx="38100" cy="698500"/>
+            <a:ext cx="38100" cy="508000"/>
           </a:xfrm>
           <a:prstGeom prst="rect">
             <a:avLst/>
@@ -4950,7 +4944,7 @@
         <p:spPr>
           <a:xfrm>
             <a:off x="711200" y="1905000"/>
-            <a:ext cx="3810000" cy="279400"/>
+            <a:ext cx="3810000" cy="254000"/>
           </a:xfrm>
           <a:prstGeom prst="rect">
             <a:avLst/>
@@ -4971,7 +4965,7 @@
               <a:buNone/>
             </a:pPr>
             <a:r>
-              <a:rPr lang="en-US" sz="1150" b="1" dirty="0">
+              <a:rPr lang="en-US" sz="1300" dirty="0">
                 <a:solidFill>
                   <a:srgbClr val="050B14"/>
                 </a:solidFill>
@@ -4981,7 +4975,7 @@
               </a:rPr>
               <a:t>A whole app from a single brief</a:t>
             </a:r>
-            <a:endParaRPr lang="en-US" sz="1150" dirty="0"/>
+            <a:endParaRPr lang="en-US" sz="1300" dirty="0"/>
           </a:p>
         </p:txBody>
       </p:sp>
@@ -4993,29 +4987,29 @@
         </p:nvSpPr>
         <p:spPr>
           <a:xfrm>
-            <a:off x="711200" y="2209800"/>
-            <a:ext cx="3810000" cy="482600"/>
-          </a:xfrm>
-          <a:prstGeom prst="rect">
-            <a:avLst/>
-          </a:prstGeom>
-          <a:noFill/>
-          <a:ln/>
-        </p:spPr>
-        <p:txBody>
-          <a:bodyPr wrap="square" lIns="0" tIns="0" rIns="0" bIns="0" rtlCol="0" anchor="t">
-            <a:normAutofit/>
-          </a:bodyPr>
-          <a:lstStyle/>
-          <a:p>
-            <a:pPr algn="l" indent="0" marL="0">
-              <a:lnSpc>
-                <a:spcPct val="135000"/>
-              </a:lnSpc>
-              <a:buNone/>
-            </a:pPr>
-            <a:r>
-              <a:rPr lang="en-US" sz="950" dirty="0">
+            <a:off x="711200" y="2184400"/>
+            <a:ext cx="3810000" cy="431800"/>
+          </a:xfrm>
+          <a:prstGeom prst="rect">
+            <a:avLst/>
+          </a:prstGeom>
+          <a:noFill/>
+          <a:ln/>
+        </p:spPr>
+        <p:txBody>
+          <a:bodyPr wrap="square" lIns="0" tIns="0" rIns="0" bIns="0" rtlCol="0" anchor="t">
+            <a:normAutofit/>
+          </a:bodyPr>
+          <a:lstStyle/>
+          <a:p>
+            <a:pPr algn="l" indent="0" marL="0">
+              <a:lnSpc>
+                <a:spcPct val="140000"/>
+              </a:lnSpc>
+              <a:buNone/>
+            </a:pPr>
+            <a:r>
+              <a:rPr lang="en-US" sz="1100" dirty="0">
                 <a:solidFill>
                   <a:srgbClr val="585C62"/>
                 </a:solidFill>
@@ -5025,7 +5019,7 @@
               </a:rPr>
               <a:t>Describe the task in plain English and receive a running application.</a:t>
             </a:r>
-            <a:endParaRPr lang="en-US" sz="950" dirty="0"/>
+            <a:endParaRPr lang="en-US" sz="1100" dirty="0"/>
           </a:p>
         </p:txBody>
       </p:sp>
@@ -5037,8 +5031,31 @@
         </p:nvSpPr>
         <p:spPr>
           <a:xfrm>
-            <a:off x="508000" y="2895600"/>
-            <a:ext cx="38100" cy="698500"/>
+            <a:off x="508000" y="2692400"/>
+            <a:ext cx="4064000" cy="0"/>
+          </a:xfrm>
+          <a:prstGeom prst="line">
+            <a:avLst/>
+          </a:prstGeom>
+          <a:noFill/>
+          <a:ln w="12700">
+            <a:solidFill>
+              <a:srgbClr val="CDCED0"/>
+            </a:solidFill>
+            <a:prstDash val="solid"/>
+          </a:ln>
+        </p:spPr>
+      </p:sp>
+      <p:sp>
+        <p:nvSpPr>
+          <p:cNvPr id="9" name="Shape 6"/>
+          <p:cNvSpPr/>
+          <p:nvPr/>
+        </p:nvSpPr>
+        <p:spPr>
+          <a:xfrm>
+            <a:off x="508000" y="2844800"/>
+            <a:ext cx="38100" cy="508000"/>
           </a:xfrm>
           <a:prstGeom prst="rect">
             <a:avLst/>
@@ -5058,14 +5075,14 @@
       </p:sp>
       <p:sp>
         <p:nvSpPr>
-          <p:cNvPr id="9" name="Text 6"/>
-          <p:cNvSpPr/>
-          <p:nvPr/>
-        </p:nvSpPr>
-        <p:spPr>
-          <a:xfrm>
-            <a:off x="711200" y="2870200"/>
-            <a:ext cx="3810000" cy="279400"/>
+          <p:cNvPr id="10" name="Text 7"/>
+          <p:cNvSpPr/>
+          <p:nvPr/>
+        </p:nvSpPr>
+        <p:spPr>
+          <a:xfrm>
+            <a:off x="711200" y="2819400"/>
+            <a:ext cx="3810000" cy="254000"/>
           </a:xfrm>
           <a:prstGeom prst="rect">
             <a:avLst/>
@@ -5086,7 +5103,7 @@
               <a:buNone/>
             </a:pPr>
             <a:r>
-              <a:rPr lang="en-US" sz="1150" b="1" dirty="0">
+              <a:rPr lang="en-US" sz="1300" dirty="0">
                 <a:solidFill>
                   <a:srgbClr val="050B14"/>
                 </a:solidFill>
@@ -5096,41 +5113,41 @@
               </a:rPr>
               <a:t>Auto-wired to plant data via UNS</a:t>
             </a:r>
-            <a:endParaRPr lang="en-US" sz="1150" dirty="0"/>
-          </a:p>
-        </p:txBody>
-      </p:sp>
-      <p:sp>
-        <p:nvSpPr>
-          <p:cNvPr id="10" name="Text 7"/>
-          <p:cNvSpPr/>
-          <p:nvPr/>
-        </p:nvSpPr>
-        <p:spPr>
-          <a:xfrm>
-            <a:off x="711200" y="3175000"/>
-            <a:ext cx="3810000" cy="482600"/>
-          </a:xfrm>
-          <a:prstGeom prst="rect">
-            <a:avLst/>
-          </a:prstGeom>
-          <a:noFill/>
-          <a:ln/>
-        </p:spPr>
-        <p:txBody>
-          <a:bodyPr wrap="square" lIns="0" tIns="0" rIns="0" bIns="0" rtlCol="0" anchor="t">
-            <a:normAutofit/>
-          </a:bodyPr>
-          <a:lstStyle/>
-          <a:p>
-            <a:pPr algn="l" indent="0" marL="0">
-              <a:lnSpc>
-                <a:spcPct val="135000"/>
-              </a:lnSpc>
-              <a:buNone/>
-            </a:pPr>
-            <a:r>
-              <a:rPr lang="en-US" sz="950" dirty="0">
+            <a:endParaRPr lang="en-US" sz="1300" dirty="0"/>
+          </a:p>
+        </p:txBody>
+      </p:sp>
+      <p:sp>
+        <p:nvSpPr>
+          <p:cNvPr id="11" name="Text 8"/>
+          <p:cNvSpPr/>
+          <p:nvPr/>
+        </p:nvSpPr>
+        <p:spPr>
+          <a:xfrm>
+            <a:off x="711200" y="3098800"/>
+            <a:ext cx="3810000" cy="431800"/>
+          </a:xfrm>
+          <a:prstGeom prst="rect">
+            <a:avLst/>
+          </a:prstGeom>
+          <a:noFill/>
+          <a:ln/>
+        </p:spPr>
+        <p:txBody>
+          <a:bodyPr wrap="square" lIns="0" tIns="0" rIns="0" bIns="0" rtlCol="0" anchor="t">
+            <a:normAutofit/>
+          </a:bodyPr>
+          <a:lstStyle/>
+          <a:p>
+            <a:pPr algn="l" indent="0" marL="0">
+              <a:lnSpc>
+                <a:spcPct val="140000"/>
+              </a:lnSpc>
+              <a:buNone/>
+            </a:pPr>
+            <a:r>
+              <a:rPr lang="en-US" sz="1100" dirty="0">
                 <a:solidFill>
                   <a:srgbClr val="585C62"/>
                 </a:solidFill>
@@ -5140,20 +5157,43 @@
               </a:rPr>
               <a:t>Applications use live operational context without another integration project.</a:t>
             </a:r>
-            <a:endParaRPr lang="en-US" sz="950" dirty="0"/>
-          </a:p>
-        </p:txBody>
-      </p:sp>
-      <p:sp>
-        <p:nvSpPr>
-          <p:cNvPr id="11" name="Shape 8"/>
-          <p:cNvSpPr/>
-          <p:nvPr/>
-        </p:nvSpPr>
-        <p:spPr>
-          <a:xfrm>
-            <a:off x="508000" y="3860800"/>
-            <a:ext cx="38100" cy="698500"/>
+            <a:endParaRPr lang="en-US" sz="1100" dirty="0"/>
+          </a:p>
+        </p:txBody>
+      </p:sp>
+      <p:sp>
+        <p:nvSpPr>
+          <p:cNvPr id="12" name="Shape 9"/>
+          <p:cNvSpPr/>
+          <p:nvPr/>
+        </p:nvSpPr>
+        <p:spPr>
+          <a:xfrm>
+            <a:off x="508000" y="3606800"/>
+            <a:ext cx="4064000" cy="0"/>
+          </a:xfrm>
+          <a:prstGeom prst="line">
+            <a:avLst/>
+          </a:prstGeom>
+          <a:noFill/>
+          <a:ln w="12700">
+            <a:solidFill>
+              <a:srgbClr val="CDCED0"/>
+            </a:solidFill>
+            <a:prstDash val="solid"/>
+          </a:ln>
+        </p:spPr>
+      </p:sp>
+      <p:sp>
+        <p:nvSpPr>
+          <p:cNvPr id="13" name="Shape 10"/>
+          <p:cNvSpPr/>
+          <p:nvPr/>
+        </p:nvSpPr>
+        <p:spPr>
+          <a:xfrm>
+            <a:off x="508000" y="3759200"/>
+            <a:ext cx="38100" cy="508000"/>
           </a:xfrm>
           <a:prstGeom prst="rect">
             <a:avLst/>
@@ -5173,14 +5213,14 @@
       </p:sp>
       <p:sp>
         <p:nvSpPr>
-          <p:cNvPr id="12" name="Text 9"/>
-          <p:cNvSpPr/>
-          <p:nvPr/>
-        </p:nvSpPr>
-        <p:spPr>
-          <a:xfrm>
-            <a:off x="711200" y="3835400"/>
-            <a:ext cx="3810000" cy="279400"/>
+          <p:cNvPr id="14" name="Text 11"/>
+          <p:cNvSpPr/>
+          <p:nvPr/>
+        </p:nvSpPr>
+        <p:spPr>
+          <a:xfrm>
+            <a:off x="711200" y="3733800"/>
+            <a:ext cx="3810000" cy="254000"/>
           </a:xfrm>
           <a:prstGeom prst="rect">
             <a:avLst/>
@@ -5201,7 +5241,7 @@
               <a:buNone/>
             </a:pPr>
             <a:r>
-              <a:rPr lang="en-US" sz="1150" b="1" dirty="0">
+              <a:rPr lang="en-US" sz="1300" dirty="0">
                 <a:solidFill>
                   <a:srgbClr val="050B14"/>
                 </a:solidFill>
@@ -5211,41 +5251,41 @@
               </a:rPr>
               <a:t>Enterprise governance, built in</a:t>
             </a:r>
-            <a:endParaRPr lang="en-US" sz="1150" dirty="0"/>
-          </a:p>
-        </p:txBody>
-      </p:sp>
-      <p:sp>
-        <p:nvSpPr>
-          <p:cNvPr id="13" name="Text 10"/>
-          <p:cNvSpPr/>
-          <p:nvPr/>
-        </p:nvSpPr>
-        <p:spPr>
-          <a:xfrm>
-            <a:off x="711200" y="4140200"/>
-            <a:ext cx="3810000" cy="482600"/>
-          </a:xfrm>
-          <a:prstGeom prst="rect">
-            <a:avLst/>
-          </a:prstGeom>
-          <a:noFill/>
-          <a:ln/>
-        </p:spPr>
-        <p:txBody>
-          <a:bodyPr wrap="square" lIns="0" tIns="0" rIns="0" bIns="0" rtlCol="0" anchor="t">
-            <a:normAutofit/>
-          </a:bodyPr>
-          <a:lstStyle/>
-          <a:p>
-            <a:pPr algn="l" indent="0" marL="0">
-              <a:lnSpc>
-                <a:spcPct val="135000"/>
-              </a:lnSpc>
-              <a:buNone/>
-            </a:pPr>
-            <a:r>
-              <a:rPr lang="en-US" sz="950" dirty="0">
+            <a:endParaRPr lang="en-US" sz="1300" dirty="0"/>
+          </a:p>
+        </p:txBody>
+      </p:sp>
+      <p:sp>
+        <p:nvSpPr>
+          <p:cNvPr id="15" name="Text 12"/>
+          <p:cNvSpPr/>
+          <p:nvPr/>
+        </p:nvSpPr>
+        <p:spPr>
+          <a:xfrm>
+            <a:off x="711200" y="4013200"/>
+            <a:ext cx="3810000" cy="431800"/>
+          </a:xfrm>
+          <a:prstGeom prst="rect">
+            <a:avLst/>
+          </a:prstGeom>
+          <a:noFill/>
+          <a:ln/>
+        </p:spPr>
+        <p:txBody>
+          <a:bodyPr wrap="square" lIns="0" tIns="0" rIns="0" bIns="0" rtlCol="0" anchor="t">
+            <a:normAutofit/>
+          </a:bodyPr>
+          <a:lstStyle/>
+          <a:p>
+            <a:pPr algn="l" indent="0" marL="0">
+              <a:lnSpc>
+                <a:spcPct val="140000"/>
+              </a:lnSpc>
+              <a:buNone/>
+            </a:pPr>
+            <a:r>
+              <a:rPr lang="en-US" sz="1100" dirty="0">
                 <a:solidFill>
                   <a:srgbClr val="585C62"/>
                 </a:solidFill>
@@ -5255,20 +5295,43 @@
               </a:rPr>
               <a:t>Users, permissions, audit and versioning are present from day one.</a:t>
             </a:r>
-            <a:endParaRPr lang="en-US" sz="950" dirty="0"/>
-          </a:p>
-        </p:txBody>
-      </p:sp>
-      <p:sp>
-        <p:nvSpPr>
-          <p:cNvPr id="14" name="Shape 11"/>
-          <p:cNvSpPr/>
-          <p:nvPr/>
-        </p:nvSpPr>
-        <p:spPr>
-          <a:xfrm>
-            <a:off x="508000" y="4826000"/>
-            <a:ext cx="38100" cy="698500"/>
+            <a:endParaRPr lang="en-US" sz="1100" dirty="0"/>
+          </a:p>
+        </p:txBody>
+      </p:sp>
+      <p:sp>
+        <p:nvSpPr>
+          <p:cNvPr id="16" name="Shape 13"/>
+          <p:cNvSpPr/>
+          <p:nvPr/>
+        </p:nvSpPr>
+        <p:spPr>
+          <a:xfrm>
+            <a:off x="508000" y="4521200"/>
+            <a:ext cx="4064000" cy="0"/>
+          </a:xfrm>
+          <a:prstGeom prst="line">
+            <a:avLst/>
+          </a:prstGeom>
+          <a:noFill/>
+          <a:ln w="12700">
+            <a:solidFill>
+              <a:srgbClr val="CDCED0"/>
+            </a:solidFill>
+            <a:prstDash val="solid"/>
+          </a:ln>
+        </p:spPr>
+      </p:sp>
+      <p:sp>
+        <p:nvSpPr>
+          <p:cNvPr id="17" name="Shape 14"/>
+          <p:cNvSpPr/>
+          <p:nvPr/>
+        </p:nvSpPr>
+        <p:spPr>
+          <a:xfrm>
+            <a:off x="508000" y="4673600"/>
+            <a:ext cx="38100" cy="508000"/>
           </a:xfrm>
           <a:prstGeom prst="rect">
             <a:avLst/>
@@ -5288,14 +5351,14 @@
       </p:sp>
       <p:sp>
         <p:nvSpPr>
-          <p:cNvPr id="15" name="Text 12"/>
-          <p:cNvSpPr/>
-          <p:nvPr/>
-        </p:nvSpPr>
-        <p:spPr>
-          <a:xfrm>
-            <a:off x="711200" y="4800600"/>
-            <a:ext cx="3810000" cy="279400"/>
+          <p:cNvPr id="18" name="Text 15"/>
+          <p:cNvSpPr/>
+          <p:nvPr/>
+        </p:nvSpPr>
+        <p:spPr>
+          <a:xfrm>
+            <a:off x="711200" y="4648200"/>
+            <a:ext cx="3810000" cy="254000"/>
           </a:xfrm>
           <a:prstGeom prst="rect">
             <a:avLst/>
@@ -5316,7 +5379,7 @@
               <a:buNone/>
             </a:pPr>
             <a:r>
-              <a:rPr lang="en-US" sz="1150" b="1" dirty="0">
+              <a:rPr lang="en-US" sz="1300" dirty="0">
                 <a:solidFill>
                   <a:srgbClr val="050B14"/>
                 </a:solidFill>
@@ -5326,41 +5389,41 @@
               </a:rPr>
               <a:t>Your code, your future</a:t>
             </a:r>
-            <a:endParaRPr lang="en-US" sz="1150" dirty="0"/>
-          </a:p>
-        </p:txBody>
-      </p:sp>
-      <p:sp>
-        <p:nvSpPr>
-          <p:cNvPr id="16" name="Text 13"/>
-          <p:cNvSpPr/>
-          <p:nvPr/>
-        </p:nvSpPr>
-        <p:spPr>
-          <a:xfrm>
-            <a:off x="711200" y="5105400"/>
-            <a:ext cx="3810000" cy="482600"/>
-          </a:xfrm>
-          <a:prstGeom prst="rect">
-            <a:avLst/>
-          </a:prstGeom>
-          <a:noFill/>
-          <a:ln/>
-        </p:spPr>
-        <p:txBody>
-          <a:bodyPr wrap="square" lIns="0" tIns="0" rIns="0" bIns="0" rtlCol="0" anchor="t">
-            <a:normAutofit/>
-          </a:bodyPr>
-          <a:lstStyle/>
-          <a:p>
-            <a:pPr algn="l" indent="0" marL="0">
-              <a:lnSpc>
-                <a:spcPct val="135000"/>
-              </a:lnSpc>
-              <a:buNone/>
-            </a:pPr>
-            <a:r>
-              <a:rPr lang="en-US" sz="950" dirty="0">
+            <a:endParaRPr lang="en-US" sz="1300" dirty="0"/>
+          </a:p>
+        </p:txBody>
+      </p:sp>
+      <p:sp>
+        <p:nvSpPr>
+          <p:cNvPr id="19" name="Text 16"/>
+          <p:cNvSpPr/>
+          <p:nvPr/>
+        </p:nvSpPr>
+        <p:spPr>
+          <a:xfrm>
+            <a:off x="711200" y="4927600"/>
+            <a:ext cx="3810000" cy="431800"/>
+          </a:xfrm>
+          <a:prstGeom prst="rect">
+            <a:avLst/>
+          </a:prstGeom>
+          <a:noFill/>
+          <a:ln/>
+        </p:spPr>
+        <p:txBody>
+          <a:bodyPr wrap="square" lIns="0" tIns="0" rIns="0" bIns="0" rtlCol="0" anchor="t">
+            <a:normAutofit/>
+          </a:bodyPr>
+          <a:lstStyle/>
+          <a:p>
+            <a:pPr algn="l" indent="0" marL="0">
+              <a:lnSpc>
+                <a:spcPct val="140000"/>
+              </a:lnSpc>
+              <a:buNone/>
+            </a:pPr>
+            <a:r>
+              <a:rPr lang="en-US" sz="1100" dirty="0">
                 <a:solidFill>
                   <a:srgbClr val="585C62"/>
                 </a:solidFill>
@@ -5370,19 +5433,19 @@
               </a:rPr>
               <a:t>Standard web technology keeps the application extensible and portable.</a:t>
             </a:r>
-            <a:endParaRPr lang="en-US" sz="950" dirty="0"/>
-          </a:p>
-        </p:txBody>
-      </p:sp>
-      <p:sp>
-        <p:nvSpPr>
-          <p:cNvPr id="17" name="Shape 14"/>
-          <p:cNvSpPr/>
-          <p:nvPr/>
-        </p:nvSpPr>
-        <p:spPr>
-          <a:xfrm>
-            <a:off x="4953000" y="1816100"/>
+            <a:endParaRPr lang="en-US" sz="1100" dirty="0"/>
+          </a:p>
+        </p:txBody>
+      </p:sp>
+      <p:sp>
+        <p:nvSpPr>
+          <p:cNvPr id="20" name="Shape 17"/>
+          <p:cNvSpPr/>
+          <p:nvPr/>
+        </p:nvSpPr>
+        <p:spPr>
+          <a:xfrm>
+            <a:off x="4953000" y="1778000"/>
             <a:ext cx="6705600" cy="4191000"/>
           </a:xfrm>
           <a:prstGeom prst="rect">
@@ -5401,7 +5464,7 @@
       </p:sp>
       <p:sp>
         <p:nvSpPr>
-          <p:cNvPr id="18" name="Shape 15"/>
+          <p:cNvPr id="21" name="Shape 18"/>
           <p:cNvSpPr/>
           <p:nvPr/>
         </p:nvSpPr>
@@ -5426,7 +5489,7 @@
       </p:sp>
       <p:sp>
         <p:nvSpPr>
-          <p:cNvPr id="19" name="Text 16"/>
+          <p:cNvPr id="22" name="Text 19"/>
           <p:cNvSpPr/>
           <p:nvPr/>
         </p:nvSpPr>
@@ -5454,23 +5517,23 @@
               <a:buNone/>
             </a:pPr>
             <a:r>
-              <a:rPr lang="en-US" sz="1000" b="1" dirty="0">
+              <a:rPr lang="en-US" sz="1100" dirty="0">
                 <a:solidFill>
                   <a:srgbClr val="050B14"/>
                 </a:solidFill>
-                <a:latin typeface="IBM Plex Mono" pitchFamily="34" charset="0"/>
-                <a:ea typeface="IBM Plex Mono" pitchFamily="34" charset="-122"/>
-                <a:cs typeface="IBM Plex Mono" pitchFamily="34" charset="-120"/>
+                <a:latin typeface="IBM Plex Sans" pitchFamily="34" charset="0"/>
+                <a:ea typeface="IBM Plex Sans" pitchFamily="34" charset="-122"/>
+                <a:cs typeface="IBM Plex Sans" pitchFamily="34" charset="-120"/>
               </a:rPr>
               <a:t>USER · brief</a:t>
             </a:r>
-            <a:endParaRPr lang="en-US" sz="1000" dirty="0"/>
-          </a:p>
-        </p:txBody>
-      </p:sp>
-      <p:sp>
-        <p:nvSpPr>
-          <p:cNvPr id="20" name="Shape 17"/>
+            <a:endParaRPr lang="en-US" sz="1100" dirty="0"/>
+          </a:p>
+        </p:txBody>
+      </p:sp>
+      <p:sp>
+        <p:nvSpPr>
+          <p:cNvPr id="23" name="Shape 20"/>
           <p:cNvSpPr/>
           <p:nvPr/>
         </p:nvSpPr>
@@ -5493,7 +5556,7 @@
       </p:sp>
       <p:sp>
         <p:nvSpPr>
-          <p:cNvPr id="21" name="Shape 18"/>
+          <p:cNvPr id="24" name="Shape 21"/>
           <p:cNvSpPr/>
           <p:nvPr/>
         </p:nvSpPr>
@@ -5518,7 +5581,7 @@
       </p:sp>
       <p:sp>
         <p:nvSpPr>
-          <p:cNvPr id="22" name="Text 19"/>
+          <p:cNvPr id="25" name="Text 22"/>
           <p:cNvSpPr/>
           <p:nvPr/>
         </p:nvSpPr>
@@ -5546,23 +5609,23 @@
               <a:buNone/>
             </a:pPr>
             <a:r>
-              <a:rPr lang="en-US" sz="1300" b="1" dirty="0">
+              <a:rPr lang="en-US" sz="1400" dirty="0">
                 <a:solidFill>
                   <a:srgbClr val="050B14"/>
                 </a:solidFill>
-                <a:latin typeface="Tektur" pitchFamily="34" charset="0"/>
-                <a:ea typeface="Tektur" pitchFamily="34" charset="-122"/>
-                <a:cs typeface="Tektur" pitchFamily="34" charset="-120"/>
+                <a:latin typeface="IBM Plex Sans" pitchFamily="34" charset="0"/>
+                <a:ea typeface="IBM Plex Sans" pitchFamily="34" charset="-122"/>
+                <a:cs typeface="IBM Plex Sans" pitchFamily="34" charset="-120"/>
               </a:rPr>
               <a:t>AppBuilder</a:t>
             </a:r>
-            <a:endParaRPr lang="en-US" sz="1300" dirty="0"/>
-          </a:p>
-        </p:txBody>
-      </p:sp>
-      <p:sp>
-        <p:nvSpPr>
-          <p:cNvPr id="23" name="Shape 20"/>
+            <a:endParaRPr lang="en-US" sz="1400" dirty="0"/>
+          </a:p>
+        </p:txBody>
+      </p:sp>
+      <p:sp>
+        <p:nvSpPr>
+          <p:cNvPr id="26" name="Shape 23"/>
           <p:cNvSpPr/>
           <p:nvPr/>
         </p:nvSpPr>
@@ -5585,7 +5648,7 @@
       </p:sp>
       <p:sp>
         <p:nvSpPr>
-          <p:cNvPr id="24" name="Shape 21"/>
+          <p:cNvPr id="27" name="Shape 24"/>
           <p:cNvSpPr/>
           <p:nvPr/>
         </p:nvSpPr>
@@ -5610,7 +5673,7 @@
       </p:sp>
       <p:sp>
         <p:nvSpPr>
-          <p:cNvPr id="25" name="Text 22"/>
+          <p:cNvPr id="28" name="Text 25"/>
           <p:cNvSpPr/>
           <p:nvPr/>
         </p:nvSpPr>
@@ -5638,117 +5701,140 @@
               <a:buNone/>
             </a:pPr>
             <a:r>
-              <a:rPr lang="en-US" sz="1000" b="1" dirty="0">
+              <a:rPr lang="en-US" sz="1100" dirty="0">
                 <a:solidFill>
                   <a:srgbClr val="050B14"/>
+                </a:solidFill>
+                <a:latin typeface="IBM Plex Sans" pitchFamily="34" charset="0"/>
+                <a:ea typeface="IBM Plex Sans" pitchFamily="34" charset="-122"/>
+                <a:cs typeface="IBM Plex Sans" pitchFamily="34" charset="-120"/>
+              </a:rPr>
+              <a:t>Generated app</a:t>
+            </a:r>
+            <a:endParaRPr lang="en-US" sz="1100" dirty="0"/>
+          </a:p>
+        </p:txBody>
+      </p:sp>
+      <p:sp>
+        <p:nvSpPr>
+          <p:cNvPr id="29" name="Shape 26"/>
+          <p:cNvSpPr/>
+          <p:nvPr/>
+        </p:nvSpPr>
+        <p:spPr>
+          <a:xfrm>
+            <a:off x="5334000" y="3632200"/>
+            <a:ext cx="5943600" cy="0"/>
+          </a:xfrm>
+          <a:prstGeom prst="line">
+            <a:avLst/>
+          </a:prstGeom>
+          <a:noFill/>
+          <a:ln w="12700">
+            <a:solidFill>
+              <a:srgbClr val="CDCED0"/>
+            </a:solidFill>
+            <a:prstDash val="solid"/>
+          </a:ln>
+        </p:spPr>
+      </p:sp>
+      <p:sp>
+        <p:nvSpPr>
+          <p:cNvPr id="30" name="Text 27"/>
+          <p:cNvSpPr/>
+          <p:nvPr/>
+        </p:nvSpPr>
+        <p:spPr>
+          <a:xfrm>
+            <a:off x="5334000" y="3860800"/>
+            <a:ext cx="3175000" cy="254000"/>
+          </a:xfrm>
+          <a:prstGeom prst="rect">
+            <a:avLst/>
+          </a:prstGeom>
+          <a:noFill/>
+          <a:ln/>
+        </p:spPr>
+        <p:txBody>
+          <a:bodyPr wrap="square" lIns="0" tIns="0" rIns="0" bIns="0" rtlCol="0" anchor="t">
+            <a:normAutofit/>
+          </a:bodyPr>
+          <a:lstStyle/>
+          <a:p>
+            <a:pPr algn="l" indent="0" marL="0">
+              <a:lnSpc>
+                <a:spcPct val="120000"/>
+              </a:lnSpc>
+              <a:buNone/>
+            </a:pPr>
+            <a:r>
+              <a:rPr lang="en-US" sz="1800" dirty="0">
+                <a:solidFill>
+                  <a:srgbClr val="73B200"/>
+                </a:solidFill>
+                <a:latin typeface="IBM Plex Sans" pitchFamily="34" charset="0"/>
+                <a:ea typeface="IBM Plex Sans" pitchFamily="34" charset="-122"/>
+                <a:cs typeface="IBM Plex Sans" pitchFamily="34" charset="-120"/>
+              </a:rPr>
+              <a:t>UNS</a:t>
+            </a:r>
+            <a:endParaRPr lang="en-US" sz="1800" dirty="0"/>
+          </a:p>
+        </p:txBody>
+      </p:sp>
+      <p:sp>
+        <p:nvSpPr>
+          <p:cNvPr id="31" name="Text 28"/>
+          <p:cNvSpPr/>
+          <p:nvPr/>
+        </p:nvSpPr>
+        <p:spPr>
+          <a:xfrm>
+            <a:off x="5334000" y="4191000"/>
+            <a:ext cx="3175000" cy="1092200"/>
+          </a:xfrm>
+          <a:prstGeom prst="rect">
+            <a:avLst/>
+          </a:prstGeom>
+          <a:noFill/>
+          <a:ln/>
+        </p:spPr>
+        <p:txBody>
+          <a:bodyPr wrap="square" lIns="0" tIns="0" rIns="0" bIns="0" rtlCol="0" anchor="t">
+            <a:normAutofit/>
+          </a:bodyPr>
+          <a:lstStyle/>
+          <a:p>
+            <a:pPr algn="l" indent="0" marL="0">
+              <a:lnSpc>
+                <a:spcPct val="145000"/>
+              </a:lnSpc>
+              <a:buNone/>
+            </a:pPr>
+            <a:r>
+              <a:rPr lang="en-US" sz="1100" dirty="0">
+                <a:solidFill>
+                  <a:srgbClr val="585C62"/>
                 </a:solidFill>
                 <a:latin typeface="IBM Plex Mono" pitchFamily="34" charset="0"/>
                 <a:ea typeface="IBM Plex Mono" pitchFamily="34" charset="-122"/>
                 <a:cs typeface="IBM Plex Mono" pitchFamily="34" charset="-120"/>
               </a:rPr>
-              <a:t>Generated app</a:t>
-            </a:r>
-            <a:endParaRPr lang="en-US" sz="1000" dirty="0"/>
-          </a:p>
-        </p:txBody>
-      </p:sp>
-      <p:sp>
-        <p:nvSpPr>
-          <p:cNvPr id="26" name="Text 23"/>
-          <p:cNvSpPr/>
-          <p:nvPr/>
-        </p:nvSpPr>
-        <p:spPr>
-          <a:xfrm>
-            <a:off x="5334000" y="3644900"/>
-            <a:ext cx="3175000" cy="254000"/>
-          </a:xfrm>
-          <a:prstGeom prst="rect">
-            <a:avLst/>
-          </a:prstGeom>
-          <a:noFill/>
-          <a:ln/>
-        </p:spPr>
-        <p:txBody>
-          <a:bodyPr wrap="square" lIns="0" tIns="0" rIns="0" bIns="0" rtlCol="0" anchor="t">
-            <a:normAutofit/>
-          </a:bodyPr>
-          <a:lstStyle/>
-          <a:p>
-            <a:pPr algn="l" indent="0" marL="0">
-              <a:lnSpc>
-                <a:spcPct val="120000"/>
-              </a:lnSpc>
-              <a:buNone/>
-            </a:pPr>
-            <a:r>
-              <a:rPr lang="en-US" sz="1800" b="1" dirty="0">
-                <a:solidFill>
-                  <a:srgbClr val="73B200"/>
-                </a:solidFill>
-                <a:latin typeface="Tektur" pitchFamily="34" charset="0"/>
-                <a:ea typeface="Tektur" pitchFamily="34" charset="-122"/>
-                <a:cs typeface="Tektur" pitchFamily="34" charset="-120"/>
-              </a:rPr>
-              <a:t>UNS</a:t>
-            </a:r>
-            <a:endParaRPr lang="en-US" sz="1800" dirty="0"/>
-          </a:p>
-        </p:txBody>
-      </p:sp>
-      <p:sp>
-        <p:nvSpPr>
-          <p:cNvPr id="27" name="Text 24"/>
-          <p:cNvSpPr/>
-          <p:nvPr/>
-        </p:nvSpPr>
-        <p:spPr>
-          <a:xfrm>
-            <a:off x="5334000" y="3962400"/>
-            <a:ext cx="3175000" cy="1092200"/>
-          </a:xfrm>
-          <a:prstGeom prst="rect">
-            <a:avLst/>
-          </a:prstGeom>
-          <a:noFill/>
-          <a:ln/>
-        </p:spPr>
-        <p:txBody>
-          <a:bodyPr wrap="square" lIns="0" tIns="0" rIns="0" bIns="0" rtlCol="0" anchor="t">
-            <a:normAutofit/>
-          </a:bodyPr>
-          <a:lstStyle/>
-          <a:p>
-            <a:pPr algn="l" indent="0" marL="0">
-              <a:lnSpc>
-                <a:spcPct val="145000"/>
-              </a:lnSpc>
-              <a:buNone/>
-            </a:pPr>
-            <a:r>
-              <a:rPr lang="en-US" sz="1000" dirty="0">
-                <a:solidFill>
-                  <a:srgbClr val="585C62"/>
-                </a:solidFill>
-                <a:latin typeface="IBM Plex Mono" pitchFamily="34" charset="0"/>
-                <a:ea typeface="IBM Plex Mono" pitchFamily="34" charset="-122"/>
-                <a:cs typeface="IBM Plex Mono" pitchFamily="34" charset="-120"/>
-              </a:rPr>
               <a:t>Read and write live operational context through a governed namespace.</a:t>
             </a:r>
-            <a:endParaRPr lang="en-US" sz="1000" dirty="0"/>
-          </a:p>
-        </p:txBody>
-      </p:sp>
-      <p:sp>
-        <p:nvSpPr>
-          <p:cNvPr id="28" name="Shape 25"/>
-          <p:cNvSpPr/>
-          <p:nvPr/>
-        </p:nvSpPr>
-        <p:spPr>
-          <a:xfrm>
-            <a:off x="8763000" y="3632200"/>
+            <a:endParaRPr lang="en-US" sz="1100" dirty="0"/>
+          </a:p>
+        </p:txBody>
+      </p:sp>
+      <p:sp>
+        <p:nvSpPr>
+          <p:cNvPr id="32" name="Shape 29"/>
+          <p:cNvSpPr/>
+          <p:nvPr/>
+        </p:nvSpPr>
+        <p:spPr>
+          <a:xfrm>
+            <a:off x="8763000" y="3810000"/>
             <a:ext cx="2413000" cy="1422400"/>
           </a:xfrm>
           <a:prstGeom prst="rect">
@@ -5767,35 +5853,35 @@
       </p:sp>
       <p:sp>
         <p:nvSpPr>
-          <p:cNvPr id="29" name="Text 26"/>
-          <p:cNvSpPr/>
-          <p:nvPr/>
-        </p:nvSpPr>
-        <p:spPr>
-          <a:xfrm>
-            <a:off x="9017000" y="3898900"/>
-            <a:ext cx="1905000" cy="863600"/>
-          </a:xfrm>
-          <a:prstGeom prst="rect">
-            <a:avLst/>
-          </a:prstGeom>
-          <a:noFill/>
-          <a:ln/>
-        </p:spPr>
-        <p:txBody>
-          <a:bodyPr wrap="square" lIns="0" tIns="0" rIns="0" bIns="0" rtlCol="0" anchor="t">
-            <a:normAutofit/>
-          </a:bodyPr>
-          <a:lstStyle/>
-          <a:p>
-            <a:pPr algn="l" indent="0" marL="0">
-              <a:lnSpc>
-                <a:spcPct val="120000"/>
-              </a:lnSpc>
-              <a:buNone/>
-            </a:pPr>
-            <a:r>
-              <a:rPr lang="en-US" sz="1050" dirty="0">
+          <p:cNvPr id="33" name="Text 30"/>
+          <p:cNvSpPr/>
+          <p:nvPr/>
+        </p:nvSpPr>
+        <p:spPr>
+          <a:xfrm>
+            <a:off x="8966200" y="4064000"/>
+            <a:ext cx="2006600" cy="965200"/>
+          </a:xfrm>
+          <a:prstGeom prst="rect">
+            <a:avLst/>
+          </a:prstGeom>
+          <a:noFill/>
+          <a:ln/>
+        </p:spPr>
+        <p:txBody>
+          <a:bodyPr wrap="square" lIns="0" tIns="0" rIns="0" bIns="0" rtlCol="0" anchor="t">
+            <a:normAutofit/>
+          </a:bodyPr>
+          <a:lstStyle/>
+          <a:p>
+            <a:pPr algn="l" indent="0" marL="0">
+              <a:lnSpc>
+                <a:spcPct val="135000"/>
+              </a:lnSpc>
+              <a:buNone/>
+            </a:pPr>
+            <a:r>
+              <a:rPr lang="en-US" sz="1200" dirty="0">
                 <a:solidFill>
                   <a:srgbClr val="050B14"/>
                 </a:solidFill>
@@ -5805,13 +5891,13 @@
               </a:rPr>
               <a:t>A running application with users, permissions, audit and versioning.</a:t>
             </a:r>
-            <a:endParaRPr lang="en-US" sz="1050" dirty="0"/>
-          </a:p>
-        </p:txBody>
-      </p:sp>
-      <p:sp>
-        <p:nvSpPr>
-          <p:cNvPr id="30" name="Text 27"/>
+            <a:endParaRPr lang="en-US" sz="1200" dirty="0"/>
+          </a:p>
+        </p:txBody>
+      </p:sp>
+      <p:sp>
+        <p:nvSpPr>
+          <p:cNvPr id="34" name="Text 31"/>
           <p:cNvSpPr/>
           <p:nvPr/>
         </p:nvSpPr>
@@ -5855,7 +5941,7 @@
       </p:sp>
       <p:sp>
         <p:nvSpPr>
-          <p:cNvPr id="31" name="Text 28"/>
+          <p:cNvPr id="35" name="Text 32"/>
           <p:cNvSpPr/>
           <p:nvPr/>
         </p:nvSpPr>
@@ -5961,73 +6047,29 @@
         </p:nvSpPr>
         <p:spPr>
           <a:xfrm>
-            <a:off x="609600" y="355600"/>
-            <a:ext cx="4572000" cy="228600"/>
-          </a:xfrm>
-          <a:prstGeom prst="rect">
-            <a:avLst/>
-          </a:prstGeom>
-          <a:noFill/>
-          <a:ln/>
-        </p:spPr>
-        <p:txBody>
-          <a:bodyPr wrap="square" lIns="0" tIns="0" rIns="0" bIns="0" rtlCol="0" anchor="t">
-            <a:normAutofit/>
-          </a:bodyPr>
-          <a:lstStyle/>
-          <a:p>
-            <a:pPr algn="l" indent="0" marL="0">
-              <a:lnSpc>
-                <a:spcPct val="120000"/>
-              </a:lnSpc>
-              <a:buNone/>
-            </a:pPr>
-            <a:r>
-              <a:rPr lang="en-US" sz="1050" b="1" spc="100" kern="0" dirty="0">
-                <a:solidFill>
-                  <a:srgbClr val="73B200"/>
-                </a:solidFill>
-                <a:latin typeface="IBM Plex Mono" pitchFamily="34" charset="0"/>
-                <a:ea typeface="IBM Plex Mono" pitchFamily="34" charset="-122"/>
-                <a:cs typeface="IBM Plex Mono" pitchFamily="34" charset="-120"/>
-              </a:rPr>
-              <a:t>COST CALCULATIONS</a:t>
-            </a:r>
-            <a:endParaRPr lang="en-US" sz="1050" dirty="0"/>
-          </a:p>
-        </p:txBody>
-      </p:sp>
-      <p:sp>
-        <p:nvSpPr>
-          <p:cNvPr id="4" name="Text 1"/>
-          <p:cNvSpPr/>
-          <p:nvPr/>
-        </p:nvSpPr>
-        <p:spPr>
-          <a:xfrm>
-            <a:off x="609600" y="685800"/>
-            <a:ext cx="10972800" cy="558800"/>
-          </a:xfrm>
-          <a:prstGeom prst="rect">
-            <a:avLst/>
-          </a:prstGeom>
-          <a:noFill/>
-          <a:ln/>
-        </p:spPr>
-        <p:txBody>
-          <a:bodyPr wrap="square" lIns="0" tIns="0" rIns="0" bIns="0" rtlCol="0" anchor="t">
-            <a:normAutofit/>
-          </a:bodyPr>
-          <a:lstStyle/>
-          <a:p>
-            <a:pPr algn="l" indent="0" marL="0">
-              <a:lnSpc>
-                <a:spcPct val="120000"/>
-              </a:lnSpc>
-              <a:buNone/>
-            </a:pPr>
-            <a:r>
-              <a:rPr lang="en-US" sz="3000" spc="-40" kern="0" dirty="0">
+            <a:off x="609600" y="406400"/>
+            <a:ext cx="10972800" cy="609600"/>
+          </a:xfrm>
+          <a:prstGeom prst="rect">
+            <a:avLst/>
+          </a:prstGeom>
+          <a:noFill/>
+          <a:ln/>
+        </p:spPr>
+        <p:txBody>
+          <a:bodyPr wrap="square" lIns="0" tIns="0" rIns="0" bIns="0" rtlCol="0" anchor="t">
+            <a:normAutofit/>
+          </a:bodyPr>
+          <a:lstStyle/>
+          <a:p>
+            <a:pPr algn="l" indent="0" marL="0">
+              <a:lnSpc>
+                <a:spcPct val="115000"/>
+              </a:lnSpc>
+              <a:buNone/>
+            </a:pPr>
+            <a:r>
+              <a:rPr lang="en-US" sz="2800" spc="-40" kern="0" dirty="0">
                 <a:solidFill>
                   <a:srgbClr val="050B14"/>
                 </a:solidFill>
@@ -6037,27 +6079,25 @@
               </a:rPr>
               <a:t>The same applications — at 0.75X instead of 2X.</a:t>
             </a:r>
-            <a:endParaRPr lang="en-US" sz="3000" dirty="0"/>
-          </a:p>
-        </p:txBody>
-      </p:sp>
-      <p:sp>
-        <p:nvSpPr>
-          <p:cNvPr id="5" name="Shape 2"/>
-          <p:cNvSpPr/>
-          <p:nvPr/>
-        </p:nvSpPr>
-        <p:spPr>
-          <a:xfrm>
-            <a:off x="355600" y="1346200"/>
-            <a:ext cx="11480800" cy="2095500"/>
-          </a:xfrm>
-          <a:prstGeom prst="rect">
-            <a:avLst/>
-          </a:prstGeom>
-          <a:solidFill>
-            <a:srgbClr val="FFFFFF"/>
-          </a:solidFill>
+            <a:endParaRPr lang="en-US" sz="2800" dirty="0"/>
+          </a:p>
+        </p:txBody>
+      </p:sp>
+      <p:sp>
+        <p:nvSpPr>
+          <p:cNvPr id="4" name="Shape 1"/>
+          <p:cNvSpPr/>
+          <p:nvPr/>
+        </p:nvSpPr>
+        <p:spPr>
+          <a:xfrm>
+            <a:off x="508000" y="1143000"/>
+            <a:ext cx="11176000" cy="0"/>
+          </a:xfrm>
+          <a:prstGeom prst="line">
+            <a:avLst/>
+          </a:prstGeom>
+          <a:noFill/>
           <a:ln w="12700">
             <a:solidFill>
               <a:srgbClr val="CDCED0"/>
@@ -6068,58 +6108,14 @@
       </p:sp>
       <p:sp>
         <p:nvSpPr>
-          <p:cNvPr id="6" name="Text 3"/>
-          <p:cNvSpPr/>
-          <p:nvPr/>
-        </p:nvSpPr>
-        <p:spPr>
-          <a:xfrm>
-            <a:off x="863600" y="2171700"/>
-            <a:ext cx="1397000" cy="508000"/>
-          </a:xfrm>
-          <a:prstGeom prst="rect">
-            <a:avLst/>
-          </a:prstGeom>
-          <a:noFill/>
-          <a:ln/>
-        </p:spPr>
-        <p:txBody>
-          <a:bodyPr wrap="square" lIns="0" tIns="0" rIns="0" bIns="0" rtlCol="0" anchor="ctr">
-            <a:normAutofit/>
-          </a:bodyPr>
-          <a:lstStyle/>
-          <a:p>
-            <a:pPr algn="l" indent="0" marL="0">
-              <a:lnSpc>
-                <a:spcPct val="120000"/>
-              </a:lnSpc>
-              <a:buNone/>
-            </a:pPr>
-            <a:r>
-              <a:rPr lang="en-US" sz="1200" b="1" dirty="0">
-                <a:solidFill>
-                  <a:srgbClr val="050B14"/>
-                </a:solidFill>
-                <a:latin typeface="IBM Plex Sans" pitchFamily="34" charset="0"/>
-                <a:ea typeface="IBM Plex Sans" pitchFamily="34" charset="-122"/>
-                <a:cs typeface="IBM Plex Sans" pitchFamily="34" charset="-120"/>
-              </a:rPr>
-              <a:t>Traditional Dev</a:t>
-            </a:r>
-            <a:endParaRPr lang="en-US" sz="1200" dirty="0"/>
-          </a:p>
-        </p:txBody>
-      </p:sp>
-      <p:sp>
-        <p:nvSpPr>
-          <p:cNvPr id="7" name="Text 4"/>
-          <p:cNvSpPr/>
-          <p:nvPr/>
-        </p:nvSpPr>
-        <p:spPr>
-          <a:xfrm>
-            <a:off x="5410200" y="2032000"/>
-            <a:ext cx="1524000" cy="254000"/>
+          <p:cNvPr id="5" name="Text 2"/>
+          <p:cNvSpPr/>
+          <p:nvPr/>
+        </p:nvSpPr>
+        <p:spPr>
+          <a:xfrm>
+            <a:off x="711200" y="1270000"/>
+            <a:ext cx="2032000" cy="203200"/>
           </a:xfrm>
           <a:prstGeom prst="rect">
             <a:avLst/>
@@ -6148,7 +6144,7 @@
                 <a:ea typeface="IBM Plex Mono" pitchFamily="34" charset="-122"/>
                 <a:cs typeface="IBM Plex Mono" pitchFamily="34" charset="-120"/>
               </a:rPr>
-              <a:t>DEV COST</a:t>
+              <a:t>MODEL</a:t>
             </a:r>
             <a:endParaRPr lang="en-US" sz="900" dirty="0"/>
           </a:p>
@@ -6156,102 +6152,14 @@
       </p:sp>
       <p:sp>
         <p:nvSpPr>
-          <p:cNvPr id="8" name="Text 5"/>
-          <p:cNvSpPr/>
-          <p:nvPr/>
-        </p:nvSpPr>
-        <p:spPr>
-          <a:xfrm>
-            <a:off x="5410200" y="2286000"/>
-            <a:ext cx="1524000" cy="711200"/>
-          </a:xfrm>
-          <a:prstGeom prst="rect">
-            <a:avLst/>
-          </a:prstGeom>
-          <a:noFill/>
-          <a:ln/>
-        </p:spPr>
-        <p:txBody>
-          <a:bodyPr wrap="square" lIns="0" tIns="0" rIns="0" bIns="0" rtlCol="0" anchor="t">
-            <a:normAutofit/>
-          </a:bodyPr>
-          <a:lstStyle/>
-          <a:p>
-            <a:pPr algn="l" indent="0" marL="0">
-              <a:lnSpc>
-                <a:spcPct val="120000"/>
-              </a:lnSpc>
-              <a:buNone/>
-            </a:pPr>
-            <a:r>
-              <a:rPr lang="en-US" sz="3400" b="1" dirty="0">
-                <a:solidFill>
-                  <a:srgbClr val="050B14"/>
-                </a:solidFill>
-                <a:latin typeface="Tektur" pitchFamily="34" charset="0"/>
-                <a:ea typeface="Tektur" pitchFamily="34" charset="-122"/>
-                <a:cs typeface="Tektur" pitchFamily="34" charset="-120"/>
-              </a:rPr>
-              <a:t>X</a:t>
-            </a:r>
-            <a:endParaRPr lang="en-US" sz="3400" dirty="0"/>
-          </a:p>
-        </p:txBody>
-      </p:sp>
-      <p:sp>
-        <p:nvSpPr>
-          <p:cNvPr id="9" name="Text 6"/>
-          <p:cNvSpPr/>
-          <p:nvPr/>
-        </p:nvSpPr>
-        <p:spPr>
-          <a:xfrm>
-            <a:off x="6959600" y="2349500"/>
-            <a:ext cx="381000" cy="508000"/>
-          </a:xfrm>
-          <a:prstGeom prst="rect">
-            <a:avLst/>
-          </a:prstGeom>
-          <a:noFill/>
-          <a:ln/>
-        </p:spPr>
-        <p:txBody>
-          <a:bodyPr wrap="square" lIns="0" tIns="0" rIns="0" bIns="0" rtlCol="0" anchor="t">
-            <a:normAutofit/>
-          </a:bodyPr>
-          <a:lstStyle/>
-          <a:p>
-            <a:pPr algn="ctr" indent="0" marL="0">
-              <a:lnSpc>
-                <a:spcPct val="120000"/>
-              </a:lnSpc>
-              <a:buNone/>
-            </a:pPr>
-            <a:r>
-              <a:rPr lang="en-US" sz="2400" dirty="0">
-                <a:solidFill>
-                  <a:srgbClr val="050B14"/>
-                </a:solidFill>
-                <a:latin typeface="Tektur" pitchFamily="34" charset="0"/>
-                <a:ea typeface="Tektur" pitchFamily="34" charset="-122"/>
-                <a:cs typeface="Tektur" pitchFamily="34" charset="-120"/>
-              </a:rPr>
-              <a:t>+</a:t>
-            </a:r>
-            <a:endParaRPr lang="en-US" sz="2400" dirty="0"/>
-          </a:p>
-        </p:txBody>
-      </p:sp>
-      <p:sp>
-        <p:nvSpPr>
-          <p:cNvPr id="10" name="Text 7"/>
-          <p:cNvSpPr/>
-          <p:nvPr/>
-        </p:nvSpPr>
-        <p:spPr>
-          <a:xfrm>
-            <a:off x="7391400" y="2032000"/>
-            <a:ext cx="2286000" cy="254000"/>
+          <p:cNvPr id="6" name="Text 3"/>
+          <p:cNvSpPr/>
+          <p:nvPr/>
+        </p:nvSpPr>
+        <p:spPr>
+          <a:xfrm>
+            <a:off x="3302000" y="1270000"/>
+            <a:ext cx="1778000" cy="203200"/>
           </a:xfrm>
           <a:prstGeom prst="rect">
             <a:avLst/>
@@ -6280,7 +6188,7 @@
                 <a:ea typeface="IBM Plex Mono" pitchFamily="34" charset="-122"/>
                 <a:cs typeface="IBM Plex Mono" pitchFamily="34" charset="-120"/>
               </a:rPr>
-              <a:t>INTEGRATION COST</a:t>
+              <a:t>DEV</a:t>
             </a:r>
             <a:endParaRPr lang="en-US" sz="900" dirty="0"/>
           </a:p>
@@ -6288,102 +6196,14 @@
       </p:sp>
       <p:sp>
         <p:nvSpPr>
-          <p:cNvPr id="11" name="Text 8"/>
-          <p:cNvSpPr/>
-          <p:nvPr/>
-        </p:nvSpPr>
-        <p:spPr>
-          <a:xfrm>
-            <a:off x="7391400" y="2286000"/>
-            <a:ext cx="2286000" cy="711200"/>
-          </a:xfrm>
-          <a:prstGeom prst="rect">
-            <a:avLst/>
-          </a:prstGeom>
-          <a:noFill/>
-          <a:ln/>
-        </p:spPr>
-        <p:txBody>
-          <a:bodyPr wrap="square" lIns="0" tIns="0" rIns="0" bIns="0" rtlCol="0" anchor="t">
-            <a:normAutofit/>
-          </a:bodyPr>
-          <a:lstStyle/>
-          <a:p>
-            <a:pPr algn="l" indent="0" marL="0">
-              <a:lnSpc>
-                <a:spcPct val="120000"/>
-              </a:lnSpc>
-              <a:buNone/>
-            </a:pPr>
-            <a:r>
-              <a:rPr lang="en-US" sz="3400" b="1" dirty="0">
-                <a:solidFill>
-                  <a:srgbClr val="050B14"/>
-                </a:solidFill>
-                <a:latin typeface="Tektur" pitchFamily="34" charset="0"/>
-                <a:ea typeface="Tektur" pitchFamily="34" charset="-122"/>
-                <a:cs typeface="Tektur" pitchFamily="34" charset="-120"/>
-              </a:rPr>
-              <a:t>X</a:t>
-            </a:r>
-            <a:endParaRPr lang="en-US" sz="3400" dirty="0"/>
-          </a:p>
-        </p:txBody>
-      </p:sp>
-      <p:sp>
-        <p:nvSpPr>
-          <p:cNvPr id="12" name="Text 9"/>
-          <p:cNvSpPr/>
-          <p:nvPr/>
-        </p:nvSpPr>
-        <p:spPr>
-          <a:xfrm>
-            <a:off x="9525000" y="2349500"/>
-            <a:ext cx="381000" cy="508000"/>
-          </a:xfrm>
-          <a:prstGeom prst="rect">
-            <a:avLst/>
-          </a:prstGeom>
-          <a:noFill/>
-          <a:ln/>
-        </p:spPr>
-        <p:txBody>
-          <a:bodyPr wrap="square" lIns="0" tIns="0" rIns="0" bIns="0" rtlCol="0" anchor="t">
-            <a:normAutofit/>
-          </a:bodyPr>
-          <a:lstStyle/>
-          <a:p>
-            <a:pPr algn="ctr" indent="0" marL="0">
-              <a:lnSpc>
-                <a:spcPct val="120000"/>
-              </a:lnSpc>
-              <a:buNone/>
-            </a:pPr>
-            <a:r>
-              <a:rPr lang="en-US" sz="2400" dirty="0">
-                <a:solidFill>
-                  <a:srgbClr val="050B14"/>
-                </a:solidFill>
-                <a:latin typeface="Tektur" pitchFamily="34" charset="0"/>
-                <a:ea typeface="Tektur" pitchFamily="34" charset="-122"/>
-                <a:cs typeface="Tektur" pitchFamily="34" charset="-120"/>
-              </a:rPr>
-              <a:t>≈</a:t>
-            </a:r>
-            <a:endParaRPr lang="en-US" sz="2400" dirty="0"/>
-          </a:p>
-        </p:txBody>
-      </p:sp>
-      <p:sp>
-        <p:nvSpPr>
-          <p:cNvPr id="13" name="Text 10"/>
-          <p:cNvSpPr/>
-          <p:nvPr/>
-        </p:nvSpPr>
-        <p:spPr>
-          <a:xfrm>
-            <a:off x="9906000" y="2032000"/>
-            <a:ext cx="1524000" cy="254000"/>
+          <p:cNvPr id="7" name="Text 4"/>
+          <p:cNvSpPr/>
+          <p:nvPr/>
+        </p:nvSpPr>
+        <p:spPr>
+          <a:xfrm>
+            <a:off x="5334000" y="1270000"/>
+            <a:ext cx="2032000" cy="203200"/>
           </a:xfrm>
           <a:prstGeom prst="rect">
             <a:avLst/>
@@ -6412,6 +6232,50 @@
                 <a:ea typeface="IBM Plex Mono" pitchFamily="34" charset="-122"/>
                 <a:cs typeface="IBM Plex Mono" pitchFamily="34" charset="-120"/>
               </a:rPr>
+              <a:t>INTEGRATION</a:t>
+            </a:r>
+            <a:endParaRPr lang="en-US" sz="900" dirty="0"/>
+          </a:p>
+        </p:txBody>
+      </p:sp>
+      <p:sp>
+        <p:nvSpPr>
+          <p:cNvPr id="8" name="Text 5"/>
+          <p:cNvSpPr/>
+          <p:nvPr/>
+        </p:nvSpPr>
+        <p:spPr>
+          <a:xfrm>
+            <a:off x="8890000" y="1270000"/>
+            <a:ext cx="2286000" cy="203200"/>
+          </a:xfrm>
+          <a:prstGeom prst="rect">
+            <a:avLst/>
+          </a:prstGeom>
+          <a:noFill/>
+          <a:ln/>
+        </p:spPr>
+        <p:txBody>
+          <a:bodyPr wrap="square" lIns="0" tIns="0" rIns="0" bIns="0" rtlCol="0" anchor="t">
+            <a:normAutofit/>
+          </a:bodyPr>
+          <a:lstStyle/>
+          <a:p>
+            <a:pPr algn="r" indent="0" marL="0">
+              <a:lnSpc>
+                <a:spcPct val="120000"/>
+              </a:lnSpc>
+              <a:buNone/>
+            </a:pPr>
+            <a:r>
+              <a:rPr lang="en-US" sz="900" spc="80" kern="0" dirty="0">
+                <a:solidFill>
+                  <a:srgbClr val="585C62"/>
+                </a:solidFill>
+                <a:latin typeface="IBM Plex Mono" pitchFamily="34" charset="0"/>
+                <a:ea typeface="IBM Plex Mono" pitchFamily="34" charset="-122"/>
+                <a:cs typeface="IBM Plex Mono" pitchFamily="34" charset="-120"/>
+              </a:rPr>
               <a:t>TOTAL</a:t>
             </a:r>
             <a:endParaRPr lang="en-US" sz="900" dirty="0"/>
@@ -6420,109 +6284,19 @@
       </p:sp>
       <p:sp>
         <p:nvSpPr>
-          <p:cNvPr id="14" name="Text 11"/>
-          <p:cNvSpPr/>
-          <p:nvPr/>
-        </p:nvSpPr>
-        <p:spPr>
-          <a:xfrm>
-            <a:off x="9906000" y="2209800"/>
-            <a:ext cx="1651000" cy="812800"/>
-          </a:xfrm>
-          <a:prstGeom prst="rect">
-            <a:avLst/>
-          </a:prstGeom>
-          <a:noFill/>
-          <a:ln/>
-        </p:spPr>
-        <p:txBody>
-          <a:bodyPr wrap="square" lIns="0" tIns="0" rIns="0" bIns="0" rtlCol="0" anchor="t">
-            <a:normAutofit/>
-          </a:bodyPr>
-          <a:lstStyle/>
-          <a:p>
-            <a:pPr algn="l" indent="0" marL="0">
-              <a:lnSpc>
-                <a:spcPct val="120000"/>
-              </a:lnSpc>
-              <a:buNone/>
-            </a:pPr>
-            <a:r>
-              <a:rPr lang="en-US" sz="4000" b="1" dirty="0">
-                <a:solidFill>
-                  <a:srgbClr val="050B14"/>
-                </a:solidFill>
-                <a:latin typeface="Tektur" pitchFamily="34" charset="0"/>
-                <a:ea typeface="Tektur" pitchFamily="34" charset="-122"/>
-                <a:cs typeface="Tektur" pitchFamily="34" charset="-120"/>
-              </a:rPr>
-              <a:t>2X</a:t>
-            </a:r>
-            <a:endParaRPr lang="en-US" sz="4000" dirty="0"/>
-          </a:p>
-        </p:txBody>
-      </p:sp>
-      <p:sp>
-        <p:nvSpPr>
-          <p:cNvPr id="15" name="Text 12"/>
-          <p:cNvSpPr/>
-          <p:nvPr/>
-        </p:nvSpPr>
-        <p:spPr>
-          <a:xfrm>
-            <a:off x="5410200" y="2997200"/>
-            <a:ext cx="5461000" cy="254000"/>
-          </a:xfrm>
-          <a:prstGeom prst="rect">
-            <a:avLst/>
-          </a:prstGeom>
-          <a:noFill/>
-          <a:ln/>
-        </p:spPr>
-        <p:txBody>
-          <a:bodyPr wrap="square" lIns="0" tIns="0" rIns="0" bIns="0" rtlCol="0" anchor="t">
-            <a:normAutofit/>
-          </a:bodyPr>
-          <a:lstStyle/>
-          <a:p>
-            <a:pPr algn="l" indent="0" marL="0">
-              <a:lnSpc>
-                <a:spcPct val="120000"/>
-              </a:lnSpc>
-              <a:buNone/>
-            </a:pPr>
-            <a:r>
-              <a:rPr lang="en-US" sz="850" dirty="0">
-                <a:solidFill>
-                  <a:srgbClr val="585C62"/>
-                </a:solidFill>
-                <a:latin typeface="IBM Plex Sans" pitchFamily="34" charset="0"/>
-                <a:ea typeface="IBM Plex Sans" pitchFamily="34" charset="-122"/>
-                <a:cs typeface="IBM Plex Sans" pitchFamily="34" charset="-120"/>
-              </a:rPr>
-              <a:t>Integration normally equals development cost.</a:t>
-            </a:r>
-            <a:endParaRPr lang="en-US" sz="850" dirty="0"/>
-          </a:p>
-        </p:txBody>
-      </p:sp>
-      <p:sp>
-        <p:nvSpPr>
-          <p:cNvPr id="16" name="Shape 13"/>
-          <p:cNvSpPr/>
-          <p:nvPr/>
-        </p:nvSpPr>
-        <p:spPr>
-          <a:xfrm>
-            <a:off x="355600" y="3632200"/>
-            <a:ext cx="11480800" cy="2095500"/>
-          </a:xfrm>
-          <a:prstGeom prst="rect">
-            <a:avLst/>
-          </a:prstGeom>
-          <a:solidFill>
-            <a:srgbClr val="FFFFFF"/>
-          </a:solidFill>
+          <p:cNvPr id="9" name="Shape 6"/>
+          <p:cNvSpPr/>
+          <p:nvPr/>
+        </p:nvSpPr>
+        <p:spPr>
+          <a:xfrm>
+            <a:off x="508000" y="1574800"/>
+            <a:ext cx="11176000" cy="0"/>
+          </a:xfrm>
+          <a:prstGeom prst="line">
+            <a:avLst/>
+          </a:prstGeom>
+          <a:noFill/>
           <a:ln w="12700">
             <a:solidFill>
               <a:srgbClr val="CDCED0"/>
@@ -6533,23 +6307,23 @@
       </p:sp>
       <p:sp>
         <p:nvSpPr>
-          <p:cNvPr id="17" name="Text 14"/>
-          <p:cNvSpPr/>
-          <p:nvPr/>
-        </p:nvSpPr>
-        <p:spPr>
-          <a:xfrm>
-            <a:off x="863600" y="4457700"/>
-            <a:ext cx="1397000" cy="508000"/>
-          </a:xfrm>
-          <a:prstGeom prst="rect">
-            <a:avLst/>
-          </a:prstGeom>
-          <a:noFill/>
-          <a:ln/>
-        </p:spPr>
-        <p:txBody>
-          <a:bodyPr wrap="square" lIns="0" tIns="0" rIns="0" bIns="0" rtlCol="0" anchor="ctr">
+          <p:cNvPr id="10" name="Text 7"/>
+          <p:cNvSpPr/>
+          <p:nvPr/>
+        </p:nvSpPr>
+        <p:spPr>
+          <a:xfrm>
+            <a:off x="711200" y="1905000"/>
+            <a:ext cx="2286000" cy="355600"/>
+          </a:xfrm>
+          <a:prstGeom prst="rect">
+            <a:avLst/>
+          </a:prstGeom>
+          <a:noFill/>
+          <a:ln/>
+        </p:spPr>
+        <p:txBody>
+          <a:bodyPr wrap="square" lIns="0" tIns="0" rIns="0" bIns="0" rtlCol="0" anchor="t">
             <a:normAutofit/>
           </a:bodyPr>
           <a:lstStyle/>
@@ -6561,30 +6335,675 @@
               <a:buNone/>
             </a:pPr>
             <a:r>
-              <a:rPr lang="en-US" sz="1200" b="1" dirty="0">
-                <a:solidFill>
-                  <a:srgbClr val="73B200"/>
+              <a:rPr lang="en-US" sz="1500" dirty="0">
+                <a:solidFill>
+                  <a:srgbClr val="050B14"/>
                 </a:solidFill>
                 <a:latin typeface="IBM Plex Sans" pitchFamily="34" charset="0"/>
                 <a:ea typeface="IBM Plex Sans" pitchFamily="34" charset="-122"/>
                 <a:cs typeface="IBM Plex Sans" pitchFamily="34" charset="-120"/>
               </a:rPr>
+              <a:t>Traditional Dev</a:t>
+            </a:r>
+            <a:endParaRPr lang="en-US" sz="1500" dirty="0"/>
+          </a:p>
+        </p:txBody>
+      </p:sp>
+      <p:sp>
+        <p:nvSpPr>
+          <p:cNvPr id="11" name="Text 8"/>
+          <p:cNvSpPr/>
+          <p:nvPr/>
+        </p:nvSpPr>
+        <p:spPr>
+          <a:xfrm>
+            <a:off x="3302000" y="1854200"/>
+            <a:ext cx="1778000" cy="609600"/>
+          </a:xfrm>
+          <a:prstGeom prst="rect">
+            <a:avLst/>
+          </a:prstGeom>
+          <a:noFill/>
+          <a:ln/>
+        </p:spPr>
+        <p:txBody>
+          <a:bodyPr wrap="square" lIns="0" tIns="0" rIns="0" bIns="0" rtlCol="0" anchor="t">
+            <a:normAutofit/>
+          </a:bodyPr>
+          <a:lstStyle/>
+          <a:p>
+            <a:pPr algn="l" indent="0" marL="0">
+              <a:lnSpc>
+                <a:spcPct val="120000"/>
+              </a:lnSpc>
+              <a:buNone/>
+            </a:pPr>
+            <a:r>
+              <a:rPr lang="en-US" sz="3600" dirty="0">
+                <a:solidFill>
+                  <a:srgbClr val="050B14"/>
+                </a:solidFill>
+                <a:latin typeface="IBM Plex Sans" pitchFamily="34" charset="0"/>
+                <a:ea typeface="IBM Plex Sans" pitchFamily="34" charset="-122"/>
+                <a:cs typeface="IBM Plex Sans" pitchFamily="34" charset="-120"/>
+              </a:rPr>
+              <a:t>X</a:t>
+            </a:r>
+            <a:endParaRPr lang="en-US" sz="3600" dirty="0"/>
+          </a:p>
+        </p:txBody>
+      </p:sp>
+      <p:sp>
+        <p:nvSpPr>
+          <p:cNvPr id="12" name="Text 9"/>
+          <p:cNvSpPr/>
+          <p:nvPr/>
+        </p:nvSpPr>
+        <p:spPr>
+          <a:xfrm>
+            <a:off x="5080000" y="1981200"/>
+            <a:ext cx="304800" cy="457200"/>
+          </a:xfrm>
+          <a:prstGeom prst="rect">
+            <a:avLst/>
+          </a:prstGeom>
+          <a:noFill/>
+          <a:ln/>
+        </p:spPr>
+        <p:txBody>
+          <a:bodyPr wrap="square" lIns="0" tIns="0" rIns="0" bIns="0" rtlCol="0" anchor="t">
+            <a:normAutofit/>
+          </a:bodyPr>
+          <a:lstStyle/>
+          <a:p>
+            <a:pPr algn="l" indent="0" marL="0">
+              <a:lnSpc>
+                <a:spcPct val="120000"/>
+              </a:lnSpc>
+              <a:buNone/>
+            </a:pPr>
+            <a:r>
+              <a:rPr lang="en-US" sz="2200" dirty="0">
+                <a:solidFill>
+                  <a:srgbClr val="585C62"/>
+                </a:solidFill>
+                <a:latin typeface="IBM Plex Sans" pitchFamily="34" charset="0"/>
+                <a:ea typeface="IBM Plex Sans" pitchFamily="34" charset="-122"/>
+                <a:cs typeface="IBM Plex Sans" pitchFamily="34" charset="-120"/>
+              </a:rPr>
+              <a:t>+</a:t>
+            </a:r>
+            <a:endParaRPr lang="en-US" sz="2200" dirty="0"/>
+          </a:p>
+        </p:txBody>
+      </p:sp>
+      <p:sp>
+        <p:nvSpPr>
+          <p:cNvPr id="13" name="Text 10"/>
+          <p:cNvSpPr/>
+          <p:nvPr/>
+        </p:nvSpPr>
+        <p:spPr>
+          <a:xfrm>
+            <a:off x="5334000" y="1854200"/>
+            <a:ext cx="2032000" cy="609600"/>
+          </a:xfrm>
+          <a:prstGeom prst="rect">
+            <a:avLst/>
+          </a:prstGeom>
+          <a:noFill/>
+          <a:ln/>
+        </p:spPr>
+        <p:txBody>
+          <a:bodyPr wrap="square" lIns="0" tIns="0" rIns="0" bIns="0" rtlCol="0" anchor="t">
+            <a:normAutofit/>
+          </a:bodyPr>
+          <a:lstStyle/>
+          <a:p>
+            <a:pPr algn="l" indent="0" marL="0">
+              <a:lnSpc>
+                <a:spcPct val="120000"/>
+              </a:lnSpc>
+              <a:buNone/>
+            </a:pPr>
+            <a:r>
+              <a:rPr lang="en-US" sz="3600" dirty="0">
+                <a:solidFill>
+                  <a:srgbClr val="050B14"/>
+                </a:solidFill>
+                <a:latin typeface="IBM Plex Sans" pitchFamily="34" charset="0"/>
+                <a:ea typeface="IBM Plex Sans" pitchFamily="34" charset="-122"/>
+                <a:cs typeface="IBM Plex Sans" pitchFamily="34" charset="-120"/>
+              </a:rPr>
+              <a:t>X</a:t>
+            </a:r>
+            <a:endParaRPr lang="en-US" sz="3600" dirty="0"/>
+          </a:p>
+        </p:txBody>
+      </p:sp>
+      <p:sp>
+        <p:nvSpPr>
+          <p:cNvPr id="14" name="Text 11"/>
+          <p:cNvSpPr/>
+          <p:nvPr/>
+        </p:nvSpPr>
+        <p:spPr>
+          <a:xfrm>
+            <a:off x="7620000" y="1981200"/>
+            <a:ext cx="508000" cy="457200"/>
+          </a:xfrm>
+          <a:prstGeom prst="rect">
+            <a:avLst/>
+          </a:prstGeom>
+          <a:noFill/>
+          <a:ln/>
+        </p:spPr>
+        <p:txBody>
+          <a:bodyPr wrap="square" lIns="0" tIns="0" rIns="0" bIns="0" rtlCol="0" anchor="t">
+            <a:normAutofit/>
+          </a:bodyPr>
+          <a:lstStyle/>
+          <a:p>
+            <a:pPr algn="l" indent="0" marL="0">
+              <a:lnSpc>
+                <a:spcPct val="120000"/>
+              </a:lnSpc>
+              <a:buNone/>
+            </a:pPr>
+            <a:r>
+              <a:rPr lang="en-US" sz="2200" dirty="0">
+                <a:solidFill>
+                  <a:srgbClr val="585C62"/>
+                </a:solidFill>
+                <a:latin typeface="IBM Plex Sans" pitchFamily="34" charset="0"/>
+                <a:ea typeface="IBM Plex Sans" pitchFamily="34" charset="-122"/>
+                <a:cs typeface="IBM Plex Sans" pitchFamily="34" charset="-120"/>
+              </a:rPr>
+              <a:t>≈</a:t>
+            </a:r>
+            <a:endParaRPr lang="en-US" sz="2200" dirty="0"/>
+          </a:p>
+        </p:txBody>
+      </p:sp>
+      <p:sp>
+        <p:nvSpPr>
+          <p:cNvPr id="15" name="Text 12"/>
+          <p:cNvSpPr/>
+          <p:nvPr/>
+        </p:nvSpPr>
+        <p:spPr>
+          <a:xfrm>
+            <a:off x="8382000" y="1778000"/>
+            <a:ext cx="3048000" cy="711200"/>
+          </a:xfrm>
+          <a:prstGeom prst="rect">
+            <a:avLst/>
+          </a:prstGeom>
+          <a:noFill/>
+          <a:ln/>
+        </p:spPr>
+        <p:txBody>
+          <a:bodyPr wrap="square" lIns="0" tIns="0" rIns="0" bIns="0" rtlCol="0" anchor="t">
+            <a:normAutofit/>
+          </a:bodyPr>
+          <a:lstStyle/>
+          <a:p>
+            <a:pPr algn="r" indent="0" marL="0">
+              <a:lnSpc>
+                <a:spcPct val="120000"/>
+              </a:lnSpc>
+              <a:buNone/>
+            </a:pPr>
+            <a:r>
+              <a:rPr lang="en-US" sz="4800" dirty="0">
+                <a:solidFill>
+                  <a:srgbClr val="050B14"/>
+                </a:solidFill>
+                <a:latin typeface="IBM Plex Sans" pitchFamily="34" charset="0"/>
+                <a:ea typeface="IBM Plex Sans" pitchFamily="34" charset="-122"/>
+                <a:cs typeface="IBM Plex Sans" pitchFamily="34" charset="-120"/>
+              </a:rPr>
+              <a:t>2X</a:t>
+            </a:r>
+            <a:endParaRPr lang="en-US" sz="4800" dirty="0"/>
+          </a:p>
+        </p:txBody>
+      </p:sp>
+      <p:sp>
+        <p:nvSpPr>
+          <p:cNvPr id="16" name="Text 13"/>
+          <p:cNvSpPr/>
+          <p:nvPr/>
+        </p:nvSpPr>
+        <p:spPr>
+          <a:xfrm>
+            <a:off x="3302000" y="2667000"/>
+            <a:ext cx="7874000" cy="304800"/>
+          </a:xfrm>
+          <a:prstGeom prst="rect">
+            <a:avLst/>
+          </a:prstGeom>
+          <a:noFill/>
+          <a:ln/>
+        </p:spPr>
+        <p:txBody>
+          <a:bodyPr wrap="square" lIns="0" tIns="0" rIns="0" bIns="0" rtlCol="0" anchor="t">
+            <a:normAutofit/>
+          </a:bodyPr>
+          <a:lstStyle/>
+          <a:p>
+            <a:pPr algn="l" indent="0" marL="0">
+              <a:lnSpc>
+                <a:spcPct val="120000"/>
+              </a:lnSpc>
+              <a:buNone/>
+            </a:pPr>
+            <a:r>
+              <a:rPr lang="en-US" sz="1200" dirty="0">
+                <a:solidFill>
+                  <a:srgbClr val="585C62"/>
+                </a:solidFill>
+                <a:latin typeface="IBM Plex Sans" pitchFamily="34" charset="0"/>
+                <a:ea typeface="IBM Plex Sans" pitchFamily="34" charset="-122"/>
+                <a:cs typeface="IBM Plex Sans" pitchFamily="34" charset="-120"/>
+              </a:rPr>
+              <a:t>Integration normally equals development cost.</a:t>
+            </a:r>
+            <a:endParaRPr lang="en-US" sz="1200" dirty="0"/>
+          </a:p>
+        </p:txBody>
+      </p:sp>
+      <p:sp>
+        <p:nvSpPr>
+          <p:cNvPr id="17" name="Shape 14"/>
+          <p:cNvSpPr/>
+          <p:nvPr/>
+        </p:nvSpPr>
+        <p:spPr>
+          <a:xfrm>
+            <a:off x="508000" y="3175000"/>
+            <a:ext cx="11176000" cy="0"/>
+          </a:xfrm>
+          <a:prstGeom prst="line">
+            <a:avLst/>
+          </a:prstGeom>
+          <a:noFill/>
+          <a:ln w="12700">
+            <a:solidFill>
+              <a:srgbClr val="CDCED0"/>
+            </a:solidFill>
+            <a:prstDash val="solid"/>
+          </a:ln>
+        </p:spPr>
+      </p:sp>
+      <p:sp>
+        <p:nvSpPr>
+          <p:cNvPr id="18" name="Shape 15"/>
+          <p:cNvSpPr/>
+          <p:nvPr/>
+        </p:nvSpPr>
+        <p:spPr>
+          <a:xfrm>
+            <a:off x="508000" y="3327400"/>
+            <a:ext cx="11176000" cy="1524000"/>
+          </a:xfrm>
+          <a:prstGeom prst="rect">
+            <a:avLst/>
+          </a:prstGeom>
+          <a:solidFill>
+            <a:srgbClr val="F5FBDE"/>
+          </a:solidFill>
+          <a:ln w="12700">
+            <a:solidFill>
+              <a:srgbClr val="F5FBDE">
+                <a:alpha val="0"/>
+              </a:srgbClr>
+            </a:solidFill>
+            <a:prstDash val="solid"/>
+          </a:ln>
+        </p:spPr>
+      </p:sp>
+      <p:sp>
+        <p:nvSpPr>
+          <p:cNvPr id="19" name="Text 16"/>
+          <p:cNvSpPr/>
+          <p:nvPr/>
+        </p:nvSpPr>
+        <p:spPr>
+          <a:xfrm>
+            <a:off x="711200" y="3556000"/>
+            <a:ext cx="2286000" cy="355600"/>
+          </a:xfrm>
+          <a:prstGeom prst="rect">
+            <a:avLst/>
+          </a:prstGeom>
+          <a:noFill/>
+          <a:ln/>
+        </p:spPr>
+        <p:txBody>
+          <a:bodyPr wrap="square" lIns="0" tIns="0" rIns="0" bIns="0" rtlCol="0" anchor="t">
+            <a:normAutofit/>
+          </a:bodyPr>
+          <a:lstStyle/>
+          <a:p>
+            <a:pPr algn="l" indent="0" marL="0">
+              <a:lnSpc>
+                <a:spcPct val="120000"/>
+              </a:lnSpc>
+              <a:buNone/>
+            </a:pPr>
+            <a:r>
+              <a:rPr lang="en-US" sz="1500" dirty="0">
+                <a:solidFill>
+                  <a:srgbClr val="73B200"/>
+                </a:solidFill>
+                <a:latin typeface="IBM Plex Sans" pitchFamily="34" charset="0"/>
+                <a:ea typeface="IBM Plex Sans" pitchFamily="34" charset="-122"/>
+                <a:cs typeface="IBM Plex Sans" pitchFamily="34" charset="-120"/>
+              </a:rPr>
               <a:t>UNS Dev</a:t>
             </a:r>
+            <a:endParaRPr lang="en-US" sz="1500" dirty="0"/>
+          </a:p>
+        </p:txBody>
+      </p:sp>
+      <p:sp>
+        <p:nvSpPr>
+          <p:cNvPr id="20" name="Text 17"/>
+          <p:cNvSpPr/>
+          <p:nvPr/>
+        </p:nvSpPr>
+        <p:spPr>
+          <a:xfrm>
+            <a:off x="3302000" y="3505200"/>
+            <a:ext cx="1778000" cy="609600"/>
+          </a:xfrm>
+          <a:prstGeom prst="rect">
+            <a:avLst/>
+          </a:prstGeom>
+          <a:noFill/>
+          <a:ln/>
+        </p:spPr>
+        <p:txBody>
+          <a:bodyPr wrap="square" lIns="0" tIns="0" rIns="0" bIns="0" rtlCol="0" anchor="t">
+            <a:normAutofit/>
+          </a:bodyPr>
+          <a:lstStyle/>
+          <a:p>
+            <a:pPr algn="l" indent="0" marL="0">
+              <a:lnSpc>
+                <a:spcPct val="120000"/>
+              </a:lnSpc>
+              <a:buNone/>
+            </a:pPr>
+            <a:r>
+              <a:rPr lang="en-US" sz="3600" dirty="0">
+                <a:solidFill>
+                  <a:srgbClr val="050B14"/>
+                </a:solidFill>
+                <a:latin typeface="IBM Plex Sans" pitchFamily="34" charset="0"/>
+                <a:ea typeface="IBM Plex Sans" pitchFamily="34" charset="-122"/>
+                <a:cs typeface="IBM Plex Sans" pitchFamily="34" charset="-120"/>
+              </a:rPr>
+              <a:t>0.5X</a:t>
+            </a:r>
+            <a:endParaRPr lang="en-US" sz="3600" dirty="0"/>
+          </a:p>
+        </p:txBody>
+      </p:sp>
+      <p:sp>
+        <p:nvSpPr>
+          <p:cNvPr id="21" name="Text 18"/>
+          <p:cNvSpPr/>
+          <p:nvPr/>
+        </p:nvSpPr>
+        <p:spPr>
+          <a:xfrm>
+            <a:off x="5080000" y="3632200"/>
+            <a:ext cx="304800" cy="457200"/>
+          </a:xfrm>
+          <a:prstGeom prst="rect">
+            <a:avLst/>
+          </a:prstGeom>
+          <a:noFill/>
+          <a:ln/>
+        </p:spPr>
+        <p:txBody>
+          <a:bodyPr wrap="square" lIns="0" tIns="0" rIns="0" bIns="0" rtlCol="0" anchor="t">
+            <a:normAutofit/>
+          </a:bodyPr>
+          <a:lstStyle/>
+          <a:p>
+            <a:pPr algn="l" indent="0" marL="0">
+              <a:lnSpc>
+                <a:spcPct val="120000"/>
+              </a:lnSpc>
+              <a:buNone/>
+            </a:pPr>
+            <a:r>
+              <a:rPr lang="en-US" sz="2200" dirty="0">
+                <a:solidFill>
+                  <a:srgbClr val="585C62"/>
+                </a:solidFill>
+                <a:latin typeface="IBM Plex Sans" pitchFamily="34" charset="0"/>
+                <a:ea typeface="IBM Plex Sans" pitchFamily="34" charset="-122"/>
+                <a:cs typeface="IBM Plex Sans" pitchFamily="34" charset="-120"/>
+              </a:rPr>
+              <a:t>+</a:t>
+            </a:r>
+            <a:endParaRPr lang="en-US" sz="2200" dirty="0"/>
+          </a:p>
+        </p:txBody>
+      </p:sp>
+      <p:sp>
+        <p:nvSpPr>
+          <p:cNvPr id="22" name="Text 19"/>
+          <p:cNvSpPr/>
+          <p:nvPr/>
+        </p:nvSpPr>
+        <p:spPr>
+          <a:xfrm>
+            <a:off x="5334000" y="3505200"/>
+            <a:ext cx="2032000" cy="609600"/>
+          </a:xfrm>
+          <a:prstGeom prst="rect">
+            <a:avLst/>
+          </a:prstGeom>
+          <a:noFill/>
+          <a:ln/>
+        </p:spPr>
+        <p:txBody>
+          <a:bodyPr wrap="square" lIns="0" tIns="0" rIns="0" bIns="0" rtlCol="0" anchor="t">
+            <a:normAutofit/>
+          </a:bodyPr>
+          <a:lstStyle/>
+          <a:p>
+            <a:pPr algn="l" indent="0" marL="0">
+              <a:lnSpc>
+                <a:spcPct val="120000"/>
+              </a:lnSpc>
+              <a:buNone/>
+            </a:pPr>
+            <a:r>
+              <a:rPr lang="en-US" sz="3600" dirty="0">
+                <a:solidFill>
+                  <a:srgbClr val="050B14"/>
+                </a:solidFill>
+                <a:latin typeface="IBM Plex Sans" pitchFamily="34" charset="0"/>
+                <a:ea typeface="IBM Plex Sans" pitchFamily="34" charset="-122"/>
+                <a:cs typeface="IBM Plex Sans" pitchFamily="34" charset="-120"/>
+              </a:rPr>
+              <a:t>0.25X</a:t>
+            </a:r>
+            <a:endParaRPr lang="en-US" sz="3600" dirty="0"/>
+          </a:p>
+        </p:txBody>
+      </p:sp>
+      <p:sp>
+        <p:nvSpPr>
+          <p:cNvPr id="23" name="Text 20"/>
+          <p:cNvSpPr/>
+          <p:nvPr/>
+        </p:nvSpPr>
+        <p:spPr>
+          <a:xfrm>
+            <a:off x="7620000" y="3632200"/>
+            <a:ext cx="508000" cy="457200"/>
+          </a:xfrm>
+          <a:prstGeom prst="rect">
+            <a:avLst/>
+          </a:prstGeom>
+          <a:noFill/>
+          <a:ln/>
+        </p:spPr>
+        <p:txBody>
+          <a:bodyPr wrap="square" lIns="0" tIns="0" rIns="0" bIns="0" rtlCol="0" anchor="t">
+            <a:normAutofit/>
+          </a:bodyPr>
+          <a:lstStyle/>
+          <a:p>
+            <a:pPr algn="l" indent="0" marL="0">
+              <a:lnSpc>
+                <a:spcPct val="120000"/>
+              </a:lnSpc>
+              <a:buNone/>
+            </a:pPr>
+            <a:r>
+              <a:rPr lang="en-US" sz="2200" dirty="0">
+                <a:solidFill>
+                  <a:srgbClr val="585C62"/>
+                </a:solidFill>
+                <a:latin typeface="IBM Plex Sans" pitchFamily="34" charset="0"/>
+                <a:ea typeface="IBM Plex Sans" pitchFamily="34" charset="-122"/>
+                <a:cs typeface="IBM Plex Sans" pitchFamily="34" charset="-120"/>
+              </a:rPr>
+              <a:t>≈</a:t>
+            </a:r>
+            <a:endParaRPr lang="en-US" sz="2200" dirty="0"/>
+          </a:p>
+        </p:txBody>
+      </p:sp>
+      <p:sp>
+        <p:nvSpPr>
+          <p:cNvPr id="24" name="Text 21"/>
+          <p:cNvSpPr/>
+          <p:nvPr/>
+        </p:nvSpPr>
+        <p:spPr>
+          <a:xfrm>
+            <a:off x="8382000" y="3429000"/>
+            <a:ext cx="3048000" cy="711200"/>
+          </a:xfrm>
+          <a:prstGeom prst="rect">
+            <a:avLst/>
+          </a:prstGeom>
+          <a:noFill/>
+          <a:ln/>
+        </p:spPr>
+        <p:txBody>
+          <a:bodyPr wrap="square" lIns="0" tIns="0" rIns="0" bIns="0" rtlCol="0" anchor="t">
+            <a:normAutofit/>
+          </a:bodyPr>
+          <a:lstStyle/>
+          <a:p>
+            <a:pPr algn="r" indent="0" marL="0">
+              <a:lnSpc>
+                <a:spcPct val="120000"/>
+              </a:lnSpc>
+              <a:buNone/>
+            </a:pPr>
+            <a:r>
+              <a:rPr lang="en-US" sz="4800" dirty="0">
+                <a:solidFill>
+                  <a:srgbClr val="73B200"/>
+                </a:solidFill>
+                <a:latin typeface="IBM Plex Sans" pitchFamily="34" charset="0"/>
+                <a:ea typeface="IBM Plex Sans" pitchFamily="34" charset="-122"/>
+                <a:cs typeface="IBM Plex Sans" pitchFamily="34" charset="-120"/>
+              </a:rPr>
+              <a:t>0.75X</a:t>
+            </a:r>
+            <a:endParaRPr lang="en-US" sz="4800" dirty="0"/>
+          </a:p>
+        </p:txBody>
+      </p:sp>
+      <p:sp>
+        <p:nvSpPr>
+          <p:cNvPr id="25" name="Text 22"/>
+          <p:cNvSpPr/>
+          <p:nvPr/>
+        </p:nvSpPr>
+        <p:spPr>
+          <a:xfrm>
+            <a:off x="3302000" y="4318000"/>
+            <a:ext cx="7874000" cy="304800"/>
+          </a:xfrm>
+          <a:prstGeom prst="rect">
+            <a:avLst/>
+          </a:prstGeom>
+          <a:noFill/>
+          <a:ln/>
+        </p:spPr>
+        <p:txBody>
+          <a:bodyPr wrap="square" lIns="0" tIns="0" rIns="0" bIns="0" rtlCol="0" anchor="t">
+            <a:normAutofit/>
+          </a:bodyPr>
+          <a:lstStyle/>
+          <a:p>
+            <a:pPr algn="l" indent="0" marL="0">
+              <a:lnSpc>
+                <a:spcPct val="120000"/>
+              </a:lnSpc>
+              <a:buNone/>
+            </a:pPr>
+            <a:r>
+              <a:rPr lang="en-US" sz="1200" dirty="0">
+                <a:solidFill>
+                  <a:srgbClr val="585C62"/>
+                </a:solidFill>
+                <a:latin typeface="IBM Plex Sans" pitchFamily="34" charset="0"/>
+                <a:ea typeface="IBM Plex Sans" pitchFamily="34" charset="-122"/>
+                <a:cs typeface="IBM Plex Sans" pitchFamily="34" charset="-120"/>
+              </a:rPr>
+              <a:t>Integration falls as the reusable foundation compounds.</a:t>
+            </a:r>
             <a:endParaRPr lang="en-US" sz="1200" dirty="0"/>
           </a:p>
         </p:txBody>
       </p:sp>
       <p:sp>
         <p:nvSpPr>
-          <p:cNvPr id="18" name="Text 15"/>
-          <p:cNvSpPr/>
-          <p:nvPr/>
-        </p:nvSpPr>
-        <p:spPr>
-          <a:xfrm>
-            <a:off x="5410200" y="4318000"/>
-            <a:ext cx="1524000" cy="254000"/>
+          <p:cNvPr id="26" name="Shape 23"/>
+          <p:cNvSpPr/>
+          <p:nvPr/>
+        </p:nvSpPr>
+        <p:spPr>
+          <a:xfrm>
+            <a:off x="508000" y="4826000"/>
+            <a:ext cx="11176000" cy="0"/>
+          </a:xfrm>
+          <a:prstGeom prst="line">
+            <a:avLst/>
+          </a:prstGeom>
+          <a:noFill/>
+          <a:ln w="12700">
+            <a:solidFill>
+              <a:srgbClr val="CDCED0"/>
+            </a:solidFill>
+            <a:prstDash val="solid"/>
+          </a:ln>
+        </p:spPr>
+      </p:sp>
+      <p:sp>
+        <p:nvSpPr>
+          <p:cNvPr id="27" name="Text 24"/>
+          <p:cNvSpPr/>
+          <p:nvPr/>
+        </p:nvSpPr>
+        <p:spPr>
+          <a:xfrm>
+            <a:off x="609600" y="5969000"/>
+            <a:ext cx="10972800" cy="355600"/>
           </a:xfrm>
           <a:prstGeom prst="rect">
             <a:avLst/>
@@ -6605,15 +7024,59 @@
               <a:buNone/>
             </a:pPr>
             <a:r>
-              <a:rPr lang="en-US" sz="900" spc="80" kern="0" dirty="0">
-                <a:solidFill>
-                  <a:srgbClr val="585C62"/>
+              <a:rPr lang="en-US" sz="1300" dirty="0">
+                <a:solidFill>
+                  <a:srgbClr val="050B14"/>
+                </a:solidFill>
+                <a:latin typeface="IBM Plex Sans" pitchFamily="34" charset="0"/>
+                <a:ea typeface="IBM Plex Sans" pitchFamily="34" charset="-122"/>
+                <a:cs typeface="IBM Plex Sans" pitchFamily="34" charset="-120"/>
+              </a:rPr>
+              <a:t>Customer resources are saved as the namespace and application patterns are reused.</a:t>
+            </a:r>
+            <a:endParaRPr lang="en-US" sz="1300" dirty="0"/>
+          </a:p>
+        </p:txBody>
+      </p:sp>
+      <p:sp>
+        <p:nvSpPr>
+          <p:cNvPr id="28" name="Text 25"/>
+          <p:cNvSpPr/>
+          <p:nvPr/>
+        </p:nvSpPr>
+        <p:spPr>
+          <a:xfrm>
+            <a:off x="609600" y="6273800"/>
+            <a:ext cx="8890000" cy="203200"/>
+          </a:xfrm>
+          <a:prstGeom prst="rect">
+            <a:avLst/>
+          </a:prstGeom>
+          <a:noFill/>
+          <a:ln/>
+        </p:spPr>
+        <p:txBody>
+          <a:bodyPr wrap="square" lIns="0" tIns="0" rIns="0" bIns="0" rtlCol="0" anchor="t">
+            <a:normAutofit/>
+          </a:bodyPr>
+          <a:lstStyle/>
+          <a:p>
+            <a:pPr algn="l" indent="0" marL="0">
+              <a:lnSpc>
+                <a:spcPct val="120000"/>
+              </a:lnSpc>
+              <a:buNone/>
+            </a:pPr>
+            <a:r>
+              <a:rPr lang="en-US" sz="900" dirty="0">
+                <a:solidFill>
+                  <a:srgbClr val="A5A5A5"/>
                 </a:solidFill>
                 <a:latin typeface="IBM Plex Mono" pitchFamily="34" charset="0"/>
                 <a:ea typeface="IBM Plex Mono" pitchFamily="34" charset="-122"/>
                 <a:cs typeface="IBM Plex Mono" pitchFamily="34" charset="-120"/>
               </a:rPr>
-              <a:t>DEV COST</a:t>
+              <a:t>Illustrative relative model — not a customer KPI.</a:t>
             </a:r>
             <a:endParaRPr lang="en-US" sz="900" dirty="0"/>
           </a:p>
@@ -6621,14 +7084,14 @@
       </p:sp>
       <p:sp>
         <p:nvSpPr>
-          <p:cNvPr id="19" name="Text 16"/>
-          <p:cNvSpPr/>
-          <p:nvPr/>
-        </p:nvSpPr>
-        <p:spPr>
-          <a:xfrm>
-            <a:off x="5410200" y="4572000"/>
-            <a:ext cx="1524000" cy="711200"/>
+          <p:cNvPr id="29" name="Text 26"/>
+          <p:cNvSpPr/>
+          <p:nvPr/>
+        </p:nvSpPr>
+        <p:spPr>
+          <a:xfrm>
+            <a:off x="177800" y="6502400"/>
+            <a:ext cx="8255000" cy="203200"/>
           </a:xfrm>
           <a:prstGeom prst="rect">
             <a:avLst/>
@@ -6649,323 +7112,15 @@
               <a:buNone/>
             </a:pPr>
             <a:r>
-              <a:rPr lang="en-US" sz="3400" b="1" dirty="0">
-                <a:solidFill>
-                  <a:srgbClr val="73B200"/>
-                </a:solidFill>
-                <a:latin typeface="Tektur" pitchFamily="34" charset="0"/>
-                <a:ea typeface="Tektur" pitchFamily="34" charset="-122"/>
-                <a:cs typeface="Tektur" pitchFamily="34" charset="-120"/>
-              </a:rPr>
-              <a:t>0.5X</a:t>
-            </a:r>
-            <a:endParaRPr lang="en-US" sz="3400" dirty="0"/>
-          </a:p>
-        </p:txBody>
-      </p:sp>
-      <p:sp>
-        <p:nvSpPr>
-          <p:cNvPr id="20" name="Text 17"/>
-          <p:cNvSpPr/>
-          <p:nvPr/>
-        </p:nvSpPr>
-        <p:spPr>
-          <a:xfrm>
-            <a:off x="6959600" y="4635500"/>
-            <a:ext cx="381000" cy="508000"/>
-          </a:xfrm>
-          <a:prstGeom prst="rect">
-            <a:avLst/>
-          </a:prstGeom>
-          <a:noFill/>
-          <a:ln/>
-        </p:spPr>
-        <p:txBody>
-          <a:bodyPr wrap="square" lIns="0" tIns="0" rIns="0" bIns="0" rtlCol="0" anchor="t">
-            <a:normAutofit/>
-          </a:bodyPr>
-          <a:lstStyle/>
-          <a:p>
-            <a:pPr algn="ctr" indent="0" marL="0">
-              <a:lnSpc>
-                <a:spcPct val="120000"/>
-              </a:lnSpc>
-              <a:buNone/>
-            </a:pPr>
-            <a:r>
-              <a:rPr lang="en-US" sz="2400" dirty="0">
-                <a:solidFill>
-                  <a:srgbClr val="050B14"/>
-                </a:solidFill>
-                <a:latin typeface="Tektur" pitchFamily="34" charset="0"/>
-                <a:ea typeface="Tektur" pitchFamily="34" charset="-122"/>
-                <a:cs typeface="Tektur" pitchFamily="34" charset="-120"/>
-              </a:rPr>
-              <a:t>+</a:t>
-            </a:r>
-            <a:endParaRPr lang="en-US" sz="2400" dirty="0"/>
-          </a:p>
-        </p:txBody>
-      </p:sp>
-      <p:sp>
-        <p:nvSpPr>
-          <p:cNvPr id="21" name="Text 18"/>
-          <p:cNvSpPr/>
-          <p:nvPr/>
-        </p:nvSpPr>
-        <p:spPr>
-          <a:xfrm>
-            <a:off x="7391400" y="4318000"/>
-            <a:ext cx="2286000" cy="254000"/>
-          </a:xfrm>
-          <a:prstGeom prst="rect">
-            <a:avLst/>
-          </a:prstGeom>
-          <a:noFill/>
-          <a:ln/>
-        </p:spPr>
-        <p:txBody>
-          <a:bodyPr wrap="square" lIns="0" tIns="0" rIns="0" bIns="0" rtlCol="0" anchor="t">
-            <a:normAutofit/>
-          </a:bodyPr>
-          <a:lstStyle/>
-          <a:p>
-            <a:pPr algn="l" indent="0" marL="0">
-              <a:lnSpc>
-                <a:spcPct val="120000"/>
-              </a:lnSpc>
-              <a:buNone/>
-            </a:pPr>
-            <a:r>
-              <a:rPr lang="en-US" sz="900" spc="80" kern="0" dirty="0">
-                <a:solidFill>
-                  <a:srgbClr val="585C62"/>
+              <a:rPr lang="en-US" sz="850" dirty="0">
+                <a:solidFill>
+                  <a:srgbClr val="A5A5A5"/>
                 </a:solidFill>
                 <a:latin typeface="IBM Plex Mono" pitchFamily="34" charset="0"/>
                 <a:ea typeface="IBM Plex Mono" pitchFamily="34" charset="-122"/>
                 <a:cs typeface="IBM Plex Mono" pitchFamily="34" charset="-120"/>
               </a:rPr>
-              <a:t>INTEGRATION COST</a:t>
-            </a:r>
-            <a:endParaRPr lang="en-US" sz="900" dirty="0"/>
-          </a:p>
-        </p:txBody>
-      </p:sp>
-      <p:sp>
-        <p:nvSpPr>
-          <p:cNvPr id="22" name="Text 19"/>
-          <p:cNvSpPr/>
-          <p:nvPr/>
-        </p:nvSpPr>
-        <p:spPr>
-          <a:xfrm>
-            <a:off x="7391400" y="4572000"/>
-            <a:ext cx="2286000" cy="711200"/>
-          </a:xfrm>
-          <a:prstGeom prst="rect">
-            <a:avLst/>
-          </a:prstGeom>
-          <a:noFill/>
-          <a:ln/>
-        </p:spPr>
-        <p:txBody>
-          <a:bodyPr wrap="square" lIns="0" tIns="0" rIns="0" bIns="0" rtlCol="0" anchor="t">
-            <a:normAutofit/>
-          </a:bodyPr>
-          <a:lstStyle/>
-          <a:p>
-            <a:pPr algn="l" indent="0" marL="0">
-              <a:lnSpc>
-                <a:spcPct val="120000"/>
-              </a:lnSpc>
-              <a:buNone/>
-            </a:pPr>
-            <a:r>
-              <a:rPr lang="en-US" sz="3400" b="1" dirty="0">
-                <a:solidFill>
-                  <a:srgbClr val="73B200"/>
-                </a:solidFill>
-                <a:latin typeface="Tektur" pitchFamily="34" charset="0"/>
-                <a:ea typeface="Tektur" pitchFamily="34" charset="-122"/>
-                <a:cs typeface="Tektur" pitchFamily="34" charset="-120"/>
-              </a:rPr>
-              <a:t>0.25X</a:t>
-            </a:r>
-            <a:endParaRPr lang="en-US" sz="3400" dirty="0"/>
-          </a:p>
-        </p:txBody>
-      </p:sp>
-      <p:sp>
-        <p:nvSpPr>
-          <p:cNvPr id="23" name="Text 20"/>
-          <p:cNvSpPr/>
-          <p:nvPr/>
-        </p:nvSpPr>
-        <p:spPr>
-          <a:xfrm>
-            <a:off x="9525000" y="4635500"/>
-            <a:ext cx="381000" cy="508000"/>
-          </a:xfrm>
-          <a:prstGeom prst="rect">
-            <a:avLst/>
-          </a:prstGeom>
-          <a:noFill/>
-          <a:ln/>
-        </p:spPr>
-        <p:txBody>
-          <a:bodyPr wrap="square" lIns="0" tIns="0" rIns="0" bIns="0" rtlCol="0" anchor="t">
-            <a:normAutofit/>
-          </a:bodyPr>
-          <a:lstStyle/>
-          <a:p>
-            <a:pPr algn="ctr" indent="0" marL="0">
-              <a:lnSpc>
-                <a:spcPct val="120000"/>
-              </a:lnSpc>
-              <a:buNone/>
-            </a:pPr>
-            <a:r>
-              <a:rPr lang="en-US" sz="2400" dirty="0">
-                <a:solidFill>
-                  <a:srgbClr val="050B14"/>
-                </a:solidFill>
-                <a:latin typeface="Tektur" pitchFamily="34" charset="0"/>
-                <a:ea typeface="Tektur" pitchFamily="34" charset="-122"/>
-                <a:cs typeface="Tektur" pitchFamily="34" charset="-120"/>
-              </a:rPr>
-              <a:t>≈</a:t>
-            </a:r>
-            <a:endParaRPr lang="en-US" sz="2400" dirty="0"/>
-          </a:p>
-        </p:txBody>
-      </p:sp>
-      <p:sp>
-        <p:nvSpPr>
-          <p:cNvPr id="24" name="Text 21"/>
-          <p:cNvSpPr/>
-          <p:nvPr/>
-        </p:nvSpPr>
-        <p:spPr>
-          <a:xfrm>
-            <a:off x="9906000" y="4318000"/>
-            <a:ext cx="1524000" cy="254000"/>
-          </a:xfrm>
-          <a:prstGeom prst="rect">
-            <a:avLst/>
-          </a:prstGeom>
-          <a:noFill/>
-          <a:ln/>
-        </p:spPr>
-        <p:txBody>
-          <a:bodyPr wrap="square" lIns="0" tIns="0" rIns="0" bIns="0" rtlCol="0" anchor="t">
-            <a:normAutofit/>
-          </a:bodyPr>
-          <a:lstStyle/>
-          <a:p>
-            <a:pPr algn="l" indent="0" marL="0">
-              <a:lnSpc>
-                <a:spcPct val="120000"/>
-              </a:lnSpc>
-              <a:buNone/>
-            </a:pPr>
-            <a:r>
-              <a:rPr lang="en-US" sz="900" spc="80" kern="0" dirty="0">
-                <a:solidFill>
-                  <a:srgbClr val="585C62"/>
-                </a:solidFill>
-                <a:latin typeface="IBM Plex Mono" pitchFamily="34" charset="0"/>
-                <a:ea typeface="IBM Plex Mono" pitchFamily="34" charset="-122"/>
-                <a:cs typeface="IBM Plex Mono" pitchFamily="34" charset="-120"/>
-              </a:rPr>
-              <a:t>TOTAL</a:t>
-            </a:r>
-            <a:endParaRPr lang="en-US" sz="900" dirty="0"/>
-          </a:p>
-        </p:txBody>
-      </p:sp>
-      <p:sp>
-        <p:nvSpPr>
-          <p:cNvPr id="25" name="Text 22"/>
-          <p:cNvSpPr/>
-          <p:nvPr/>
-        </p:nvSpPr>
-        <p:spPr>
-          <a:xfrm>
-            <a:off x="9906000" y="4495800"/>
-            <a:ext cx="1651000" cy="812800"/>
-          </a:xfrm>
-          <a:prstGeom prst="rect">
-            <a:avLst/>
-          </a:prstGeom>
-          <a:noFill/>
-          <a:ln/>
-        </p:spPr>
-        <p:txBody>
-          <a:bodyPr wrap="square" lIns="0" tIns="0" rIns="0" bIns="0" rtlCol="0" anchor="t">
-            <a:normAutofit/>
-          </a:bodyPr>
-          <a:lstStyle/>
-          <a:p>
-            <a:pPr algn="l" indent="0" marL="0">
-              <a:lnSpc>
-                <a:spcPct val="120000"/>
-              </a:lnSpc>
-              <a:buNone/>
-            </a:pPr>
-            <a:r>
-              <a:rPr lang="en-US" sz="4000" b="1" dirty="0">
-                <a:solidFill>
-                  <a:srgbClr val="73B200"/>
-                </a:solidFill>
-                <a:latin typeface="Tektur" pitchFamily="34" charset="0"/>
-                <a:ea typeface="Tektur" pitchFamily="34" charset="-122"/>
-                <a:cs typeface="Tektur" pitchFamily="34" charset="-120"/>
-              </a:rPr>
-              <a:t>0.75X</a:t>
-            </a:r>
-            <a:endParaRPr lang="en-US" sz="4000" dirty="0"/>
-          </a:p>
-        </p:txBody>
-      </p:sp>
-      <p:sp>
-        <p:nvSpPr>
-          <p:cNvPr id="26" name="Text 23"/>
-          <p:cNvSpPr/>
-          <p:nvPr/>
-        </p:nvSpPr>
-        <p:spPr>
-          <a:xfrm>
-            <a:off x="5410200" y="5283200"/>
-            <a:ext cx="5461000" cy="254000"/>
-          </a:xfrm>
-          <a:prstGeom prst="rect">
-            <a:avLst/>
-          </a:prstGeom>
-          <a:noFill/>
-          <a:ln/>
-        </p:spPr>
-        <p:txBody>
-          <a:bodyPr wrap="square" lIns="0" tIns="0" rIns="0" bIns="0" rtlCol="0" anchor="t">
-            <a:normAutofit/>
-          </a:bodyPr>
-          <a:lstStyle/>
-          <a:p>
-            <a:pPr algn="l" indent="0" marL="0">
-              <a:lnSpc>
-                <a:spcPct val="120000"/>
-              </a:lnSpc>
-              <a:buNone/>
-            </a:pPr>
-            <a:r>
-              <a:rPr lang="en-US" sz="850" dirty="0">
-                <a:solidFill>
-                  <a:srgbClr val="585C62"/>
-                </a:solidFill>
-                <a:latin typeface="IBM Plex Sans" pitchFamily="34" charset="0"/>
-                <a:ea typeface="IBM Plex Sans" pitchFamily="34" charset="-122"/>
-                <a:cs typeface="IBM Plex Sans" pitchFamily="34" charset="-120"/>
-              </a:rPr>
-              <a:t>Integration falls as the reusable foundation compounds.</a:t>
+              <a:t>Copyright © 2026 Tier0. All rights reserved.</a:t>
             </a:r>
             <a:endParaRPr lang="en-US" sz="850" dirty="0"/>
           </a:p>
@@ -6973,95 +7128,7 @@
       </p:sp>
       <p:sp>
         <p:nvSpPr>
-          <p:cNvPr id="27" name="Text 24"/>
-          <p:cNvSpPr/>
-          <p:nvPr/>
-        </p:nvSpPr>
-        <p:spPr>
-          <a:xfrm>
-            <a:off x="609600" y="6121400"/>
-            <a:ext cx="10972800" cy="330200"/>
-          </a:xfrm>
-          <a:prstGeom prst="rect">
-            <a:avLst/>
-          </a:prstGeom>
-          <a:noFill/>
-          <a:ln/>
-        </p:spPr>
-        <p:txBody>
-          <a:bodyPr wrap="square" lIns="0" tIns="0" rIns="0" bIns="0" rtlCol="0" anchor="t">
-            <a:normAutofit/>
-          </a:bodyPr>
-          <a:lstStyle/>
-          <a:p>
-            <a:pPr algn="l" indent="0" marL="0">
-              <a:lnSpc>
-                <a:spcPct val="120000"/>
-              </a:lnSpc>
-              <a:buNone/>
-            </a:pPr>
-            <a:r>
-              <a:rPr lang="en-US" sz="1100" b="1" dirty="0">
-                <a:solidFill>
-                  <a:srgbClr val="050B14"/>
-                </a:solidFill>
-                <a:latin typeface="IBM Plex Sans" pitchFamily="34" charset="0"/>
-                <a:ea typeface="IBM Plex Sans" pitchFamily="34" charset="-122"/>
-                <a:cs typeface="IBM Plex Sans" pitchFamily="34" charset="-120"/>
-              </a:rPr>
-              <a:t>Customer resources are saved as the namespace and application patterns are reused.</a:t>
-            </a:r>
-            <a:endParaRPr lang="en-US" sz="1100" dirty="0"/>
-          </a:p>
-        </p:txBody>
-      </p:sp>
-      <p:sp>
-        <p:nvSpPr>
-          <p:cNvPr id="28" name="Text 25"/>
-          <p:cNvSpPr/>
-          <p:nvPr/>
-        </p:nvSpPr>
-        <p:spPr>
-          <a:xfrm>
-            <a:off x="177800" y="6502400"/>
-            <a:ext cx="8255000" cy="203200"/>
-          </a:xfrm>
-          <a:prstGeom prst="rect">
-            <a:avLst/>
-          </a:prstGeom>
-          <a:noFill/>
-          <a:ln/>
-        </p:spPr>
-        <p:txBody>
-          <a:bodyPr wrap="square" lIns="0" tIns="0" rIns="0" bIns="0" rtlCol="0" anchor="t">
-            <a:normAutofit/>
-          </a:bodyPr>
-          <a:lstStyle/>
-          <a:p>
-            <a:pPr algn="l" indent="0" marL="0">
-              <a:lnSpc>
-                <a:spcPct val="120000"/>
-              </a:lnSpc>
-              <a:buNone/>
-            </a:pPr>
-            <a:r>
-              <a:rPr lang="en-US" sz="850" dirty="0">
-                <a:solidFill>
-                  <a:srgbClr val="A5A5A5"/>
-                </a:solidFill>
-                <a:latin typeface="IBM Plex Mono" pitchFamily="34" charset="0"/>
-                <a:ea typeface="IBM Plex Mono" pitchFamily="34" charset="-122"/>
-                <a:cs typeface="IBM Plex Mono" pitchFamily="34" charset="-120"/>
-              </a:rPr>
-              <a:t>Copyright © 2026 Tier0. All rights reserved.</a:t>
-            </a:r>
-            <a:endParaRPr lang="en-US" sz="850" dirty="0"/>
-          </a:p>
-        </p:txBody>
-      </p:sp>
-      <p:sp>
-        <p:nvSpPr>
-          <p:cNvPr id="29" name="Text 26"/>
+          <p:cNvPr id="30" name="Text 27"/>
           <p:cNvSpPr/>
           <p:nvPr/>
         </p:nvSpPr>
@@ -7168,72 +7235,28 @@
         <p:spPr>
           <a:xfrm>
             <a:off x="508000" y="431800"/>
-            <a:ext cx="5080000" cy="228600"/>
-          </a:xfrm>
-          <a:prstGeom prst="rect">
-            <a:avLst/>
-          </a:prstGeom>
-          <a:noFill/>
-          <a:ln/>
-        </p:spPr>
-        <p:txBody>
-          <a:bodyPr wrap="square" lIns="0" tIns="0" rIns="0" bIns="0" rtlCol="0" anchor="t">
-            <a:normAutofit/>
-          </a:bodyPr>
-          <a:lstStyle/>
-          <a:p>
-            <a:pPr algn="l" indent="0" marL="0">
-              <a:lnSpc>
-                <a:spcPct val="120000"/>
-              </a:lnSpc>
-              <a:buNone/>
-            </a:pPr>
-            <a:r>
-              <a:rPr lang="en-US" sz="1050" b="1" spc="100" kern="0" dirty="0">
-                <a:solidFill>
-                  <a:srgbClr val="73B200"/>
-                </a:solidFill>
-                <a:latin typeface="IBM Plex Mono" pitchFamily="34" charset="0"/>
-                <a:ea typeface="IBM Plex Mono" pitchFamily="34" charset="-122"/>
-                <a:cs typeface="IBM Plex Mono" pitchFamily="34" charset="-120"/>
-              </a:rPr>
-              <a:t>RECOMMENDED ADOPTION PATH</a:t>
-            </a:r>
-            <a:endParaRPr lang="en-US" sz="1050" dirty="0"/>
-          </a:p>
-        </p:txBody>
-      </p:sp>
-      <p:sp>
-        <p:nvSpPr>
-          <p:cNvPr id="4" name="Text 1"/>
-          <p:cNvSpPr/>
-          <p:nvPr/>
-        </p:nvSpPr>
-        <p:spPr>
-          <a:xfrm>
-            <a:off x="508000" y="762000"/>
-            <a:ext cx="10922000" cy="889000"/>
-          </a:xfrm>
-          <a:prstGeom prst="rect">
-            <a:avLst/>
-          </a:prstGeom>
-          <a:noFill/>
-          <a:ln/>
-        </p:spPr>
-        <p:txBody>
-          <a:bodyPr wrap="square" lIns="0" tIns="0" rIns="0" bIns="0" rtlCol="0" anchor="t">
-            <a:normAutofit/>
-          </a:bodyPr>
-          <a:lstStyle/>
-          <a:p>
-            <a:pPr algn="l" indent="0" marL="0">
-              <a:lnSpc>
-                <a:spcPct val="120000"/>
-              </a:lnSpc>
-              <a:buNone/>
-            </a:pPr>
-            <a:r>
-              <a:rPr lang="en-US" sz="3000" spc="-40" kern="0" dirty="0">
+            <a:ext cx="10922000" cy="812800"/>
+          </a:xfrm>
+          <a:prstGeom prst="rect">
+            <a:avLst/>
+          </a:prstGeom>
+          <a:noFill/>
+          <a:ln/>
+        </p:spPr>
+        <p:txBody>
+          <a:bodyPr wrap="square" lIns="0" tIns="0" rIns="0" bIns="0" rtlCol="0" anchor="t">
+            <a:normAutofit/>
+          </a:bodyPr>
+          <a:lstStyle/>
+          <a:p>
+            <a:pPr algn="l" indent="0" marL="0">
+              <a:lnSpc>
+                <a:spcPct val="115000"/>
+              </a:lnSpc>
+              <a:buNone/>
+            </a:pPr>
+            <a:r>
+              <a:rPr lang="en-US" sz="2800" spc="-40" kern="0" dirty="0">
                 <a:solidFill>
                   <a:srgbClr val="050B14"/>
                 </a:solidFill>
@@ -7243,20 +7266,20 @@
               </a:rPr>
               <a:t>Start with a valuable use case. Build the reusable foundation behind it.</a:t>
             </a:r>
-            <a:endParaRPr lang="en-US" sz="3000" dirty="0"/>
-          </a:p>
-        </p:txBody>
-      </p:sp>
-      <p:sp>
-        <p:nvSpPr>
-          <p:cNvPr id="5" name="Shape 2"/>
-          <p:cNvSpPr/>
-          <p:nvPr/>
-        </p:nvSpPr>
-        <p:spPr>
-          <a:xfrm>
-            <a:off x="508000" y="1968500"/>
-            <a:ext cx="2679700" cy="3454400"/>
+            <a:endParaRPr lang="en-US" sz="2800" dirty="0"/>
+          </a:p>
+        </p:txBody>
+      </p:sp>
+      <p:sp>
+        <p:nvSpPr>
+          <p:cNvPr id="4" name="Shape 1"/>
+          <p:cNvSpPr/>
+          <p:nvPr/>
+        </p:nvSpPr>
+        <p:spPr>
+          <a:xfrm>
+            <a:off x="508000" y="1879600"/>
+            <a:ext cx="2679700" cy="3530600"/>
           </a:xfrm>
           <a:prstGeom prst="rect">
             <a:avLst/>
@@ -7274,22 +7297,110 @@
       </p:sp>
       <p:sp>
         <p:nvSpPr>
-          <p:cNvPr id="6" name="Shape 3"/>
-          <p:cNvSpPr/>
-          <p:nvPr/>
-        </p:nvSpPr>
-        <p:spPr>
-          <a:xfrm>
-            <a:off x="508000" y="1968500"/>
-            <a:ext cx="2679700" cy="0"/>
+          <p:cNvPr id="5" name="Text 2"/>
+          <p:cNvSpPr/>
+          <p:nvPr/>
+        </p:nvSpPr>
+        <p:spPr>
+          <a:xfrm>
+            <a:off x="711200" y="2133600"/>
+            <a:ext cx="2273300" cy="228600"/>
+          </a:xfrm>
+          <a:prstGeom prst="rect">
+            <a:avLst/>
+          </a:prstGeom>
+          <a:noFill/>
+          <a:ln/>
+        </p:spPr>
+        <p:txBody>
+          <a:bodyPr wrap="square" lIns="0" tIns="0" rIns="0" bIns="0" rtlCol="0" anchor="t">
+            <a:normAutofit/>
+          </a:bodyPr>
+          <a:lstStyle/>
+          <a:p>
+            <a:pPr algn="l" indent="0" marL="0">
+              <a:lnSpc>
+                <a:spcPct val="120000"/>
+              </a:lnSpc>
+              <a:buNone/>
+            </a:pPr>
+            <a:r>
+              <a:rPr lang="en-US" sz="1100" b="1" spc="80" kern="0" dirty="0">
+                <a:solidFill>
+                  <a:srgbClr val="73B200"/>
+                </a:solidFill>
+                <a:latin typeface="IBM Plex Mono" pitchFamily="34" charset="0"/>
+                <a:ea typeface="IBM Plex Mono" pitchFamily="34" charset="-122"/>
+                <a:cs typeface="IBM Plex Mono" pitchFamily="34" charset="-120"/>
+              </a:rPr>
+              <a:t>01</a:t>
+            </a:r>
+            <a:endParaRPr lang="en-US" sz="1100" dirty="0"/>
+          </a:p>
+        </p:txBody>
+      </p:sp>
+      <p:sp>
+        <p:nvSpPr>
+          <p:cNvPr id="6" name="Text 3"/>
+          <p:cNvSpPr/>
+          <p:nvPr/>
+        </p:nvSpPr>
+        <p:spPr>
+          <a:xfrm>
+            <a:off x="711200" y="2489200"/>
+            <a:ext cx="2273300" cy="889000"/>
+          </a:xfrm>
+          <a:prstGeom prst="rect">
+            <a:avLst/>
+          </a:prstGeom>
+          <a:noFill/>
+          <a:ln/>
+        </p:spPr>
+        <p:txBody>
+          <a:bodyPr wrap="square" lIns="0" tIns="0" rIns="0" bIns="0" rtlCol="0" anchor="t">
+            <a:normAutofit/>
+          </a:bodyPr>
+          <a:lstStyle/>
+          <a:p>
+            <a:pPr algn="l" indent="0" marL="0">
+              <a:lnSpc>
+                <a:spcPct val="125000"/>
+              </a:lnSpc>
+              <a:buNone/>
+            </a:pPr>
+            <a:r>
+              <a:rPr lang="en-US" sz="1400" dirty="0">
+                <a:solidFill>
+                  <a:srgbClr val="050B14"/>
+                </a:solidFill>
+                <a:latin typeface="IBM Plex Sans" pitchFamily="34" charset="0"/>
+                <a:ea typeface="IBM Plex Sans" pitchFamily="34" charset="-122"/>
+                <a:cs typeface="IBM Plex Sans" pitchFamily="34" charset="-120"/>
+              </a:rPr>
+              <a:t>Select a valuable operational use case</a:t>
+            </a:r>
+            <a:endParaRPr lang="en-US" sz="1400" dirty="0"/>
+          </a:p>
+        </p:txBody>
+      </p:sp>
+      <p:sp>
+        <p:nvSpPr>
+          <p:cNvPr id="7" name="Shape 4"/>
+          <p:cNvSpPr/>
+          <p:nvPr/>
+        </p:nvSpPr>
+        <p:spPr>
+          <a:xfrm>
+            <a:off x="711200" y="3505200"/>
+            <a:ext cx="2273300" cy="0"/>
           </a:xfrm>
           <a:prstGeom prst="line">
             <a:avLst/>
           </a:prstGeom>
           <a:noFill/>
-          <a:ln w="25400">
+          <a:ln w="12700">
             <a:solidFill>
-              <a:srgbClr val="B2ED1D"/>
+              <a:srgbClr val="CDCED0"/>
             </a:solidFill>
             <a:prstDash val="solid"/>
           </a:ln>
@@ -7297,13 +7408,126 @@
       </p:sp>
       <p:sp>
         <p:nvSpPr>
-          <p:cNvPr id="7" name="Text 4"/>
-          <p:cNvSpPr/>
-          <p:nvPr/>
-        </p:nvSpPr>
-        <p:spPr>
-          <a:xfrm>
-            <a:off x="711200" y="2298700"/>
+          <p:cNvPr id="8" name="Text 5"/>
+          <p:cNvSpPr/>
+          <p:nvPr/>
+        </p:nvSpPr>
+        <p:spPr>
+          <a:xfrm>
+            <a:off x="711200" y="3708400"/>
+            <a:ext cx="2273300" cy="1143000"/>
+          </a:xfrm>
+          <a:prstGeom prst="rect">
+            <a:avLst/>
+          </a:prstGeom>
+          <a:noFill/>
+          <a:ln/>
+        </p:spPr>
+        <p:txBody>
+          <a:bodyPr wrap="square" lIns="0" tIns="0" rIns="0" bIns="0" rtlCol="0" anchor="t">
+            <a:normAutofit/>
+          </a:bodyPr>
+          <a:lstStyle/>
+          <a:p>
+            <a:pPr algn="l" indent="0" marL="0">
+              <a:lnSpc>
+                <a:spcPct val="140000"/>
+              </a:lnSpc>
+              <a:buNone/>
+            </a:pPr>
+            <a:r>
+              <a:rPr lang="en-US" sz="1100" dirty="0">
+                <a:solidFill>
+                  <a:srgbClr val="585C62"/>
+                </a:solidFill>
+                <a:latin typeface="IBM Plex Sans" pitchFamily="34" charset="0"/>
+                <a:ea typeface="IBM Plex Sans" pitchFamily="34" charset="-122"/>
+                <a:cs typeface="IBM Plex Sans" pitchFamily="34" charset="-120"/>
+              </a:rPr>
+              <a:t>Choose a use case with clear users, assets, data sources and business outcomes.</a:t>
+            </a:r>
+            <a:endParaRPr lang="en-US" sz="1100" dirty="0"/>
+          </a:p>
+        </p:txBody>
+      </p:sp>
+      <p:sp>
+        <p:nvSpPr>
+          <p:cNvPr id="9" name="Text 6"/>
+          <p:cNvSpPr/>
+          <p:nvPr/>
+        </p:nvSpPr>
+        <p:spPr>
+          <a:xfrm>
+            <a:off x="2476500" y="4724400"/>
+            <a:ext cx="508000" cy="457200"/>
+          </a:xfrm>
+          <a:prstGeom prst="rect">
+            <a:avLst/>
+          </a:prstGeom>
+          <a:noFill/>
+          <a:ln/>
+        </p:spPr>
+        <p:txBody>
+          <a:bodyPr wrap="square" lIns="0" tIns="0" rIns="0" bIns="0" rtlCol="0" anchor="t">
+            <a:normAutofit/>
+          </a:bodyPr>
+          <a:lstStyle/>
+          <a:p>
+            <a:pPr algn="r" indent="0" marL="0">
+              <a:lnSpc>
+                <a:spcPct val="120000"/>
+              </a:lnSpc>
+              <a:buNone/>
+            </a:pPr>
+            <a:r>
+              <a:rPr lang="en-US" sz="2800" dirty="0">
+                <a:solidFill>
+                  <a:srgbClr val="73B200"/>
+                </a:solidFill>
+                <a:latin typeface="IBM Plex Sans" pitchFamily="34" charset="0"/>
+                <a:ea typeface="IBM Plex Sans" pitchFamily="34" charset="-122"/>
+                <a:cs typeface="IBM Plex Sans" pitchFamily="34" charset="-120"/>
+              </a:rPr>
+              <a:t>1</a:t>
+            </a:r>
+            <a:endParaRPr lang="en-US" sz="2800" dirty="0"/>
+          </a:p>
+        </p:txBody>
+      </p:sp>
+      <p:sp>
+        <p:nvSpPr>
+          <p:cNvPr id="10" name="Shape 7"/>
+          <p:cNvSpPr/>
+          <p:nvPr/>
+        </p:nvSpPr>
+        <p:spPr>
+          <a:xfrm>
+            <a:off x="3289300" y="1879600"/>
+            <a:ext cx="2679700" cy="3530600"/>
+          </a:xfrm>
+          <a:prstGeom prst="rect">
+            <a:avLst/>
+          </a:prstGeom>
+          <a:solidFill>
+            <a:srgbClr val="F5FBDE"/>
+          </a:solidFill>
+          <a:ln w="12700">
+            <a:solidFill>
+              <a:srgbClr val="CDCED0"/>
+            </a:solidFill>
+            <a:prstDash val="solid"/>
+          </a:ln>
+        </p:spPr>
+      </p:sp>
+      <p:sp>
+        <p:nvSpPr>
+          <p:cNvPr id="11" name="Text 8"/>
+          <p:cNvSpPr/>
+          <p:nvPr/>
+        </p:nvSpPr>
+        <p:spPr>
+          <a:xfrm>
+            <a:off x="3492500" y="2133600"/>
             <a:ext cx="2273300" cy="228600"/>
           </a:xfrm>
           <a:prstGeom prst="rect">
@@ -7325,7 +7549,7 @@
               <a:buNone/>
             </a:pPr>
             <a:r>
-              <a:rPr lang="en-US" sz="950" b="1" spc="80" kern="0" dirty="0">
+              <a:rPr lang="en-US" sz="1100" b="1" spc="80" kern="0" dirty="0">
                 <a:solidFill>
                   <a:srgbClr val="73B200"/>
                 </a:solidFill>
@@ -7333,43 +7557,43 @@
                 <a:ea typeface="IBM Plex Mono" pitchFamily="34" charset="-122"/>
                 <a:cs typeface="IBM Plex Mono" pitchFamily="34" charset="-120"/>
               </a:rPr>
-              <a:t>PHASE 1</a:t>
-            </a:r>
-            <a:endParaRPr lang="en-US" sz="950" dirty="0"/>
-          </a:p>
-        </p:txBody>
-      </p:sp>
-      <p:sp>
-        <p:nvSpPr>
-          <p:cNvPr id="8" name="Text 5"/>
-          <p:cNvSpPr/>
-          <p:nvPr/>
-        </p:nvSpPr>
-        <p:spPr>
-          <a:xfrm>
-            <a:off x="711200" y="2679700"/>
-            <a:ext cx="2273300" cy="825500"/>
-          </a:xfrm>
-          <a:prstGeom prst="rect">
-            <a:avLst/>
-          </a:prstGeom>
-          <a:noFill/>
-          <a:ln/>
-        </p:spPr>
-        <p:txBody>
-          <a:bodyPr wrap="square" lIns="0" tIns="0" rIns="0" bIns="0" rtlCol="0" anchor="t">
-            <a:normAutofit/>
-          </a:bodyPr>
-          <a:lstStyle/>
-          <a:p>
-            <a:pPr algn="l" indent="0" marL="0">
-              <a:lnSpc>
-                <a:spcPct val="120000"/>
-              </a:lnSpc>
-              <a:buNone/>
-            </a:pPr>
-            <a:r>
-              <a:rPr lang="en-US" sz="1300" b="1" dirty="0">
+              <a:t>02</a:t>
+            </a:r>
+            <a:endParaRPr lang="en-US" sz="1100" dirty="0"/>
+          </a:p>
+        </p:txBody>
+      </p:sp>
+      <p:sp>
+        <p:nvSpPr>
+          <p:cNvPr id="12" name="Text 9"/>
+          <p:cNvSpPr/>
+          <p:nvPr/>
+        </p:nvSpPr>
+        <p:spPr>
+          <a:xfrm>
+            <a:off x="3492500" y="2489200"/>
+            <a:ext cx="2273300" cy="889000"/>
+          </a:xfrm>
+          <a:prstGeom prst="rect">
+            <a:avLst/>
+          </a:prstGeom>
+          <a:noFill/>
+          <a:ln/>
+        </p:spPr>
+        <p:txBody>
+          <a:bodyPr wrap="square" lIns="0" tIns="0" rIns="0" bIns="0" rtlCol="0" anchor="t">
+            <a:normAutofit/>
+          </a:bodyPr>
+          <a:lstStyle/>
+          <a:p>
+            <a:pPr algn="l" indent="0" marL="0">
+              <a:lnSpc>
+                <a:spcPct val="125000"/>
+              </a:lnSpc>
+              <a:buNone/>
+            </a:pPr>
+            <a:r>
+              <a:rPr lang="en-US" sz="1400" dirty="0">
                 <a:solidFill>
                   <a:srgbClr val="050B14"/>
                 </a:solidFill>
@@ -7377,22 +7601,45 @@
                 <a:ea typeface="IBM Plex Sans" pitchFamily="34" charset="-122"/>
                 <a:cs typeface="IBM Plex Sans" pitchFamily="34" charset="-120"/>
               </a:rPr>
-              <a:t>Select a valuable operational use case</a:t>
-            </a:r>
-            <a:endParaRPr lang="en-US" sz="1300" dirty="0"/>
-          </a:p>
-        </p:txBody>
-      </p:sp>
-      <p:sp>
-        <p:nvSpPr>
-          <p:cNvPr id="9" name="Text 6"/>
-          <p:cNvSpPr/>
-          <p:nvPr/>
-        </p:nvSpPr>
-        <p:spPr>
-          <a:xfrm>
-            <a:off x="711200" y="3733800"/>
-            <a:ext cx="2273300" cy="1320800"/>
+              <a:t>Build the Unified Data Foundation</a:t>
+            </a:r>
+            <a:endParaRPr lang="en-US" sz="1400" dirty="0"/>
+          </a:p>
+        </p:txBody>
+      </p:sp>
+      <p:sp>
+        <p:nvSpPr>
+          <p:cNvPr id="13" name="Shape 10"/>
+          <p:cNvSpPr/>
+          <p:nvPr/>
+        </p:nvSpPr>
+        <p:spPr>
+          <a:xfrm>
+            <a:off x="3492500" y="3505200"/>
+            <a:ext cx="2273300" cy="0"/>
+          </a:xfrm>
+          <a:prstGeom prst="line">
+            <a:avLst/>
+          </a:prstGeom>
+          <a:noFill/>
+          <a:ln w="12700">
+            <a:solidFill>
+              <a:srgbClr val="CDCED0"/>
+            </a:solidFill>
+            <a:prstDash val="solid"/>
+          </a:ln>
+        </p:spPr>
+      </p:sp>
+      <p:sp>
+        <p:nvSpPr>
+          <p:cNvPr id="14" name="Text 11"/>
+          <p:cNvSpPr/>
+          <p:nvPr/>
+        </p:nvSpPr>
+        <p:spPr>
+          <a:xfrm>
+            <a:off x="3492500" y="3708400"/>
+            <a:ext cx="2273300" cy="1143000"/>
           </a:xfrm>
           <a:prstGeom prst="rect">
             <a:avLst/>
@@ -7413,7 +7660,7 @@
               <a:buNone/>
             </a:pPr>
             <a:r>
-              <a:rPr lang="en-US" sz="1000" dirty="0">
+              <a:rPr lang="en-US" sz="1100" dirty="0">
                 <a:solidFill>
                   <a:srgbClr val="585C62"/>
                 </a:solidFill>
@@ -7421,22 +7668,66 @@
                 <a:ea typeface="IBM Plex Sans" pitchFamily="34" charset="-122"/>
                 <a:cs typeface="IBM Plex Sans" pitchFamily="34" charset="-120"/>
               </a:rPr>
-              <a:t>Choose a use case with clear users, assets, data sources and business outcomes.</a:t>
-            </a:r>
-            <a:endParaRPr lang="en-US" sz="1000" dirty="0"/>
-          </a:p>
-        </p:txBody>
-      </p:sp>
-      <p:sp>
-        <p:nvSpPr>
-          <p:cNvPr id="10" name="Shape 7"/>
-          <p:cNvSpPr/>
-          <p:nvPr/>
-        </p:nvSpPr>
-        <p:spPr>
-          <a:xfrm>
-            <a:off x="3289300" y="1968500"/>
-            <a:ext cx="2679700" cy="3454400"/>
+              <a:t>Create the namespace, establish operational context and connect relevant systems.</a:t>
+            </a:r>
+            <a:endParaRPr lang="en-US" sz="1100" dirty="0"/>
+          </a:p>
+        </p:txBody>
+      </p:sp>
+      <p:sp>
+        <p:nvSpPr>
+          <p:cNvPr id="15" name="Text 12"/>
+          <p:cNvSpPr/>
+          <p:nvPr/>
+        </p:nvSpPr>
+        <p:spPr>
+          <a:xfrm>
+            <a:off x="5257800" y="4724400"/>
+            <a:ext cx="508000" cy="457200"/>
+          </a:xfrm>
+          <a:prstGeom prst="rect">
+            <a:avLst/>
+          </a:prstGeom>
+          <a:noFill/>
+          <a:ln/>
+        </p:spPr>
+        <p:txBody>
+          <a:bodyPr wrap="square" lIns="0" tIns="0" rIns="0" bIns="0" rtlCol="0" anchor="t">
+            <a:normAutofit/>
+          </a:bodyPr>
+          <a:lstStyle/>
+          <a:p>
+            <a:pPr algn="r" indent="0" marL="0">
+              <a:lnSpc>
+                <a:spcPct val="120000"/>
+              </a:lnSpc>
+              <a:buNone/>
+            </a:pPr>
+            <a:r>
+              <a:rPr lang="en-US" sz="2800" dirty="0">
+                <a:solidFill>
+                  <a:srgbClr val="CDCED0"/>
+                </a:solidFill>
+                <a:latin typeface="IBM Plex Sans" pitchFamily="34" charset="0"/>
+                <a:ea typeface="IBM Plex Sans" pitchFamily="34" charset="-122"/>
+                <a:cs typeface="IBM Plex Sans" pitchFamily="34" charset="-120"/>
+              </a:rPr>
+              <a:t>2</a:t>
+            </a:r>
+            <a:endParaRPr lang="en-US" sz="2800" dirty="0"/>
+          </a:p>
+        </p:txBody>
+      </p:sp>
+      <p:sp>
+        <p:nvSpPr>
+          <p:cNvPr id="16" name="Shape 13"/>
+          <p:cNvSpPr/>
+          <p:nvPr/>
+        </p:nvSpPr>
+        <p:spPr>
+          <a:xfrm>
+            <a:off x="6070600" y="1879600"/>
+            <a:ext cx="2679700" cy="3530600"/>
           </a:xfrm>
           <a:prstGeom prst="rect">
             <a:avLst/>
@@ -7454,22 +7745,110 @@
       </p:sp>
       <p:sp>
         <p:nvSpPr>
-          <p:cNvPr id="11" name="Shape 8"/>
-          <p:cNvSpPr/>
-          <p:nvPr/>
-        </p:nvSpPr>
-        <p:spPr>
-          <a:xfrm>
-            <a:off x="3289300" y="1968500"/>
-            <a:ext cx="2679700" cy="0"/>
+          <p:cNvPr id="17" name="Text 14"/>
+          <p:cNvSpPr/>
+          <p:nvPr/>
+        </p:nvSpPr>
+        <p:spPr>
+          <a:xfrm>
+            <a:off x="6273800" y="2133600"/>
+            <a:ext cx="2273300" cy="228600"/>
+          </a:xfrm>
+          <a:prstGeom prst="rect">
+            <a:avLst/>
+          </a:prstGeom>
+          <a:noFill/>
+          <a:ln/>
+        </p:spPr>
+        <p:txBody>
+          <a:bodyPr wrap="square" lIns="0" tIns="0" rIns="0" bIns="0" rtlCol="0" anchor="t">
+            <a:normAutofit/>
+          </a:bodyPr>
+          <a:lstStyle/>
+          <a:p>
+            <a:pPr algn="l" indent="0" marL="0">
+              <a:lnSpc>
+                <a:spcPct val="120000"/>
+              </a:lnSpc>
+              <a:buNone/>
+            </a:pPr>
+            <a:r>
+              <a:rPr lang="en-US" sz="1100" b="1" spc="80" kern="0" dirty="0">
+                <a:solidFill>
+                  <a:srgbClr val="73B200"/>
+                </a:solidFill>
+                <a:latin typeface="IBM Plex Mono" pitchFamily="34" charset="0"/>
+                <a:ea typeface="IBM Plex Mono" pitchFamily="34" charset="-122"/>
+                <a:cs typeface="IBM Plex Mono" pitchFamily="34" charset="-120"/>
+              </a:rPr>
+              <a:t>03</a:t>
+            </a:r>
+            <a:endParaRPr lang="en-US" sz="1100" dirty="0"/>
+          </a:p>
+        </p:txBody>
+      </p:sp>
+      <p:sp>
+        <p:nvSpPr>
+          <p:cNvPr id="18" name="Text 15"/>
+          <p:cNvSpPr/>
+          <p:nvPr/>
+        </p:nvSpPr>
+        <p:spPr>
+          <a:xfrm>
+            <a:off x="6273800" y="2489200"/>
+            <a:ext cx="2273300" cy="889000"/>
+          </a:xfrm>
+          <a:prstGeom prst="rect">
+            <a:avLst/>
+          </a:prstGeom>
+          <a:noFill/>
+          <a:ln/>
+        </p:spPr>
+        <p:txBody>
+          <a:bodyPr wrap="square" lIns="0" tIns="0" rIns="0" bIns="0" rtlCol="0" anchor="t">
+            <a:normAutofit/>
+          </a:bodyPr>
+          <a:lstStyle/>
+          <a:p>
+            <a:pPr algn="l" indent="0" marL="0">
+              <a:lnSpc>
+                <a:spcPct val="125000"/>
+              </a:lnSpc>
+              <a:buNone/>
+            </a:pPr>
+            <a:r>
+              <a:rPr lang="en-US" sz="1400" dirty="0">
+                <a:solidFill>
+                  <a:srgbClr val="050B14"/>
+                </a:solidFill>
+                <a:latin typeface="IBM Plex Sans" pitchFamily="34" charset="0"/>
+                <a:ea typeface="IBM Plex Sans" pitchFamily="34" charset="-122"/>
+                <a:cs typeface="IBM Plex Sans" pitchFamily="34" charset="-120"/>
+              </a:rPr>
+              <a:t>Deliver the first Connected Application</a:t>
+            </a:r>
+            <a:endParaRPr lang="en-US" sz="1400" dirty="0"/>
+          </a:p>
+        </p:txBody>
+      </p:sp>
+      <p:sp>
+        <p:nvSpPr>
+          <p:cNvPr id="19" name="Shape 16"/>
+          <p:cNvSpPr/>
+          <p:nvPr/>
+        </p:nvSpPr>
+        <p:spPr>
+          <a:xfrm>
+            <a:off x="6273800" y="3505200"/>
+            <a:ext cx="2273300" cy="0"/>
           </a:xfrm>
           <a:prstGeom prst="line">
             <a:avLst/>
           </a:prstGeom>
           <a:noFill/>
-          <a:ln w="25400">
+          <a:ln w="12700">
             <a:solidFill>
-              <a:srgbClr val="B2ED1D"/>
+              <a:srgbClr val="CDCED0"/>
             </a:solidFill>
             <a:prstDash val="solid"/>
           </a:ln>
@@ -7477,152 +7856,108 @@
       </p:sp>
       <p:sp>
         <p:nvSpPr>
-          <p:cNvPr id="12" name="Text 9"/>
-          <p:cNvSpPr/>
-          <p:nvPr/>
-        </p:nvSpPr>
-        <p:spPr>
-          <a:xfrm>
-            <a:off x="3492500" y="2298700"/>
-            <a:ext cx="2273300" cy="228600"/>
-          </a:xfrm>
-          <a:prstGeom prst="rect">
-            <a:avLst/>
-          </a:prstGeom>
-          <a:noFill/>
-          <a:ln/>
-        </p:spPr>
-        <p:txBody>
-          <a:bodyPr wrap="square" lIns="0" tIns="0" rIns="0" bIns="0" rtlCol="0" anchor="t">
-            <a:normAutofit/>
-          </a:bodyPr>
-          <a:lstStyle/>
-          <a:p>
-            <a:pPr algn="l" indent="0" marL="0">
-              <a:lnSpc>
-                <a:spcPct val="120000"/>
-              </a:lnSpc>
-              <a:buNone/>
-            </a:pPr>
-            <a:r>
-              <a:rPr lang="en-US" sz="950" b="1" spc="80" kern="0" dirty="0">
-                <a:solidFill>
-                  <a:srgbClr val="73B200"/>
-                </a:solidFill>
-                <a:latin typeface="IBM Plex Mono" pitchFamily="34" charset="0"/>
-                <a:ea typeface="IBM Plex Mono" pitchFamily="34" charset="-122"/>
-                <a:cs typeface="IBM Plex Mono" pitchFamily="34" charset="-120"/>
-              </a:rPr>
-              <a:t>PHASE 2</a:t>
-            </a:r>
-            <a:endParaRPr lang="en-US" sz="950" dirty="0"/>
-          </a:p>
-        </p:txBody>
-      </p:sp>
-      <p:sp>
-        <p:nvSpPr>
-          <p:cNvPr id="13" name="Text 10"/>
-          <p:cNvSpPr/>
-          <p:nvPr/>
-        </p:nvSpPr>
-        <p:spPr>
-          <a:xfrm>
-            <a:off x="3492500" y="2679700"/>
-            <a:ext cx="2273300" cy="825500"/>
-          </a:xfrm>
-          <a:prstGeom prst="rect">
-            <a:avLst/>
-          </a:prstGeom>
-          <a:noFill/>
-          <a:ln/>
-        </p:spPr>
-        <p:txBody>
-          <a:bodyPr wrap="square" lIns="0" tIns="0" rIns="0" bIns="0" rtlCol="0" anchor="t">
-            <a:normAutofit/>
-          </a:bodyPr>
-          <a:lstStyle/>
-          <a:p>
-            <a:pPr algn="l" indent="0" marL="0">
-              <a:lnSpc>
-                <a:spcPct val="120000"/>
-              </a:lnSpc>
-              <a:buNone/>
-            </a:pPr>
-            <a:r>
-              <a:rPr lang="en-US" sz="1300" b="1" dirty="0">
-                <a:solidFill>
-                  <a:srgbClr val="050B14"/>
+          <p:cNvPr id="20" name="Text 17"/>
+          <p:cNvSpPr/>
+          <p:nvPr/>
+        </p:nvSpPr>
+        <p:spPr>
+          <a:xfrm>
+            <a:off x="6273800" y="3708400"/>
+            <a:ext cx="2273300" cy="1143000"/>
+          </a:xfrm>
+          <a:prstGeom prst="rect">
+            <a:avLst/>
+          </a:prstGeom>
+          <a:noFill/>
+          <a:ln/>
+        </p:spPr>
+        <p:txBody>
+          <a:bodyPr wrap="square" lIns="0" tIns="0" rIns="0" bIns="0" rtlCol="0" anchor="t">
+            <a:normAutofit/>
+          </a:bodyPr>
+          <a:lstStyle/>
+          <a:p>
+            <a:pPr algn="l" indent="0" marL="0">
+              <a:lnSpc>
+                <a:spcPct val="140000"/>
+              </a:lnSpc>
+              <a:buNone/>
+            </a:pPr>
+            <a:r>
+              <a:rPr lang="en-US" sz="1100" dirty="0">
+                <a:solidFill>
+                  <a:srgbClr val="585C62"/>
                 </a:solidFill>
                 <a:latin typeface="IBM Plex Sans" pitchFamily="34" charset="0"/>
                 <a:ea typeface="IBM Plex Sans" pitchFamily="34" charset="-122"/>
                 <a:cs typeface="IBM Plex Sans" pitchFamily="34" charset="-120"/>
               </a:rPr>
-              <a:t>Build the Unified Data Foundation</a:t>
-            </a:r>
-            <a:endParaRPr lang="en-US" sz="1300" dirty="0"/>
-          </a:p>
-        </p:txBody>
-      </p:sp>
-      <p:sp>
-        <p:nvSpPr>
-          <p:cNvPr id="14" name="Text 11"/>
-          <p:cNvSpPr/>
-          <p:nvPr/>
-        </p:nvSpPr>
-        <p:spPr>
-          <a:xfrm>
-            <a:off x="3492500" y="3733800"/>
-            <a:ext cx="2273300" cy="1320800"/>
-          </a:xfrm>
-          <a:prstGeom prst="rect">
-            <a:avLst/>
-          </a:prstGeom>
-          <a:noFill/>
-          <a:ln/>
-        </p:spPr>
-        <p:txBody>
-          <a:bodyPr wrap="square" lIns="0" tIns="0" rIns="0" bIns="0" rtlCol="0" anchor="t">
-            <a:normAutofit/>
-          </a:bodyPr>
-          <a:lstStyle/>
-          <a:p>
-            <a:pPr algn="l" indent="0" marL="0">
-              <a:lnSpc>
-                <a:spcPct val="140000"/>
-              </a:lnSpc>
-              <a:buNone/>
-            </a:pPr>
-            <a:r>
-              <a:rPr lang="en-US" sz="1000" dirty="0">
-                <a:solidFill>
-                  <a:srgbClr val="585C62"/>
+              <a:t>Generate an application on top of the shared foundation and validate it with users.</a:t>
+            </a:r>
+            <a:endParaRPr lang="en-US" sz="1100" dirty="0"/>
+          </a:p>
+        </p:txBody>
+      </p:sp>
+      <p:sp>
+        <p:nvSpPr>
+          <p:cNvPr id="21" name="Text 18"/>
+          <p:cNvSpPr/>
+          <p:nvPr/>
+        </p:nvSpPr>
+        <p:spPr>
+          <a:xfrm>
+            <a:off x="8039100" y="4724400"/>
+            <a:ext cx="508000" cy="457200"/>
+          </a:xfrm>
+          <a:prstGeom prst="rect">
+            <a:avLst/>
+          </a:prstGeom>
+          <a:noFill/>
+          <a:ln/>
+        </p:spPr>
+        <p:txBody>
+          <a:bodyPr wrap="square" lIns="0" tIns="0" rIns="0" bIns="0" rtlCol="0" anchor="t">
+            <a:normAutofit/>
+          </a:bodyPr>
+          <a:lstStyle/>
+          <a:p>
+            <a:pPr algn="r" indent="0" marL="0">
+              <a:lnSpc>
+                <a:spcPct val="120000"/>
+              </a:lnSpc>
+              <a:buNone/>
+            </a:pPr>
+            <a:r>
+              <a:rPr lang="en-US" sz="2800" dirty="0">
+                <a:solidFill>
+                  <a:srgbClr val="CDCED0"/>
                 </a:solidFill>
                 <a:latin typeface="IBM Plex Sans" pitchFamily="34" charset="0"/>
                 <a:ea typeface="IBM Plex Sans" pitchFamily="34" charset="-122"/>
                 <a:cs typeface="IBM Plex Sans" pitchFamily="34" charset="-120"/>
               </a:rPr>
-              <a:t>Create the namespace, establish operational context and connect relevant systems.</a:t>
-            </a:r>
-            <a:endParaRPr lang="en-US" sz="1000" dirty="0"/>
-          </a:p>
-        </p:txBody>
-      </p:sp>
-      <p:sp>
-        <p:nvSpPr>
-          <p:cNvPr id="15" name="Shape 12"/>
-          <p:cNvSpPr/>
-          <p:nvPr/>
-        </p:nvSpPr>
-        <p:spPr>
-          <a:xfrm>
-            <a:off x="6070600" y="1968500"/>
-            <a:ext cx="2679700" cy="3454400"/>
+              <a:t>3</a:t>
+            </a:r>
+            <a:endParaRPr lang="en-US" sz="2800" dirty="0"/>
+          </a:p>
+        </p:txBody>
+      </p:sp>
+      <p:sp>
+        <p:nvSpPr>
+          <p:cNvPr id="22" name="Shape 19"/>
+          <p:cNvSpPr/>
+          <p:nvPr/>
+        </p:nvSpPr>
+        <p:spPr>
+          <a:xfrm>
+            <a:off x="8851900" y="1879600"/>
+            <a:ext cx="2679700" cy="3530600"/>
           </a:xfrm>
           <a:prstGeom prst="rect">
             <a:avLst/>
           </a:prstGeom>
           <a:solidFill>
-            <a:srgbClr val="FFFFFF"/>
+            <a:srgbClr val="F5FBDE"/>
           </a:solidFill>
           <a:ln w="12700">
             <a:solidFill>
@@ -7634,36 +7969,13 @@
       </p:sp>
       <p:sp>
         <p:nvSpPr>
-          <p:cNvPr id="16" name="Shape 13"/>
-          <p:cNvSpPr/>
-          <p:nvPr/>
-        </p:nvSpPr>
-        <p:spPr>
-          <a:xfrm>
-            <a:off x="6070600" y="1968500"/>
-            <a:ext cx="2679700" cy="0"/>
-          </a:xfrm>
-          <a:prstGeom prst="line">
-            <a:avLst/>
-          </a:prstGeom>
-          <a:noFill/>
-          <a:ln w="25400">
-            <a:solidFill>
-              <a:srgbClr val="B2ED1D"/>
-            </a:solidFill>
-            <a:prstDash val="solid"/>
-          </a:ln>
-        </p:spPr>
-      </p:sp>
-      <p:sp>
-        <p:nvSpPr>
-          <p:cNvPr id="17" name="Text 14"/>
-          <p:cNvSpPr/>
-          <p:nvPr/>
-        </p:nvSpPr>
-        <p:spPr>
-          <a:xfrm>
-            <a:off x="6273800" y="2298700"/>
+          <p:cNvPr id="23" name="Text 20"/>
+          <p:cNvSpPr/>
+          <p:nvPr/>
+        </p:nvSpPr>
+        <p:spPr>
+          <a:xfrm>
+            <a:off x="9055100" y="2133600"/>
             <a:ext cx="2273300" cy="228600"/>
           </a:xfrm>
           <a:prstGeom prst="rect">
@@ -7685,7 +7997,7 @@
               <a:buNone/>
             </a:pPr>
             <a:r>
-              <a:rPr lang="en-US" sz="950" b="1" spc="80" kern="0" dirty="0">
+              <a:rPr lang="en-US" sz="1100" b="1" spc="80" kern="0" dirty="0">
                 <a:solidFill>
                   <a:srgbClr val="73B200"/>
                 </a:solidFill>
@@ -7693,43 +8005,43 @@
                 <a:ea typeface="IBM Plex Mono" pitchFamily="34" charset="-122"/>
                 <a:cs typeface="IBM Plex Mono" pitchFamily="34" charset="-120"/>
               </a:rPr>
-              <a:t>PHASE 3</a:t>
-            </a:r>
-            <a:endParaRPr lang="en-US" sz="950" dirty="0"/>
-          </a:p>
-        </p:txBody>
-      </p:sp>
-      <p:sp>
-        <p:nvSpPr>
-          <p:cNvPr id="18" name="Text 15"/>
-          <p:cNvSpPr/>
-          <p:nvPr/>
-        </p:nvSpPr>
-        <p:spPr>
-          <a:xfrm>
-            <a:off x="6273800" y="2679700"/>
-            <a:ext cx="2273300" cy="825500"/>
-          </a:xfrm>
-          <a:prstGeom prst="rect">
-            <a:avLst/>
-          </a:prstGeom>
-          <a:noFill/>
-          <a:ln/>
-        </p:spPr>
-        <p:txBody>
-          <a:bodyPr wrap="square" lIns="0" tIns="0" rIns="0" bIns="0" rtlCol="0" anchor="t">
-            <a:normAutofit/>
-          </a:bodyPr>
-          <a:lstStyle/>
-          <a:p>
-            <a:pPr algn="l" indent="0" marL="0">
-              <a:lnSpc>
-                <a:spcPct val="120000"/>
-              </a:lnSpc>
-              <a:buNone/>
-            </a:pPr>
-            <a:r>
-              <a:rPr lang="en-US" sz="1300" b="1" dirty="0">
+              <a:t>04</a:t>
+            </a:r>
+            <a:endParaRPr lang="en-US" sz="1100" dirty="0"/>
+          </a:p>
+        </p:txBody>
+      </p:sp>
+      <p:sp>
+        <p:nvSpPr>
+          <p:cNvPr id="24" name="Text 21"/>
+          <p:cNvSpPr/>
+          <p:nvPr/>
+        </p:nvSpPr>
+        <p:spPr>
+          <a:xfrm>
+            <a:off x="9055100" y="2489200"/>
+            <a:ext cx="2273300" cy="889000"/>
+          </a:xfrm>
+          <a:prstGeom prst="rect">
+            <a:avLst/>
+          </a:prstGeom>
+          <a:noFill/>
+          <a:ln/>
+        </p:spPr>
+        <p:txBody>
+          <a:bodyPr wrap="square" lIns="0" tIns="0" rIns="0" bIns="0" rtlCol="0" anchor="t">
+            <a:normAutofit/>
+          </a:bodyPr>
+          <a:lstStyle/>
+          <a:p>
+            <a:pPr algn="l" indent="0" marL="0">
+              <a:lnSpc>
+                <a:spcPct val="125000"/>
+              </a:lnSpc>
+              <a:buNone/>
+            </a:pPr>
+            <a:r>
+              <a:rPr lang="en-US" sz="1400" dirty="0">
                 <a:solidFill>
                   <a:srgbClr val="050B14"/>
                 </a:solidFill>
@@ -7737,73 +8049,27 @@
                 <a:ea typeface="IBM Plex Sans" pitchFamily="34" charset="-122"/>
                 <a:cs typeface="IBM Plex Sans" pitchFamily="34" charset="-120"/>
               </a:rPr>
-              <a:t>Deliver the first Connected Application</a:t>
-            </a:r>
-            <a:endParaRPr lang="en-US" sz="1300" dirty="0"/>
-          </a:p>
-        </p:txBody>
-      </p:sp>
-      <p:sp>
-        <p:nvSpPr>
-          <p:cNvPr id="19" name="Text 16"/>
-          <p:cNvSpPr/>
-          <p:nvPr/>
-        </p:nvSpPr>
-        <p:spPr>
-          <a:xfrm>
-            <a:off x="6273800" y="3733800"/>
-            <a:ext cx="2273300" cy="1320800"/>
-          </a:xfrm>
-          <a:prstGeom prst="rect">
-            <a:avLst/>
-          </a:prstGeom>
-          <a:noFill/>
-          <a:ln/>
-        </p:spPr>
-        <p:txBody>
-          <a:bodyPr wrap="square" lIns="0" tIns="0" rIns="0" bIns="0" rtlCol="0" anchor="t">
-            <a:normAutofit/>
-          </a:bodyPr>
-          <a:lstStyle/>
-          <a:p>
-            <a:pPr algn="l" indent="0" marL="0">
-              <a:lnSpc>
-                <a:spcPct val="140000"/>
-              </a:lnSpc>
-              <a:buNone/>
-            </a:pPr>
-            <a:r>
-              <a:rPr lang="en-US" sz="1000" dirty="0">
-                <a:solidFill>
-                  <a:srgbClr val="585C62"/>
-                </a:solidFill>
-                <a:latin typeface="IBM Plex Sans" pitchFamily="34" charset="0"/>
-                <a:ea typeface="IBM Plex Sans" pitchFamily="34" charset="-122"/>
-                <a:cs typeface="IBM Plex Sans" pitchFamily="34" charset="-120"/>
-              </a:rPr>
-              <a:t>Generate an application on top of the shared foundation and validate it with users.</a:t>
-            </a:r>
-            <a:endParaRPr lang="en-US" sz="1000" dirty="0"/>
-          </a:p>
-        </p:txBody>
-      </p:sp>
-      <p:sp>
-        <p:nvSpPr>
-          <p:cNvPr id="20" name="Shape 17"/>
-          <p:cNvSpPr/>
-          <p:nvPr/>
-        </p:nvSpPr>
-        <p:spPr>
-          <a:xfrm>
-            <a:off x="8851900" y="1968500"/>
-            <a:ext cx="2679700" cy="3454400"/>
-          </a:xfrm>
-          <a:prstGeom prst="rect">
-            <a:avLst/>
-          </a:prstGeom>
-          <a:solidFill>
-            <a:srgbClr val="FFFFFF"/>
-          </a:solidFill>
+              <a:t>Expand and reuse</a:t>
+            </a:r>
+            <a:endParaRPr lang="en-US" sz="1400" dirty="0"/>
+          </a:p>
+        </p:txBody>
+      </p:sp>
+      <p:sp>
+        <p:nvSpPr>
+          <p:cNvPr id="25" name="Shape 22"/>
+          <p:cNvSpPr/>
+          <p:nvPr/>
+        </p:nvSpPr>
+        <p:spPr>
+          <a:xfrm>
+            <a:off x="9055100" y="3505200"/>
+            <a:ext cx="2273300" cy="0"/>
+          </a:xfrm>
+          <a:prstGeom prst="line">
+            <a:avLst/>
+          </a:prstGeom>
+          <a:noFill/>
           <a:ln w="12700">
             <a:solidFill>
               <a:srgbClr val="CDCED0"/>
@@ -7814,22 +8080,110 @@
       </p:sp>
       <p:sp>
         <p:nvSpPr>
-          <p:cNvPr id="21" name="Shape 18"/>
-          <p:cNvSpPr/>
-          <p:nvPr/>
-        </p:nvSpPr>
-        <p:spPr>
-          <a:xfrm>
-            <a:off x="8851900" y="1968500"/>
-            <a:ext cx="2679700" cy="0"/>
+          <p:cNvPr id="26" name="Text 23"/>
+          <p:cNvSpPr/>
+          <p:nvPr/>
+        </p:nvSpPr>
+        <p:spPr>
+          <a:xfrm>
+            <a:off x="9055100" y="3708400"/>
+            <a:ext cx="2273300" cy="1143000"/>
+          </a:xfrm>
+          <a:prstGeom prst="rect">
+            <a:avLst/>
+          </a:prstGeom>
+          <a:noFill/>
+          <a:ln/>
+        </p:spPr>
+        <p:txBody>
+          <a:bodyPr wrap="square" lIns="0" tIns="0" rIns="0" bIns="0" rtlCol="0" anchor="t">
+            <a:normAutofit/>
+          </a:bodyPr>
+          <a:lstStyle/>
+          <a:p>
+            <a:pPr algn="l" indent="0" marL="0">
+              <a:lnSpc>
+                <a:spcPct val="140000"/>
+              </a:lnSpc>
+              <a:buNone/>
+            </a:pPr>
+            <a:r>
+              <a:rPr lang="en-US" sz="1100" dirty="0">
+                <a:solidFill>
+                  <a:srgbClr val="585C62"/>
+                </a:solidFill>
+                <a:latin typeface="IBM Plex Sans" pitchFamily="34" charset="0"/>
+                <a:ea typeface="IBM Plex Sans" pitchFamily="34" charset="-122"/>
+                <a:cs typeface="IBM Plex Sans" pitchFamily="34" charset="-120"/>
+              </a:rPr>
+              <a:t>Add more assets, applications, analytics, digital twins and AI workflows.</a:t>
+            </a:r>
+            <a:endParaRPr lang="en-US" sz="1100" dirty="0"/>
+          </a:p>
+        </p:txBody>
+      </p:sp>
+      <p:sp>
+        <p:nvSpPr>
+          <p:cNvPr id="27" name="Text 24"/>
+          <p:cNvSpPr/>
+          <p:nvPr/>
+        </p:nvSpPr>
+        <p:spPr>
+          <a:xfrm>
+            <a:off x="10820400" y="4724400"/>
+            <a:ext cx="508000" cy="457200"/>
+          </a:xfrm>
+          <a:prstGeom prst="rect">
+            <a:avLst/>
+          </a:prstGeom>
+          <a:noFill/>
+          <a:ln/>
+        </p:spPr>
+        <p:txBody>
+          <a:bodyPr wrap="square" lIns="0" tIns="0" rIns="0" bIns="0" rtlCol="0" anchor="t">
+            <a:normAutofit/>
+          </a:bodyPr>
+          <a:lstStyle/>
+          <a:p>
+            <a:pPr algn="r" indent="0" marL="0">
+              <a:lnSpc>
+                <a:spcPct val="120000"/>
+              </a:lnSpc>
+              <a:buNone/>
+            </a:pPr>
+            <a:r>
+              <a:rPr lang="en-US" sz="2800" dirty="0">
+                <a:solidFill>
+                  <a:srgbClr val="CDCED0"/>
+                </a:solidFill>
+                <a:latin typeface="IBM Plex Sans" pitchFamily="34" charset="0"/>
+                <a:ea typeface="IBM Plex Sans" pitchFamily="34" charset="-122"/>
+                <a:cs typeface="IBM Plex Sans" pitchFamily="34" charset="-120"/>
+              </a:rPr>
+              <a:t>4</a:t>
+            </a:r>
+            <a:endParaRPr lang="en-US" sz="2800" dirty="0"/>
+          </a:p>
+        </p:txBody>
+      </p:sp>
+      <p:sp>
+        <p:nvSpPr>
+          <p:cNvPr id="28" name="Shape 25"/>
+          <p:cNvSpPr/>
+          <p:nvPr/>
+        </p:nvSpPr>
+        <p:spPr>
+          <a:xfrm>
+            <a:off x="508000" y="5638800"/>
+            <a:ext cx="11176000" cy="0"/>
           </a:xfrm>
           <a:prstGeom prst="line">
             <a:avLst/>
           </a:prstGeom>
           <a:noFill/>
-          <a:ln w="25400">
+          <a:ln w="12700">
             <a:solidFill>
-              <a:srgbClr val="B2ED1D"/>
+              <a:srgbClr val="CDCED0"/>
             </a:solidFill>
             <a:prstDash val="solid"/>
           </a:ln>
@@ -7837,14 +8191,14 @@
       </p:sp>
       <p:sp>
         <p:nvSpPr>
-          <p:cNvPr id="22" name="Text 19"/>
-          <p:cNvSpPr/>
-          <p:nvPr/>
-        </p:nvSpPr>
-        <p:spPr>
-          <a:xfrm>
-            <a:off x="9055100" y="2298700"/>
-            <a:ext cx="2273300" cy="228600"/>
+          <p:cNvPr id="29" name="Text 26"/>
+          <p:cNvSpPr/>
+          <p:nvPr/>
+        </p:nvSpPr>
+        <p:spPr>
+          <a:xfrm>
+            <a:off x="609600" y="5791200"/>
+            <a:ext cx="10972800" cy="406400"/>
           </a:xfrm>
           <a:prstGeom prst="rect">
             <a:avLst/>
@@ -7865,190 +8219,58 @@
               <a:buNone/>
             </a:pPr>
             <a:r>
-              <a:rPr lang="en-US" sz="950" b="1" spc="80" kern="0" dirty="0">
-                <a:solidFill>
-                  <a:srgbClr val="73B200"/>
+              <a:rPr lang="en-US" sz="1300" dirty="0">
+                <a:solidFill>
+                  <a:srgbClr val="050B14"/>
+                </a:solidFill>
+                <a:latin typeface="IBM Plex Sans" pitchFamily="34" charset="0"/>
+                <a:ea typeface="IBM Plex Sans" pitchFamily="34" charset="-122"/>
+                <a:cs typeface="IBM Plex Sans" pitchFamily="34" charset="-120"/>
+              </a:rPr>
+              <a:t>The first application delivers immediate value. The foundation makes every future use case easier.</a:t>
+            </a:r>
+            <a:endParaRPr lang="en-US" sz="1300" dirty="0"/>
+          </a:p>
+        </p:txBody>
+      </p:sp>
+      <p:sp>
+        <p:nvSpPr>
+          <p:cNvPr id="30" name="Text 27"/>
+          <p:cNvSpPr/>
+          <p:nvPr/>
+        </p:nvSpPr>
+        <p:spPr>
+          <a:xfrm>
+            <a:off x="177800" y="6502400"/>
+            <a:ext cx="8255000" cy="203200"/>
+          </a:xfrm>
+          <a:prstGeom prst="rect">
+            <a:avLst/>
+          </a:prstGeom>
+          <a:noFill/>
+          <a:ln/>
+        </p:spPr>
+        <p:txBody>
+          <a:bodyPr wrap="square" lIns="0" tIns="0" rIns="0" bIns="0" rtlCol="0" anchor="t">
+            <a:normAutofit/>
+          </a:bodyPr>
+          <a:lstStyle/>
+          <a:p>
+            <a:pPr algn="l" indent="0" marL="0">
+              <a:lnSpc>
+                <a:spcPct val="120000"/>
+              </a:lnSpc>
+              <a:buNone/>
+            </a:pPr>
+            <a:r>
+              <a:rPr lang="en-US" sz="850" dirty="0">
+                <a:solidFill>
+                  <a:srgbClr val="A5A5A5"/>
                 </a:solidFill>
                 <a:latin typeface="IBM Plex Mono" pitchFamily="34" charset="0"/>
                 <a:ea typeface="IBM Plex Mono" pitchFamily="34" charset="-122"/>
                 <a:cs typeface="IBM Plex Mono" pitchFamily="34" charset="-120"/>
               </a:rPr>
-              <a:t>PHASE 4</a:t>
-            </a:r>
-            <a:endParaRPr lang="en-US" sz="950" dirty="0"/>
-          </a:p>
-        </p:txBody>
-      </p:sp>
-      <p:sp>
-        <p:nvSpPr>
-          <p:cNvPr id="23" name="Text 20"/>
-          <p:cNvSpPr/>
-          <p:nvPr/>
-        </p:nvSpPr>
-        <p:spPr>
-          <a:xfrm>
-            <a:off x="9055100" y="2679700"/>
-            <a:ext cx="2273300" cy="825500"/>
-          </a:xfrm>
-          <a:prstGeom prst="rect">
-            <a:avLst/>
-          </a:prstGeom>
-          <a:noFill/>
-          <a:ln/>
-        </p:spPr>
-        <p:txBody>
-          <a:bodyPr wrap="square" lIns="0" tIns="0" rIns="0" bIns="0" rtlCol="0" anchor="t">
-            <a:normAutofit/>
-          </a:bodyPr>
-          <a:lstStyle/>
-          <a:p>
-            <a:pPr algn="l" indent="0" marL="0">
-              <a:lnSpc>
-                <a:spcPct val="120000"/>
-              </a:lnSpc>
-              <a:buNone/>
-            </a:pPr>
-            <a:r>
-              <a:rPr lang="en-US" sz="1300" b="1" dirty="0">
-                <a:solidFill>
-                  <a:srgbClr val="050B14"/>
-                </a:solidFill>
-                <a:latin typeface="IBM Plex Sans" pitchFamily="34" charset="0"/>
-                <a:ea typeface="IBM Plex Sans" pitchFamily="34" charset="-122"/>
-                <a:cs typeface="IBM Plex Sans" pitchFamily="34" charset="-120"/>
-              </a:rPr>
-              <a:t>Expand and reuse</a:t>
-            </a:r>
-            <a:endParaRPr lang="en-US" sz="1300" dirty="0"/>
-          </a:p>
-        </p:txBody>
-      </p:sp>
-      <p:sp>
-        <p:nvSpPr>
-          <p:cNvPr id="24" name="Text 21"/>
-          <p:cNvSpPr/>
-          <p:nvPr/>
-        </p:nvSpPr>
-        <p:spPr>
-          <a:xfrm>
-            <a:off x="9055100" y="3733800"/>
-            <a:ext cx="2273300" cy="1320800"/>
-          </a:xfrm>
-          <a:prstGeom prst="rect">
-            <a:avLst/>
-          </a:prstGeom>
-          <a:noFill/>
-          <a:ln/>
-        </p:spPr>
-        <p:txBody>
-          <a:bodyPr wrap="square" lIns="0" tIns="0" rIns="0" bIns="0" rtlCol="0" anchor="t">
-            <a:normAutofit/>
-          </a:bodyPr>
-          <a:lstStyle/>
-          <a:p>
-            <a:pPr algn="l" indent="0" marL="0">
-              <a:lnSpc>
-                <a:spcPct val="140000"/>
-              </a:lnSpc>
-              <a:buNone/>
-            </a:pPr>
-            <a:r>
-              <a:rPr lang="en-US" sz="1000" dirty="0">
-                <a:solidFill>
-                  <a:srgbClr val="585C62"/>
-                </a:solidFill>
-                <a:latin typeface="IBM Plex Sans" pitchFamily="34" charset="0"/>
-                <a:ea typeface="IBM Plex Sans" pitchFamily="34" charset="-122"/>
-                <a:cs typeface="IBM Plex Sans" pitchFamily="34" charset="-120"/>
-              </a:rPr>
-              <a:t>Add more assets, applications, analytics, digital twins and AI workflows.</a:t>
-            </a:r>
-            <a:endParaRPr lang="en-US" sz="1000" dirty="0"/>
-          </a:p>
-        </p:txBody>
-      </p:sp>
-      <p:sp>
-        <p:nvSpPr>
-          <p:cNvPr id="25" name="Text 22"/>
-          <p:cNvSpPr/>
-          <p:nvPr/>
-        </p:nvSpPr>
-        <p:spPr>
-          <a:xfrm>
-            <a:off x="609600" y="5740400"/>
-            <a:ext cx="10972800" cy="406400"/>
-          </a:xfrm>
-          <a:prstGeom prst="rect">
-            <a:avLst/>
-          </a:prstGeom>
-          <a:noFill/>
-          <a:ln/>
-        </p:spPr>
-        <p:txBody>
-          <a:bodyPr wrap="square" lIns="0" tIns="0" rIns="0" bIns="0" rtlCol="0" anchor="t">
-            <a:normAutofit/>
-          </a:bodyPr>
-          <a:lstStyle/>
-          <a:p>
-            <a:pPr algn="l" indent="0" marL="0">
-              <a:lnSpc>
-                <a:spcPct val="120000"/>
-              </a:lnSpc>
-              <a:buNone/>
-            </a:pPr>
-            <a:r>
-              <a:rPr lang="en-US" sz="1200" b="1" dirty="0">
-                <a:solidFill>
-                  <a:srgbClr val="050B14"/>
-                </a:solidFill>
-                <a:latin typeface="IBM Plex Sans" pitchFamily="34" charset="0"/>
-                <a:ea typeface="IBM Plex Sans" pitchFamily="34" charset="-122"/>
-                <a:cs typeface="IBM Plex Sans" pitchFamily="34" charset="-120"/>
-              </a:rPr>
-              <a:t>The first application delivers immediate value. The foundation makes every future use case easier.</a:t>
-            </a:r>
-            <a:endParaRPr lang="en-US" sz="1200" dirty="0"/>
-          </a:p>
-        </p:txBody>
-      </p:sp>
-      <p:sp>
-        <p:nvSpPr>
-          <p:cNvPr id="26" name="Text 23"/>
-          <p:cNvSpPr/>
-          <p:nvPr/>
-        </p:nvSpPr>
-        <p:spPr>
-          <a:xfrm>
-            <a:off x="177800" y="6502400"/>
-            <a:ext cx="8255000" cy="203200"/>
-          </a:xfrm>
-          <a:prstGeom prst="rect">
-            <a:avLst/>
-          </a:prstGeom>
-          <a:noFill/>
-          <a:ln/>
-        </p:spPr>
-        <p:txBody>
-          <a:bodyPr wrap="square" lIns="0" tIns="0" rIns="0" bIns="0" rtlCol="0" anchor="t">
-            <a:normAutofit/>
-          </a:bodyPr>
-          <a:lstStyle/>
-          <a:p>
-            <a:pPr algn="l" indent="0" marL="0">
-              <a:lnSpc>
-                <a:spcPct val="120000"/>
-              </a:lnSpc>
-              <a:buNone/>
-            </a:pPr>
-            <a:r>
-              <a:rPr lang="en-US" sz="850" dirty="0">
-                <a:solidFill>
-                  <a:srgbClr val="A5A5A5"/>
-                </a:solidFill>
-                <a:latin typeface="IBM Plex Mono" pitchFamily="34" charset="0"/>
-                <a:ea typeface="IBM Plex Mono" pitchFamily="34" charset="-122"/>
-                <a:cs typeface="IBM Plex Mono" pitchFamily="34" charset="-120"/>
-              </a:rPr>
               <a:t>Copyright © 2026 Tier0. All rights reserved.</a:t>
             </a:r>
             <a:endParaRPr lang="en-US" sz="850" dirty="0"/>
@@ -8057,7 +8279,7 @@
       </p:sp>
       <p:sp>
         <p:nvSpPr>
-          <p:cNvPr id="27" name="Text 24"/>
+          <p:cNvPr id="31" name="Text 28"/>
           <p:cNvSpPr/>
           <p:nvPr/>
         </p:nvSpPr>
@@ -8163,8 +8385,140 @@
         </p:nvSpPr>
         <p:spPr>
           <a:xfrm>
-            <a:off x="609600" y="2692400"/>
-            <a:ext cx="10795000" cy="609600"/>
+            <a:off x="609600" y="2540000"/>
+            <a:ext cx="9144000" cy="609600"/>
+          </a:xfrm>
+          <a:prstGeom prst="rect">
+            <a:avLst/>
+          </a:prstGeom>
+          <a:noFill/>
+          <a:ln/>
+        </p:spPr>
+        <p:txBody>
+          <a:bodyPr wrap="square" lIns="0" tIns="0" rIns="0" bIns="0" rtlCol="0" anchor="t">
+            <a:normAutofit/>
+          </a:bodyPr>
+          <a:lstStyle/>
+          <a:p>
+            <a:pPr algn="l" indent="0" marL="0">
+              <a:lnSpc>
+                <a:spcPct val="115000"/>
+              </a:lnSpc>
+              <a:buNone/>
+            </a:pPr>
+            <a:r>
+              <a:rPr lang="en-US" sz="3000" dirty="0">
+                <a:solidFill>
+                  <a:srgbClr val="FFFFFF"/>
+                </a:solidFill>
+                <a:latin typeface="IBM Plex Sans" pitchFamily="34" charset="0"/>
+                <a:ea typeface="IBM Plex Sans" pitchFamily="34" charset="-122"/>
+                <a:cs typeface="IBM Plex Sans" pitchFamily="34" charset="-120"/>
+              </a:rPr>
+              <a:t>Build the Unified Data Foundation.</a:t>
+            </a:r>
+            <a:endParaRPr lang="en-US" sz="3000" dirty="0"/>
+          </a:p>
+        </p:txBody>
+      </p:sp>
+      <p:sp>
+        <p:nvSpPr>
+          <p:cNvPr id="4" name="Text 1"/>
+          <p:cNvSpPr/>
+          <p:nvPr/>
+        </p:nvSpPr>
+        <p:spPr>
+          <a:xfrm>
+            <a:off x="609600" y="3200400"/>
+            <a:ext cx="9144000" cy="609600"/>
+          </a:xfrm>
+          <a:prstGeom prst="rect">
+            <a:avLst/>
+          </a:prstGeom>
+          <a:noFill/>
+          <a:ln/>
+        </p:spPr>
+        <p:txBody>
+          <a:bodyPr wrap="square" lIns="0" tIns="0" rIns="0" bIns="0" rtlCol="0" anchor="t">
+            <a:normAutofit/>
+          </a:bodyPr>
+          <a:lstStyle/>
+          <a:p>
+            <a:pPr algn="l" indent="0" marL="0">
+              <a:lnSpc>
+                <a:spcPct val="115000"/>
+              </a:lnSpc>
+              <a:buNone/>
+            </a:pPr>
+            <a:r>
+              <a:rPr lang="en-US" sz="3000" dirty="0">
+                <a:solidFill>
+                  <a:srgbClr val="B2ED1D"/>
+                </a:solidFill>
+                <a:latin typeface="IBM Plex Sans" pitchFamily="34" charset="0"/>
+                <a:ea typeface="IBM Plex Sans" pitchFamily="34" charset="-122"/>
+                <a:cs typeface="IBM Plex Sans" pitchFamily="34" charset="-120"/>
+              </a:rPr>
+              <a:t>Generate Connected Applications.</a:t>
+            </a:r>
+            <a:endParaRPr lang="en-US" sz="3000" dirty="0"/>
+          </a:p>
+        </p:txBody>
+      </p:sp>
+      <p:sp>
+        <p:nvSpPr>
+          <p:cNvPr id="5" name="Text 2"/>
+          <p:cNvSpPr/>
+          <p:nvPr/>
+        </p:nvSpPr>
+        <p:spPr>
+          <a:xfrm>
+            <a:off x="609600" y="3860800"/>
+            <a:ext cx="9144000" cy="609600"/>
+          </a:xfrm>
+          <a:prstGeom prst="rect">
+            <a:avLst/>
+          </a:prstGeom>
+          <a:noFill/>
+          <a:ln/>
+        </p:spPr>
+        <p:txBody>
+          <a:bodyPr wrap="square" lIns="0" tIns="0" rIns="0" bIns="0" rtlCol="0" anchor="t">
+            <a:normAutofit/>
+          </a:bodyPr>
+          <a:lstStyle/>
+          <a:p>
+            <a:pPr algn="l" indent="0" marL="0">
+              <a:lnSpc>
+                <a:spcPct val="115000"/>
+              </a:lnSpc>
+              <a:buNone/>
+            </a:pPr>
+            <a:r>
+              <a:rPr lang="en-US" sz="3000" dirty="0">
+                <a:solidFill>
+                  <a:srgbClr val="7C838C"/>
+                </a:solidFill>
+                <a:latin typeface="IBM Plex Sans" pitchFamily="34" charset="0"/>
+                <a:ea typeface="IBM Plex Sans" pitchFamily="34" charset="-122"/>
+                <a:cs typeface="IBM Plex Sans" pitchFamily="34" charset="-120"/>
+              </a:rPr>
+              <a:t>Move toward Operational Intelligence.</a:t>
+            </a:r>
+            <a:endParaRPr lang="en-US" sz="3000" dirty="0"/>
+          </a:p>
+        </p:txBody>
+      </p:sp>
+      <p:sp>
+        <p:nvSpPr>
+          <p:cNvPr id="6" name="Text 3"/>
+          <p:cNvSpPr/>
+          <p:nvPr/>
+        </p:nvSpPr>
+        <p:spPr>
+          <a:xfrm>
+            <a:off x="609600" y="5080000"/>
+            <a:ext cx="8890000" cy="304800"/>
           </a:xfrm>
           <a:prstGeom prst="rect">
             <a:avLst/>
@@ -8185,139 +8539,7 @@
               <a:buNone/>
             </a:pPr>
             <a:r>
-              <a:rPr lang="en-US" sz="2800" b="1" dirty="0">
-                <a:solidFill>
-                  <a:srgbClr val="FFFFFF"/>
-                </a:solidFill>
-                <a:latin typeface="Tektur" pitchFamily="34" charset="0"/>
-                <a:ea typeface="Tektur" pitchFamily="34" charset="-122"/>
-                <a:cs typeface="Tektur" pitchFamily="34" charset="-120"/>
-              </a:rPr>
-              <a:t>Build the Unified Data Foundation.</a:t>
-            </a:r>
-            <a:endParaRPr lang="en-US" sz="2800" dirty="0"/>
-          </a:p>
-        </p:txBody>
-      </p:sp>
-      <p:sp>
-        <p:nvSpPr>
-          <p:cNvPr id="4" name="Text 1"/>
-          <p:cNvSpPr/>
-          <p:nvPr/>
-        </p:nvSpPr>
-        <p:spPr>
-          <a:xfrm>
-            <a:off x="609600" y="3327400"/>
-            <a:ext cx="10795000" cy="609600"/>
-          </a:xfrm>
-          <a:prstGeom prst="rect">
-            <a:avLst/>
-          </a:prstGeom>
-          <a:noFill/>
-          <a:ln/>
-        </p:spPr>
-        <p:txBody>
-          <a:bodyPr wrap="square" lIns="0" tIns="0" rIns="0" bIns="0" rtlCol="0" anchor="t">
-            <a:normAutofit/>
-          </a:bodyPr>
-          <a:lstStyle/>
-          <a:p>
-            <a:pPr algn="l" indent="0" marL="0">
-              <a:lnSpc>
-                <a:spcPct val="120000"/>
-              </a:lnSpc>
-              <a:buNone/>
-            </a:pPr>
-            <a:r>
-              <a:rPr lang="en-US" sz="2800" b="1" dirty="0">
-                <a:solidFill>
-                  <a:srgbClr val="B2ED1D"/>
-                </a:solidFill>
-                <a:latin typeface="Tektur" pitchFamily="34" charset="0"/>
-                <a:ea typeface="Tektur" pitchFamily="34" charset="-122"/>
-                <a:cs typeface="Tektur" pitchFamily="34" charset="-120"/>
-              </a:rPr>
-              <a:t>Generate Connected Applications.</a:t>
-            </a:r>
-            <a:endParaRPr lang="en-US" sz="2800" dirty="0"/>
-          </a:p>
-        </p:txBody>
-      </p:sp>
-      <p:sp>
-        <p:nvSpPr>
-          <p:cNvPr id="5" name="Text 2"/>
-          <p:cNvSpPr/>
-          <p:nvPr/>
-        </p:nvSpPr>
-        <p:spPr>
-          <a:xfrm>
-            <a:off x="609600" y="3962400"/>
-            <a:ext cx="10795000" cy="609600"/>
-          </a:xfrm>
-          <a:prstGeom prst="rect">
-            <a:avLst/>
-          </a:prstGeom>
-          <a:noFill/>
-          <a:ln/>
-        </p:spPr>
-        <p:txBody>
-          <a:bodyPr wrap="square" lIns="0" tIns="0" rIns="0" bIns="0" rtlCol="0" anchor="t">
-            <a:normAutofit/>
-          </a:bodyPr>
-          <a:lstStyle/>
-          <a:p>
-            <a:pPr algn="l" indent="0" marL="0">
-              <a:lnSpc>
-                <a:spcPct val="120000"/>
-              </a:lnSpc>
-              <a:buNone/>
-            </a:pPr>
-            <a:r>
-              <a:rPr lang="en-US" sz="2800" b="1" dirty="0">
-                <a:solidFill>
-                  <a:srgbClr val="7C838C"/>
-                </a:solidFill>
-                <a:latin typeface="Tektur" pitchFamily="34" charset="0"/>
-                <a:ea typeface="Tektur" pitchFamily="34" charset="-122"/>
-                <a:cs typeface="Tektur" pitchFamily="34" charset="-120"/>
-              </a:rPr>
-              <a:t>Move toward Operational Intelligence.</a:t>
-            </a:r>
-            <a:endParaRPr lang="en-US" sz="2800" dirty="0"/>
-          </a:p>
-        </p:txBody>
-      </p:sp>
-      <p:sp>
-        <p:nvSpPr>
-          <p:cNvPr id="6" name="Text 3"/>
-          <p:cNvSpPr/>
-          <p:nvPr/>
-        </p:nvSpPr>
-        <p:spPr>
-          <a:xfrm>
-            <a:off x="609600" y="5308600"/>
-            <a:ext cx="9652000" cy="304800"/>
-          </a:xfrm>
-          <a:prstGeom prst="rect">
-            <a:avLst/>
-          </a:prstGeom>
-          <a:noFill/>
-          <a:ln/>
-        </p:spPr>
-        <p:txBody>
-          <a:bodyPr wrap="square" lIns="0" tIns="0" rIns="0" bIns="0" rtlCol="0" anchor="t">
-            <a:normAutofit/>
-          </a:bodyPr>
-          <a:lstStyle/>
-          <a:p>
-            <a:pPr algn="l" indent="0" marL="0">
-              <a:lnSpc>
-                <a:spcPct val="120000"/>
-              </a:lnSpc>
-              <a:buNone/>
-            </a:pPr>
-            <a:r>
-              <a:rPr lang="en-US" sz="1100" dirty="0">
+              <a:rPr lang="en-US" sz="1200" dirty="0">
                 <a:solidFill>
                   <a:srgbClr val="A4A9AF"/>
                 </a:solidFill>
@@ -8327,7 +8549,7 @@
               </a:rPr>
               <a:t>Tier0 Platform · www.tier0.app</a:t>
             </a:r>
-            <a:endParaRPr lang="en-US" sz="1100" dirty="0"/>
+            <a:endParaRPr lang="en-US" sz="1200" dirty="0"/>
           </a:p>
         </p:txBody>
       </p:sp>
@@ -8339,8 +8561,8 @@
         </p:nvSpPr>
         <p:spPr>
           <a:xfrm>
-            <a:off x="609600" y="5778500"/>
-            <a:ext cx="9652000" cy="304800"/>
+            <a:off x="609600" y="5486400"/>
+            <a:ext cx="8890000" cy="304800"/>
           </a:xfrm>
           <a:prstGeom prst="rect">
             <a:avLst/>
@@ -8361,7 +8583,7 @@
               <a:buNone/>
             </a:pPr>
             <a:r>
-              <a:rPr lang="en-US" sz="950" dirty="0">
+              <a:rPr lang="en-US" sz="1000" dirty="0">
                 <a:solidFill>
                   <a:srgbClr val="66717D"/>
                 </a:solidFill>
@@ -8369,9 +8591,9 @@
                 <a:ea typeface="IBM Plex Mono" pitchFamily="34" charset="-122"/>
                 <a:cs typeface="IBM Plex Mono" pitchFamily="34" charset="-120"/>
               </a:rPr>
-              <a:t>[ sales@tier0.app ]</a:t>
-            </a:r>
-            <a:endParaRPr lang="en-US" sz="950" dirty="0"/>
+              <a:t>sales@tier0.app</a:t>
+            </a:r>
+            <a:endParaRPr lang="en-US" sz="1000" dirty="0"/>
           </a:p>
         </p:txBody>
       </p:sp>
@@ -8449,6 +8671,105 @@
               <a:t>08 / 08</a:t>
             </a:r>
             <a:endParaRPr lang="en-US" sz="850" dirty="0"/>
+          </a:p>
+        </p:txBody>
+      </p:sp>
+      <p:sp>
+        <p:nvSpPr>
+          <p:cNvPr id="10" name="Shape 7"/>
+          <p:cNvSpPr/>
+          <p:nvPr/>
+        </p:nvSpPr>
+        <p:spPr>
+          <a:xfrm>
+            <a:off x="10261600" y="4800600"/>
+            <a:ext cx="1422400" cy="1422400"/>
+          </a:xfrm>
+          <a:prstGeom prst="rect">
+            <a:avLst/>
+          </a:prstGeom>
+          <a:solidFill>
+            <a:srgbClr val="0E1824"/>
+          </a:solidFill>
+          <a:ln w="12700">
+            <a:solidFill>
+              <a:srgbClr val="66717D"/>
+            </a:solidFill>
+            <a:prstDash val="solid"/>
+          </a:ln>
+        </p:spPr>
+      </p:sp>
+      <p:pic>
+        <p:nvPicPr>
+          <p:cNvPr id="11" name="Image 1" descr="Tier0 website QR code">    </p:cNvPr>
+          <p:cNvPicPr>
+            <a:picLocks noChangeAspect="1"/>
+          </p:cNvPicPr>
+          <p:nvPr/>
+        </p:nvPicPr>
+        <p:blipFill>
+          <a:blip r:embed="rId2">
+            <a:extLst>
+              <a:ext uri="{96DAC541-7B7A-43D3-8B79-37D633B846F1}">
+                <asvg:svgBlip xmlns:asvg="http://schemas.microsoft.com/office/drawing/2016/SVG/main" r:embed="rId3"/>
+              </a:ext>
+            </a:extLst>
+          </a:blip>
+          <a:stretch>
+            <a:fillRect/>
+          </a:stretch>
+        </p:blipFill>
+        <p:spPr>
+          <a:xfrm>
+            <a:off x="10414000" y="4953000"/>
+            <a:ext cx="1117600" cy="1117600"/>
+          </a:xfrm>
+          <a:prstGeom prst="rect">
+            <a:avLst/>
+          </a:prstGeom>
+        </p:spPr>
+      </p:pic>
+      <p:sp>
+        <p:nvSpPr>
+          <p:cNvPr id="12" name="Text 8"/>
+          <p:cNvSpPr/>
+          <p:nvPr/>
+        </p:nvSpPr>
+        <p:spPr>
+          <a:xfrm>
+            <a:off x="10261600" y="6324600"/>
+            <a:ext cx="1422400" cy="177800"/>
+          </a:xfrm>
+          <a:prstGeom prst="rect">
+            <a:avLst/>
+          </a:prstGeom>
+          <a:noFill/>
+          <a:ln/>
+        </p:spPr>
+        <p:txBody>
+          <a:bodyPr wrap="square" lIns="0" tIns="0" rIns="0" bIns="0" rtlCol="0" anchor="t">
+            <a:normAutofit/>
+          </a:bodyPr>
+          <a:lstStyle/>
+          <a:p>
+            <a:pPr algn="ctr" indent="0" marL="0">
+              <a:lnSpc>
+                <a:spcPct val="120000"/>
+              </a:lnSpc>
+              <a:buNone/>
+            </a:pPr>
+            <a:r>
+              <a:rPr lang="en-US" sz="800" dirty="0">
+                <a:solidFill>
+                  <a:srgbClr val="A4A9AF"/>
+                </a:solidFill>
+                <a:latin typeface="IBM Plex Mono" pitchFamily="34" charset="0"/>
+                <a:ea typeface="IBM Plex Mono" pitchFamily="34" charset="-122"/>
+                <a:cs typeface="IBM Plex Mono" pitchFamily="34" charset="-120"/>
+              </a:rPr>
+              <a:t>www.tier0.app</a:t>
+            </a:r>
+            <a:endParaRPr lang="en-US" sz="800" dirty="0"/>
           </a:p>
         </p:txBody>
       </p:sp>
@@ -8503,7 +8824,7 @@
     </a:clrScheme>
     <a:fontScheme name="Office">
       <a:majorFont>
-        <a:latin typeface="Tektur"/>
+        <a:latin typeface="IBM Plex Sans"/>
         <a:ea typeface=""/>
         <a:cs typeface=""/>
         <a:font script="Jpan" typeface="游ゴシック Light"/>
